--- a/documents/informational sheet power point.pptx
+++ b/documents/informational sheet power point.pptx
@@ -6,27 +6,33 @@
   </p:sldMasterIdLst>
   <p:sldIdLst>
     <p:sldId id="256" r:id="rId2"/>
-    <p:sldId id="276" r:id="rId3"/>
-    <p:sldId id="257" r:id="rId4"/>
+    <p:sldId id="257" r:id="rId3"/>
+    <p:sldId id="276" r:id="rId4"/>
     <p:sldId id="258" r:id="rId5"/>
-    <p:sldId id="277" r:id="rId6"/>
-    <p:sldId id="259" r:id="rId7"/>
-    <p:sldId id="260" r:id="rId8"/>
-    <p:sldId id="261" r:id="rId9"/>
-    <p:sldId id="262" r:id="rId10"/>
-    <p:sldId id="263" r:id="rId11"/>
-    <p:sldId id="264" r:id="rId12"/>
-    <p:sldId id="265" r:id="rId13"/>
-    <p:sldId id="266" r:id="rId14"/>
-    <p:sldId id="267" r:id="rId15"/>
-    <p:sldId id="268" r:id="rId16"/>
-    <p:sldId id="275" r:id="rId17"/>
-    <p:sldId id="269" r:id="rId18"/>
-    <p:sldId id="270" r:id="rId19"/>
-    <p:sldId id="271" r:id="rId20"/>
-    <p:sldId id="272" r:id="rId21"/>
-    <p:sldId id="273" r:id="rId22"/>
-    <p:sldId id="274" r:id="rId23"/>
+    <p:sldId id="259" r:id="rId6"/>
+    <p:sldId id="260" r:id="rId7"/>
+    <p:sldId id="261" r:id="rId8"/>
+    <p:sldId id="277" r:id="rId9"/>
+    <p:sldId id="263" r:id="rId10"/>
+    <p:sldId id="264" r:id="rId11"/>
+    <p:sldId id="265" r:id="rId12"/>
+    <p:sldId id="266" r:id="rId13"/>
+    <p:sldId id="267" r:id="rId14"/>
+    <p:sldId id="268" r:id="rId15"/>
+    <p:sldId id="275" r:id="rId16"/>
+    <p:sldId id="278" r:id="rId17"/>
+    <p:sldId id="279" r:id="rId18"/>
+    <p:sldId id="281" r:id="rId19"/>
+    <p:sldId id="280" r:id="rId20"/>
+    <p:sldId id="269" r:id="rId21"/>
+    <p:sldId id="270" r:id="rId22"/>
+    <p:sldId id="283" r:id="rId23"/>
+    <p:sldId id="282" r:id="rId24"/>
+    <p:sldId id="273" r:id="rId25"/>
+    <p:sldId id="271" r:id="rId26"/>
+    <p:sldId id="272" r:id="rId27"/>
+    <p:sldId id="274" r:id="rId28"/>
+    <p:sldId id="284" r:id="rId29"/>
   </p:sldIdLst>
   <p:sldSz cx="12192000" cy="6858000"/>
   <p:notesSz cx="6858000" cy="9144000"/>
@@ -323,7 +329,7 @@
           <a:p>
             <a:fld id="{5BCAD085-E8A6-8845-BD4E-CB4CCA059FC4}" type="datetimeFigureOut">
               <a:rPr lang="en-US" smtClean="0"/>
-              <a:t>10/4/2026</a:t>
+              <a:t>10/18/2026</a:t>
             </a:fld>
             <a:endParaRPr lang="en-US"/>
           </a:p>
@@ -491,7 +497,7 @@
           <a:p>
             <a:fld id="{5BCAD085-E8A6-8845-BD4E-CB4CCA059FC4}" type="datetimeFigureOut">
               <a:rPr lang="en-US" smtClean="0"/>
-              <a:t>10/4/2026</a:t>
+              <a:t>10/18/2026</a:t>
             </a:fld>
             <a:endParaRPr lang="en-US"/>
           </a:p>
@@ -669,7 +675,7 @@
           <a:p>
             <a:fld id="{5BCAD085-E8A6-8845-BD4E-CB4CCA059FC4}" type="datetimeFigureOut">
               <a:rPr lang="en-US" smtClean="0"/>
-              <a:t>10/4/2026</a:t>
+              <a:t>10/18/2026</a:t>
             </a:fld>
             <a:endParaRPr lang="en-US"/>
           </a:p>
@@ -837,7 +843,7 @@
           <a:p>
             <a:fld id="{5BCAD085-E8A6-8845-BD4E-CB4CCA059FC4}" type="datetimeFigureOut">
               <a:rPr lang="en-US" smtClean="0"/>
-              <a:t>10/4/2026</a:t>
+              <a:t>10/18/2026</a:t>
             </a:fld>
             <a:endParaRPr lang="en-US"/>
           </a:p>
@@ -1082,7 +1088,7 @@
           <a:p>
             <a:fld id="{5BCAD085-E8A6-8845-BD4E-CB4CCA059FC4}" type="datetimeFigureOut">
               <a:rPr lang="en-US" smtClean="0"/>
-              <a:t>10/4/2026</a:t>
+              <a:t>10/18/2026</a:t>
             </a:fld>
             <a:endParaRPr lang="en-US"/>
           </a:p>
@@ -1367,7 +1373,7 @@
           <a:p>
             <a:fld id="{5BCAD085-E8A6-8845-BD4E-CB4CCA059FC4}" type="datetimeFigureOut">
               <a:rPr lang="en-US" smtClean="0"/>
-              <a:t>10/4/2026</a:t>
+              <a:t>10/18/2026</a:t>
             </a:fld>
             <a:endParaRPr lang="en-US"/>
           </a:p>
@@ -1786,7 +1792,7 @@
           <a:p>
             <a:fld id="{5BCAD085-E8A6-8845-BD4E-CB4CCA059FC4}" type="datetimeFigureOut">
               <a:rPr lang="en-US" smtClean="0"/>
-              <a:t>10/4/2026</a:t>
+              <a:t>10/18/2026</a:t>
             </a:fld>
             <a:endParaRPr lang="en-US"/>
           </a:p>
@@ -1903,7 +1909,7 @@
           <a:p>
             <a:fld id="{5BCAD085-E8A6-8845-BD4E-CB4CCA059FC4}" type="datetimeFigureOut">
               <a:rPr lang="en-US" smtClean="0"/>
-              <a:t>10/4/2026</a:t>
+              <a:t>10/18/2026</a:t>
             </a:fld>
             <a:endParaRPr lang="en-US"/>
           </a:p>
@@ -1998,7 +2004,7 @@
           <a:p>
             <a:fld id="{5BCAD085-E8A6-8845-BD4E-CB4CCA059FC4}" type="datetimeFigureOut">
               <a:rPr lang="en-US" smtClean="0"/>
-              <a:t>10/4/2026</a:t>
+              <a:t>10/18/2026</a:t>
             </a:fld>
             <a:endParaRPr lang="en-US"/>
           </a:p>
@@ -2273,7 +2279,7 @@
           <a:p>
             <a:fld id="{5BCAD085-E8A6-8845-BD4E-CB4CCA059FC4}" type="datetimeFigureOut">
               <a:rPr lang="en-US" smtClean="0"/>
-              <a:t>10/4/2026</a:t>
+              <a:t>10/18/2026</a:t>
             </a:fld>
             <a:endParaRPr lang="en-US"/>
           </a:p>
@@ -2525,7 +2531,7 @@
           <a:p>
             <a:fld id="{5BCAD085-E8A6-8845-BD4E-CB4CCA059FC4}" type="datetimeFigureOut">
               <a:rPr lang="en-US" smtClean="0"/>
-              <a:t>10/4/2026</a:t>
+              <a:t>10/18/2026</a:t>
             </a:fld>
             <a:endParaRPr lang="en-US"/>
           </a:p>
@@ -2736,7 +2742,7 @@
           <a:p>
             <a:fld id="{5BCAD085-E8A6-8845-BD4E-CB4CCA059FC4}" type="datetimeFigureOut">
               <a:rPr lang="en-US" smtClean="0"/>
-              <a:t>10/4/2026</a:t>
+              <a:t>10/18/2026</a:t>
             </a:fld>
             <a:endParaRPr lang="en-US"/>
           </a:p>
@@ -3120,7 +3126,7 @@
         <p:spPr>
           <a:xfrm>
             <a:off x="2383947" y="718458"/>
-            <a:ext cx="7393626" cy="1292662"/>
+            <a:ext cx="7393627" cy="1046440"/>
           </a:xfrm>
           <a:prstGeom prst="rect">
             <a:avLst/>
@@ -3154,15 +3160,6 @@
               <a:t>video</a:t>
             </a:r>
             <a:endParaRPr dirty="0"/>
-          </a:p>
-          <a:p>
-            <a:pPr algn="ctr">
-              <a:defRPr sz="1600"/>
-            </a:pPr>
-            <a:r>
-              <a:rPr dirty="0"/>
-              <a:t>Virginia Anne Nichols &amp; Claus Krogh Madsen</a:t>
-            </a:r>
           </a:p>
         </p:txBody>
       </p:sp>
@@ -3279,7 +3276,7 @@
               <a:defRPr sz="3000" b="1"/>
             </a:pPr>
             <a:r>
-              <a:t>Funding and project partners</a:t>
+              <a:t>Is it safe to eat?</a:t>
             </a:r>
           </a:p>
         </p:txBody>
@@ -3293,7 +3290,7 @@
         <p:spPr>
           <a:xfrm>
             <a:off x="731520" y="1234440"/>
-            <a:ext cx="10789920" cy="5029200"/>
+            <a:ext cx="10789920" cy="2015936"/>
           </a:xfrm>
           <a:prstGeom prst="rect">
             <a:avLst/>
@@ -3310,10 +3307,11 @@
               <a:spcAft>
                 <a:spcPts val="1200"/>
               </a:spcAft>
-              <a:defRPr sz="1900"/>
-            </a:pPr>
-            <a:r>
-              <a:t>This citizen science project is part of an NNF Plant2Food research project (Grant #NNF22SA0081019).</a:t>
+              <a:defRPr sz="2100"/>
+            </a:pPr>
+            <a:r>
+              <a:rPr dirty="0"/>
+              <a:t>Yes.</a:t>
             </a:r>
           </a:p>
           <a:p>
@@ -3321,10 +3319,11 @@
               <a:spcAft>
                 <a:spcPts val="1200"/>
               </a:spcAft>
-              <a:defRPr sz="1900"/>
-            </a:pPr>
-            <a:r>
-              <a:t>Aarhus University: Department of Agroecology and Department of Food Science.</a:t>
+              <a:defRPr sz="2100"/>
+            </a:pPr>
+            <a:r>
+              <a:rPr dirty="0"/>
+              <a:t>The grain used to make the flour you will receive was tested at an independent laboratory to ensure it is safe for human consumption.</a:t>
             </a:r>
           </a:p>
           <a:p>
@@ -3332,33 +3331,17 @@
               <a:spcAft>
                 <a:spcPts val="1200"/>
               </a:spcAft>
-              <a:defRPr sz="1900"/>
-            </a:pPr>
-            <a:r>
-              <a:t>Wageningen University and Research, Netherlands.</a:t>
-            </a:r>
-          </a:p>
-          <a:p>
-            <a:pPr>
-              <a:spcAft>
-                <a:spcPts val="1200"/>
-              </a:spcAft>
-              <a:defRPr sz="1900"/>
-            </a:pPr>
-            <a:r>
-              <a:t>Meyers, a Danish food enterprise.</a:t>
-            </a:r>
-          </a:p>
-          <a:p>
-            <a:pPr>
-              <a:spcAft>
-                <a:spcPts val="1200"/>
-              </a:spcAft>
-              <a:defRPr sz="1900"/>
-            </a:pPr>
-            <a:r>
-              <a:t>More information: projects.au.dk/plant2food/funded-projects/goodgrain</a:t>
-            </a:r>
+              <a:defRPr sz="2100"/>
+            </a:pPr>
+            <a:r>
+              <a:rPr dirty="0"/>
+              <a:t>The laboratory results are available in the GoodGrain Lab Results PDF</a:t>
+            </a:r>
+            <a:r>
+              <a:rPr lang="en-US" dirty="0"/>
+              <a:t>, which you can access through the intake survey and/or the Informational Sheet website. </a:t>
+            </a:r>
+            <a:endParaRPr dirty="0"/>
           </a:p>
         </p:txBody>
       </p:sp>
@@ -3444,7 +3427,7 @@
               <a:defRPr sz="3000" b="1"/>
             </a:pPr>
             <a:r>
-              <a:t>Is it safe to eat?</a:t>
+              <a:t>Is the perennial rye genetically modified?</a:t>
             </a:r>
           </a:p>
         </p:txBody>
@@ -3458,7 +3441,7 @@
         <p:spPr>
           <a:xfrm>
             <a:off x="731520" y="1234440"/>
-            <a:ext cx="10789920" cy="5029200"/>
+            <a:ext cx="10789920" cy="1785104"/>
           </a:xfrm>
           <a:prstGeom prst="rect">
             <a:avLst/>
@@ -3475,10 +3458,11 @@
               <a:spcAft>
                 <a:spcPts val="1200"/>
               </a:spcAft>
-              <a:defRPr sz="2100"/>
-            </a:pPr>
-            <a:r>
-              <a:t>Yes.</a:t>
+              <a:defRPr sz="2000"/>
+            </a:pPr>
+            <a:r>
+              <a:rPr dirty="0"/>
+              <a:t>No.</a:t>
             </a:r>
           </a:p>
           <a:p>
@@ -3486,10 +3470,11 @@
               <a:spcAft>
                 <a:spcPts val="1200"/>
               </a:spcAft>
-              <a:defRPr sz="2100"/>
-            </a:pPr>
-            <a:r>
-              <a:t>The grain used to make the flour you will receive was tested at an independent laboratory to ensure it is safe for human consumption.</a:t>
+              <a:defRPr sz="2000"/>
+            </a:pPr>
+            <a:r>
+              <a:rPr dirty="0"/>
+              <a:t>This variety was developed using traditional breeding methods.</a:t>
             </a:r>
           </a:p>
           <a:p>
@@ -3497,11 +3482,33 @@
               <a:spcAft>
                 <a:spcPts val="1200"/>
               </a:spcAft>
-              <a:defRPr sz="2100"/>
-            </a:pPr>
-            <a:r>
-              <a:t>The laboratory results are available in the GoodGrain Lab Results PDF.</a:t>
-            </a:r>
+              <a:defRPr sz="2000"/>
+            </a:pPr>
+            <a:r>
+              <a:rPr dirty="0"/>
+              <a:t>Plants were crossed by hand, followed by selection based on their physical characteristics.</a:t>
+            </a:r>
+          </a:p>
+          <a:p>
+            <a:pPr>
+              <a:spcAft>
+                <a:spcPts val="1200"/>
+              </a:spcAft>
+              <a:defRPr sz="2000"/>
+            </a:pPr>
+            <a:r>
+              <a:rPr lang="en-US" dirty="0"/>
+              <a:t>You can see a scientific publication </a:t>
+            </a:r>
+            <a:r>
+              <a:rPr dirty="0"/>
+              <a:t>from 1986 for more information</a:t>
+            </a:r>
+            <a:r>
+              <a:rPr lang="en-US" dirty="0"/>
+              <a:t>:</a:t>
+            </a:r>
+            <a:endParaRPr dirty="0"/>
           </a:p>
         </p:txBody>
       </p:sp>
@@ -3536,6 +3543,36 @@
           </a:p>
         </p:txBody>
       </p:sp>
+      <p:pic>
+        <p:nvPicPr>
+          <p:cNvPr id="6" name="Picture 5">
+            <a:extLst>
+              <a:ext uri="{FF2B5EF4-FFF2-40B4-BE49-F238E27FC236}">
+                <a16:creationId xmlns:a16="http://schemas.microsoft.com/office/drawing/2014/main" id="{995DAE88-9238-64B0-F3AA-4D7C1A5A106A}"/>
+              </a:ext>
+            </a:extLst>
+          </p:cNvPr>
+          <p:cNvPicPr>
+            <a:picLocks noChangeAspect="1"/>
+          </p:cNvPicPr>
+          <p:nvPr/>
+        </p:nvPicPr>
+        <p:blipFill>
+          <a:blip r:embed="rId2"/>
+          <a:stretch>
+            <a:fillRect/>
+          </a:stretch>
+        </p:blipFill>
+        <p:spPr>
+          <a:xfrm>
+            <a:off x="1586912" y="3019544"/>
+            <a:ext cx="8759356" cy="3031228"/>
+          </a:xfrm>
+          <a:prstGeom prst="rect">
+            <a:avLst/>
+          </a:prstGeom>
+        </p:spPr>
+      </p:pic>
     </p:spTree>
   </p:cSld>
   <p:clrMapOvr>
@@ -3587,7 +3624,7 @@
               <a:defRPr sz="3000" b="1"/>
             </a:pPr>
             <a:r>
-              <a:t>Is the perennial rye genetically modified?</a:t>
+              <a:t>Is this grain organic?</a:t>
             </a:r>
           </a:p>
         </p:txBody>
@@ -3618,7 +3655,7 @@
               <a:spcAft>
                 <a:spcPts val="1200"/>
               </a:spcAft>
-              <a:defRPr sz="2000"/>
+              <a:defRPr sz="2100"/>
             </a:pPr>
             <a:r>
               <a:t>No.</a:t>
@@ -3629,10 +3666,10 @@
               <a:spcAft>
                 <a:spcPts val="1200"/>
               </a:spcAft>
-              <a:defRPr sz="2000"/>
-            </a:pPr>
-            <a:r>
-              <a:t>This variety was developed using traditional breeding methods.</a:t>
+              <a:defRPr sz="2100"/>
+            </a:pPr>
+            <a:r>
+              <a:t>Aarhus University does not have organically certified land because of the costs and additional administrative complexity.</a:t>
             </a:r>
           </a:p>
           <a:p>
@@ -3640,21 +3677,10 @@
               <a:spcAft>
                 <a:spcPts val="1200"/>
               </a:spcAft>
-              <a:defRPr sz="2000"/>
-            </a:pPr>
-            <a:r>
-              <a:t>Plants were crossed by hand, followed by selection based on their physical characteristics.</a:t>
-            </a:r>
-          </a:p>
-          <a:p>
-            <a:pPr>
-              <a:spcAft>
-                <a:spcPts val="1200"/>
-              </a:spcAft>
-              <a:defRPr sz="2000"/>
-            </a:pPr>
-            <a:r>
-              <a:t>The original QMD links to a scientific publication from 1986 for more information.</a:t>
+              <a:defRPr sz="2100"/>
+            </a:pPr>
+            <a:r>
+              <a:t>However, this grain was grown without the use of pesticides.</a:t>
             </a:r>
           </a:p>
         </p:txBody>
@@ -3741,7 +3767,7 @@
               <a:defRPr sz="3000" b="1"/>
             </a:pPr>
             <a:r>
-              <a:t>Is this grain organic?</a:t>
+              <a:t>Can I buy this flour?</a:t>
             </a:r>
           </a:p>
         </p:txBody>
@@ -3775,7 +3801,7 @@
               <a:defRPr sz="2100"/>
             </a:pPr>
             <a:r>
-              <a:t>No.</a:t>
+              <a:t>Flour from this perennial rye variety is not currently available commercially.</a:t>
             </a:r>
           </a:p>
           <a:p>
@@ -3786,7 +3812,7 @@
               <a:defRPr sz="2100"/>
             </a:pPr>
             <a:r>
-              <a:t>Aarhus University does not have organically certified land because of the costs and additional administrative complexity.</a:t>
+              <a:t>The project is laying the groundwork for a potential commercial release.</a:t>
             </a:r>
           </a:p>
           <a:p>
@@ -3797,7 +3823,7 @@
               <a:defRPr sz="2100"/>
             </a:pPr>
             <a:r>
-              <a:t>However, this grain was grown without the use of pesticides.</a:t>
+              <a:t>Your help with the home baking evaluation is appreciated!</a:t>
             </a:r>
           </a:p>
         </p:txBody>
@@ -3867,7 +3893,7 @@
         <p:spPr>
           <a:xfrm>
             <a:off x="594360" y="320040"/>
-            <a:ext cx="10972800" cy="731520"/>
+            <a:ext cx="2677464" cy="553998"/>
           </a:xfrm>
           <a:prstGeom prst="rect">
             <a:avLst/>
@@ -3884,70 +3910,15 @@
               <a:defRPr sz="3000" b="1"/>
             </a:pPr>
             <a:r>
-              <a:t>Can I buy this flour?</a:t>
-            </a:r>
-          </a:p>
-        </p:txBody>
-      </p:sp>
-      <p:sp>
-        <p:nvSpPr>
-          <p:cNvPr id="3" name="TextBox 2"/>
-          <p:cNvSpPr txBox="1"/>
-          <p:nvPr/>
-        </p:nvSpPr>
-        <p:spPr>
-          <a:xfrm>
-            <a:off x="731520" y="1234440"/>
-            <a:ext cx="10789920" cy="5029200"/>
-          </a:xfrm>
-          <a:prstGeom prst="rect">
-            <a:avLst/>
-          </a:prstGeom>
-          <a:noFill/>
-        </p:spPr>
-        <p:txBody>
-          <a:bodyPr wrap="square">
-            <a:spAutoFit/>
-          </a:bodyPr>
-          <a:lstStyle/>
-          <a:p>
-            <a:pPr>
-              <a:spcAft>
-                <a:spcPts val="1200"/>
-              </a:spcAft>
-              <a:defRPr sz="2100"/>
-            </a:pPr>
-            <a:r>
-              <a:t>Flour from this perennial rye variety is not currently available commercially.</a:t>
-            </a:r>
-          </a:p>
-          <a:p>
-            <a:pPr>
-              <a:spcAft>
-                <a:spcPts val="1200"/>
-              </a:spcAft>
-              <a:defRPr sz="2100"/>
-            </a:pPr>
-            <a:r>
-              <a:t>The project is laying the groundwork for a potential commercial release.</a:t>
-            </a:r>
-          </a:p>
-          <a:p>
-            <a:pPr>
-              <a:spcAft>
-                <a:spcPts val="1200"/>
-              </a:spcAft>
-              <a:defRPr sz="2100"/>
-            </a:pPr>
-            <a:r>
-              <a:t>Your help with the home baking evaluation is appreciated!</a:t>
-            </a:r>
-          </a:p>
-        </p:txBody>
-      </p:sp>
-      <p:sp>
-        <p:nvSpPr>
-          <p:cNvPr id="4" name="TextBox 3"/>
+              <a:rPr dirty="0"/>
+              <a:t>For the curious:</a:t>
+            </a:r>
+          </a:p>
+        </p:txBody>
+      </p:sp>
+      <p:sp>
+        <p:nvSpPr>
+          <p:cNvPr id="5" name="TextBox 4"/>
           <p:cNvSpPr txBox="1"/>
           <p:nvPr/>
         </p:nvSpPr>
@@ -3985,171 +3956,6 @@
 </file>
 
 <file path=ppt/slides/slide15.xml><?xml version="1.0" encoding="utf-8"?>
-<p:sld xmlns:a="http://schemas.openxmlformats.org/drawingml/2006/main" xmlns:r="http://schemas.openxmlformats.org/officeDocument/2006/relationships" xmlns:p="http://schemas.openxmlformats.org/presentationml/2006/main">
-  <p:cSld>
-    <p:spTree>
-      <p:nvGrpSpPr>
-        <p:cNvPr id="1" name=""/>
-        <p:cNvGrpSpPr/>
-        <p:nvPr/>
-      </p:nvGrpSpPr>
-      <p:grpSpPr>
-        <a:xfrm>
-          <a:off x="0" y="0"/>
-          <a:ext cx="0" cy="0"/>
-          <a:chOff x="0" y="0"/>
-          <a:chExt cx="0" cy="0"/>
-        </a:xfrm>
-      </p:grpSpPr>
-      <p:sp>
-        <p:nvSpPr>
-          <p:cNvPr id="2" name="TextBox 1"/>
-          <p:cNvSpPr txBox="1"/>
-          <p:nvPr/>
-        </p:nvSpPr>
-        <p:spPr>
-          <a:xfrm>
-            <a:off x="594360" y="320040"/>
-            <a:ext cx="10972800" cy="731520"/>
-          </a:xfrm>
-          <a:prstGeom prst="rect">
-            <a:avLst/>
-          </a:prstGeom>
-          <a:noFill/>
-        </p:spPr>
-        <p:txBody>
-          <a:bodyPr wrap="none">
-            <a:spAutoFit/>
-          </a:bodyPr>
-          <a:lstStyle/>
-          <a:p>
-            <a:pPr>
-              <a:defRPr sz="3000" b="1"/>
-            </a:pPr>
-            <a:r>
-              <a:t>For the curious: perennial vs. annual</a:t>
-            </a:r>
-          </a:p>
-        </p:txBody>
-      </p:sp>
-      <p:sp>
-        <p:nvSpPr>
-          <p:cNvPr id="3" name="TextBox 2"/>
-          <p:cNvSpPr txBox="1"/>
-          <p:nvPr/>
-        </p:nvSpPr>
-        <p:spPr>
-          <a:xfrm>
-            <a:off x="731520" y="1234440"/>
-            <a:ext cx="10789920" cy="5029200"/>
-          </a:xfrm>
-          <a:prstGeom prst="rect">
-            <a:avLst/>
-          </a:prstGeom>
-          <a:noFill/>
-        </p:spPr>
-        <p:txBody>
-          <a:bodyPr wrap="square">
-            <a:spAutoFit/>
-          </a:bodyPr>
-          <a:lstStyle/>
-          <a:p>
-            <a:pPr>
-              <a:spcAft>
-                <a:spcPts val="1200"/>
-              </a:spcAft>
-              <a:defRPr sz="1900"/>
-            </a:pPr>
-            <a:r>
-              <a:t>Perennial plants live for more than one year; annual plants do not.</a:t>
-            </a:r>
-          </a:p>
-          <a:p>
-            <a:pPr>
-              <a:spcAft>
-                <a:spcPts val="1200"/>
-              </a:spcAft>
-              <a:defRPr sz="1900"/>
-            </a:pPr>
-            <a:r>
-              <a:t>Perennials are very common in nature: trees, shrubs and many grasses are examples.</a:t>
-            </a:r>
-          </a:p>
-          <a:p>
-            <a:pPr>
-              <a:spcAft>
-                <a:spcPts val="1200"/>
-              </a:spcAft>
-              <a:defRPr sz="1900"/>
-            </a:pPr>
-            <a:r>
-              <a:t>Many kitchen-garden crops are annuals and must be replanted every year.</a:t>
-            </a:r>
-          </a:p>
-          <a:p>
-            <a:pPr>
-              <a:spcAft>
-                <a:spcPts val="1200"/>
-              </a:spcAft>
-              <a:defRPr sz="1900"/>
-            </a:pPr>
-            <a:r>
-              <a:t>This pattern—perennials in nature, annuals in agriculture—is seen globally.</a:t>
-            </a:r>
-          </a:p>
-          <a:p>
-            <a:pPr>
-              <a:spcAft>
-                <a:spcPts val="1200"/>
-              </a:spcAft>
-              <a:defRPr sz="1900"/>
-            </a:pPr>
-            <a:r>
-              <a:t>Many of the crops we use most, and plant on the most land, are annuals.</a:t>
-            </a:r>
-          </a:p>
-        </p:txBody>
-      </p:sp>
-      <p:sp>
-        <p:nvSpPr>
-          <p:cNvPr id="5" name="TextBox 4"/>
-          <p:cNvSpPr txBox="1"/>
-          <p:nvPr/>
-        </p:nvSpPr>
-        <p:spPr>
-          <a:xfrm>
-            <a:off x="594360" y="6473952"/>
-            <a:ext cx="10972800" cy="228600"/>
-          </a:xfrm>
-          <a:prstGeom prst="rect">
-            <a:avLst/>
-          </a:prstGeom>
-          <a:noFill/>
-        </p:spPr>
-        <p:txBody>
-          <a:bodyPr wrap="none">
-            <a:spAutoFit/>
-          </a:bodyPr>
-          <a:lstStyle/>
-          <a:p>
-            <a:pPr>
-              <a:defRPr sz="900"/>
-            </a:pPr>
-            <a:r>
-              <a:t>GoodGrain Home Baking Evaluation</a:t>
-            </a:r>
-          </a:p>
-        </p:txBody>
-      </p:sp>
-    </p:spTree>
-  </p:cSld>
-  <p:clrMapOvr>
-    <a:masterClrMapping/>
-  </p:clrMapOvr>
-</p:sld>
-</file>
-
-<file path=ppt/slides/slide16.xml><?xml version="1.0" encoding="utf-8"?>
 <p:sld xmlns:a="http://schemas.openxmlformats.org/drawingml/2006/main" xmlns:r="http://schemas.openxmlformats.org/officeDocument/2006/relationships" xmlns:p="http://schemas.openxmlformats.org/presentationml/2006/main">
   <p:cSld>
     <p:spTree>
@@ -4188,14 +3994,63 @@
         </p:blipFill>
         <p:spPr>
           <a:xfrm>
-            <a:off x="3256782" y="789872"/>
-            <a:ext cx="5297435" cy="2721870"/>
+            <a:off x="1102005" y="534234"/>
+            <a:ext cx="9752962" cy="5011160"/>
           </a:xfrm>
           <a:prstGeom prst="rect">
             <a:avLst/>
           </a:prstGeom>
         </p:spPr>
       </p:pic>
+      <p:sp>
+        <p:nvSpPr>
+          <p:cNvPr id="3" name="Rectangle 2">
+            <a:extLst>
+              <a:ext uri="{FF2B5EF4-FFF2-40B4-BE49-F238E27FC236}">
+                <a16:creationId xmlns:a16="http://schemas.microsoft.com/office/drawing/2014/main" id="{59080F7B-792D-70DE-DDE2-BA19B62D04F2}"/>
+              </a:ext>
+            </a:extLst>
+          </p:cNvPr>
+          <p:cNvSpPr/>
+          <p:nvPr/>
+        </p:nvSpPr>
+        <p:spPr>
+          <a:xfrm>
+            <a:off x="1288026" y="1543665"/>
+            <a:ext cx="9665109" cy="4139380"/>
+          </a:xfrm>
+          <a:prstGeom prst="rect">
+            <a:avLst/>
+          </a:prstGeom>
+          <a:ln>
+            <a:solidFill>
+              <a:schemeClr val="bg1"/>
+            </a:solidFill>
+          </a:ln>
+        </p:spPr>
+        <p:style>
+          <a:lnRef idx="2">
+            <a:schemeClr val="dk1"/>
+          </a:lnRef>
+          <a:fillRef idx="1">
+            <a:schemeClr val="lt1"/>
+          </a:fillRef>
+          <a:effectRef idx="0">
+            <a:schemeClr val="dk1"/>
+          </a:effectRef>
+          <a:fontRef idx="minor">
+            <a:schemeClr val="dk1"/>
+          </a:fontRef>
+        </p:style>
+        <p:txBody>
+          <a:bodyPr rtlCol="0" anchor="ctr"/>
+          <a:lstStyle/>
+          <a:p>
+            <a:pPr algn="ctr"/>
+            <a:endParaRPr lang="en-US"/>
+          </a:p>
+        </p:txBody>
+      </p:sp>
     </p:spTree>
     <p:extLst>
       <p:ext uri="{BB962C8B-B14F-4D97-AF65-F5344CB8AC3E}">
@@ -4209,7 +4064,418 @@
 </p:sld>
 </file>
 
+<file path=ppt/slides/slide16.xml><?xml version="1.0" encoding="utf-8"?>
+<p:sld xmlns:a="http://schemas.openxmlformats.org/drawingml/2006/main" xmlns:r="http://schemas.openxmlformats.org/officeDocument/2006/relationships" xmlns:p="http://schemas.openxmlformats.org/presentationml/2006/main">
+  <p:cSld>
+    <p:spTree>
+      <p:nvGrpSpPr>
+        <p:cNvPr id="1" name="">
+          <a:extLst>
+            <a:ext uri="{FF2B5EF4-FFF2-40B4-BE49-F238E27FC236}">
+              <a16:creationId xmlns:a16="http://schemas.microsoft.com/office/drawing/2014/main" id="{57AE8225-5B71-C888-B848-064D210D1416}"/>
+            </a:ext>
+          </a:extLst>
+        </p:cNvPr>
+        <p:cNvGrpSpPr/>
+        <p:nvPr/>
+      </p:nvGrpSpPr>
+      <p:grpSpPr>
+        <a:xfrm>
+          <a:off x="0" y="0"/>
+          <a:ext cx="0" cy="0"/>
+          <a:chOff x="0" y="0"/>
+          <a:chExt cx="0" cy="0"/>
+        </a:xfrm>
+      </p:grpSpPr>
+      <p:pic>
+        <p:nvPicPr>
+          <p:cNvPr id="5" name="Picture 4">
+            <a:extLst>
+              <a:ext uri="{FF2B5EF4-FFF2-40B4-BE49-F238E27FC236}">
+                <a16:creationId xmlns:a16="http://schemas.microsoft.com/office/drawing/2014/main" id="{E77EBAFB-9BC6-3A35-9175-AA1040DBB9AB}"/>
+              </a:ext>
+            </a:extLst>
+          </p:cNvPr>
+          <p:cNvPicPr>
+            <a:picLocks noChangeAspect="1"/>
+          </p:cNvPicPr>
+          <p:nvPr/>
+        </p:nvPicPr>
+        <p:blipFill>
+          <a:blip r:embed="rId2"/>
+          <a:stretch>
+            <a:fillRect/>
+          </a:stretch>
+        </p:blipFill>
+        <p:spPr>
+          <a:xfrm>
+            <a:off x="1102005" y="534234"/>
+            <a:ext cx="9752962" cy="5011160"/>
+          </a:xfrm>
+          <a:prstGeom prst="rect">
+            <a:avLst/>
+          </a:prstGeom>
+        </p:spPr>
+      </p:pic>
+      <p:sp>
+        <p:nvSpPr>
+          <p:cNvPr id="6" name="Rectangle 5">
+            <a:extLst>
+              <a:ext uri="{FF2B5EF4-FFF2-40B4-BE49-F238E27FC236}">
+                <a16:creationId xmlns:a16="http://schemas.microsoft.com/office/drawing/2014/main" id="{01820E1A-DCD9-C6BB-8407-8B47A9F07E0F}"/>
+              </a:ext>
+            </a:extLst>
+          </p:cNvPr>
+          <p:cNvSpPr/>
+          <p:nvPr/>
+        </p:nvSpPr>
+        <p:spPr>
+          <a:xfrm>
+            <a:off x="3726426" y="1543665"/>
+            <a:ext cx="7226709" cy="3234812"/>
+          </a:xfrm>
+          <a:prstGeom prst="rect">
+            <a:avLst/>
+          </a:prstGeom>
+          <a:ln>
+            <a:solidFill>
+              <a:schemeClr val="bg1"/>
+            </a:solidFill>
+          </a:ln>
+        </p:spPr>
+        <p:style>
+          <a:lnRef idx="2">
+            <a:schemeClr val="dk1"/>
+          </a:lnRef>
+          <a:fillRef idx="1">
+            <a:schemeClr val="lt1"/>
+          </a:fillRef>
+          <a:effectRef idx="0">
+            <a:schemeClr val="dk1"/>
+          </a:effectRef>
+          <a:fontRef idx="minor">
+            <a:schemeClr val="dk1"/>
+          </a:fontRef>
+        </p:style>
+        <p:txBody>
+          <a:bodyPr rtlCol="0" anchor="ctr"/>
+          <a:lstStyle/>
+          <a:p>
+            <a:pPr algn="ctr"/>
+            <a:endParaRPr lang="en-US"/>
+          </a:p>
+        </p:txBody>
+      </p:sp>
+    </p:spTree>
+    <p:extLst>
+      <p:ext uri="{BB962C8B-B14F-4D97-AF65-F5344CB8AC3E}">
+        <p14:creationId xmlns:p14="http://schemas.microsoft.com/office/powerpoint/2010/main" val="1377122751"/>
+      </p:ext>
+    </p:extLst>
+  </p:cSld>
+  <p:clrMapOvr>
+    <a:masterClrMapping/>
+  </p:clrMapOvr>
+</p:sld>
+</file>
+
 <file path=ppt/slides/slide17.xml><?xml version="1.0" encoding="utf-8"?>
+<p:sld xmlns:a="http://schemas.openxmlformats.org/drawingml/2006/main" xmlns:r="http://schemas.openxmlformats.org/officeDocument/2006/relationships" xmlns:p="http://schemas.openxmlformats.org/presentationml/2006/main">
+  <p:cSld>
+    <p:spTree>
+      <p:nvGrpSpPr>
+        <p:cNvPr id="1" name="">
+          <a:extLst>
+            <a:ext uri="{FF2B5EF4-FFF2-40B4-BE49-F238E27FC236}">
+              <a16:creationId xmlns:a16="http://schemas.microsoft.com/office/drawing/2014/main" id="{1F80CC45-624D-5D70-5532-FDF98DE2C929}"/>
+            </a:ext>
+          </a:extLst>
+        </p:cNvPr>
+        <p:cNvGrpSpPr/>
+        <p:nvPr/>
+      </p:nvGrpSpPr>
+      <p:grpSpPr>
+        <a:xfrm>
+          <a:off x="0" y="0"/>
+          <a:ext cx="0" cy="0"/>
+          <a:chOff x="0" y="0"/>
+          <a:chExt cx="0" cy="0"/>
+        </a:xfrm>
+      </p:grpSpPr>
+      <p:pic>
+        <p:nvPicPr>
+          <p:cNvPr id="5" name="Picture 4">
+            <a:extLst>
+              <a:ext uri="{FF2B5EF4-FFF2-40B4-BE49-F238E27FC236}">
+                <a16:creationId xmlns:a16="http://schemas.microsoft.com/office/drawing/2014/main" id="{9372D9F4-973B-AA11-AC83-3685F25ACBEA}"/>
+              </a:ext>
+            </a:extLst>
+          </p:cNvPr>
+          <p:cNvPicPr>
+            <a:picLocks noChangeAspect="1"/>
+          </p:cNvPicPr>
+          <p:nvPr/>
+        </p:nvPicPr>
+        <p:blipFill>
+          <a:blip r:embed="rId2"/>
+          <a:stretch>
+            <a:fillRect/>
+          </a:stretch>
+        </p:blipFill>
+        <p:spPr>
+          <a:xfrm>
+            <a:off x="1102005" y="534234"/>
+            <a:ext cx="9752962" cy="5011160"/>
+          </a:xfrm>
+          <a:prstGeom prst="rect">
+            <a:avLst/>
+          </a:prstGeom>
+        </p:spPr>
+      </p:pic>
+      <p:sp>
+        <p:nvSpPr>
+          <p:cNvPr id="3" name="Rectangle 2">
+            <a:extLst>
+              <a:ext uri="{FF2B5EF4-FFF2-40B4-BE49-F238E27FC236}">
+                <a16:creationId xmlns:a16="http://schemas.microsoft.com/office/drawing/2014/main" id="{7D201734-7D7D-984E-CA50-586FF3B85B23}"/>
+              </a:ext>
+            </a:extLst>
+          </p:cNvPr>
+          <p:cNvSpPr/>
+          <p:nvPr/>
+        </p:nvSpPr>
+        <p:spPr>
+          <a:xfrm>
+            <a:off x="6096000" y="1543665"/>
+            <a:ext cx="4857135" cy="3283974"/>
+          </a:xfrm>
+          <a:prstGeom prst="rect">
+            <a:avLst/>
+          </a:prstGeom>
+          <a:ln>
+            <a:solidFill>
+              <a:schemeClr val="bg1"/>
+            </a:solidFill>
+          </a:ln>
+        </p:spPr>
+        <p:style>
+          <a:lnRef idx="2">
+            <a:schemeClr val="dk1"/>
+          </a:lnRef>
+          <a:fillRef idx="1">
+            <a:schemeClr val="lt1"/>
+          </a:fillRef>
+          <a:effectRef idx="0">
+            <a:schemeClr val="dk1"/>
+          </a:effectRef>
+          <a:fontRef idx="minor">
+            <a:schemeClr val="dk1"/>
+          </a:fontRef>
+        </p:style>
+        <p:txBody>
+          <a:bodyPr rtlCol="0" anchor="ctr"/>
+          <a:lstStyle/>
+          <a:p>
+            <a:pPr algn="ctr"/>
+            <a:endParaRPr lang="en-US"/>
+          </a:p>
+        </p:txBody>
+      </p:sp>
+    </p:spTree>
+    <p:extLst>
+      <p:ext uri="{BB962C8B-B14F-4D97-AF65-F5344CB8AC3E}">
+        <p14:creationId xmlns:p14="http://schemas.microsoft.com/office/powerpoint/2010/main" val="3859239543"/>
+      </p:ext>
+    </p:extLst>
+  </p:cSld>
+  <p:clrMapOvr>
+    <a:masterClrMapping/>
+  </p:clrMapOvr>
+</p:sld>
+</file>
+
+<file path=ppt/slides/slide18.xml><?xml version="1.0" encoding="utf-8"?>
+<p:sld xmlns:a="http://schemas.openxmlformats.org/drawingml/2006/main" xmlns:r="http://schemas.openxmlformats.org/officeDocument/2006/relationships" xmlns:p="http://schemas.openxmlformats.org/presentationml/2006/main">
+  <p:cSld>
+    <p:spTree>
+      <p:nvGrpSpPr>
+        <p:cNvPr id="1" name="">
+          <a:extLst>
+            <a:ext uri="{FF2B5EF4-FFF2-40B4-BE49-F238E27FC236}">
+              <a16:creationId xmlns:a16="http://schemas.microsoft.com/office/drawing/2014/main" id="{57997B02-3C80-37CD-5394-4213A2E21377}"/>
+            </a:ext>
+          </a:extLst>
+        </p:cNvPr>
+        <p:cNvGrpSpPr/>
+        <p:nvPr/>
+      </p:nvGrpSpPr>
+      <p:grpSpPr>
+        <a:xfrm>
+          <a:off x="0" y="0"/>
+          <a:ext cx="0" cy="0"/>
+          <a:chOff x="0" y="0"/>
+          <a:chExt cx="0" cy="0"/>
+        </a:xfrm>
+      </p:grpSpPr>
+      <p:pic>
+        <p:nvPicPr>
+          <p:cNvPr id="5" name="Picture 4">
+            <a:extLst>
+              <a:ext uri="{FF2B5EF4-FFF2-40B4-BE49-F238E27FC236}">
+                <a16:creationId xmlns:a16="http://schemas.microsoft.com/office/drawing/2014/main" id="{E8AEB6AA-7278-A99E-DFF2-1B7798409F36}"/>
+              </a:ext>
+            </a:extLst>
+          </p:cNvPr>
+          <p:cNvPicPr>
+            <a:picLocks noChangeAspect="1"/>
+          </p:cNvPicPr>
+          <p:nvPr/>
+        </p:nvPicPr>
+        <p:blipFill>
+          <a:blip r:embed="rId2"/>
+          <a:stretch>
+            <a:fillRect/>
+          </a:stretch>
+        </p:blipFill>
+        <p:spPr>
+          <a:xfrm>
+            <a:off x="1102005" y="534234"/>
+            <a:ext cx="9752962" cy="5011160"/>
+          </a:xfrm>
+          <a:prstGeom prst="rect">
+            <a:avLst/>
+          </a:prstGeom>
+        </p:spPr>
+      </p:pic>
+      <p:sp>
+        <p:nvSpPr>
+          <p:cNvPr id="3" name="Rectangle 2">
+            <a:extLst>
+              <a:ext uri="{FF2B5EF4-FFF2-40B4-BE49-F238E27FC236}">
+                <a16:creationId xmlns:a16="http://schemas.microsoft.com/office/drawing/2014/main" id="{87DB19D9-8B98-2D32-9D29-2119C0349212}"/>
+              </a:ext>
+            </a:extLst>
+          </p:cNvPr>
+          <p:cNvSpPr/>
+          <p:nvPr/>
+        </p:nvSpPr>
+        <p:spPr>
+          <a:xfrm>
+            <a:off x="8278761" y="1543665"/>
+            <a:ext cx="2674374" cy="3264309"/>
+          </a:xfrm>
+          <a:prstGeom prst="rect">
+            <a:avLst/>
+          </a:prstGeom>
+          <a:ln>
+            <a:solidFill>
+              <a:schemeClr val="bg1"/>
+            </a:solidFill>
+          </a:ln>
+        </p:spPr>
+        <p:style>
+          <a:lnRef idx="2">
+            <a:schemeClr val="dk1"/>
+          </a:lnRef>
+          <a:fillRef idx="1">
+            <a:schemeClr val="lt1"/>
+          </a:fillRef>
+          <a:effectRef idx="0">
+            <a:schemeClr val="dk1"/>
+          </a:effectRef>
+          <a:fontRef idx="minor">
+            <a:schemeClr val="dk1"/>
+          </a:fontRef>
+        </p:style>
+        <p:txBody>
+          <a:bodyPr rtlCol="0" anchor="ctr"/>
+          <a:lstStyle/>
+          <a:p>
+            <a:pPr algn="ctr"/>
+            <a:endParaRPr lang="en-US"/>
+          </a:p>
+        </p:txBody>
+      </p:sp>
+    </p:spTree>
+    <p:extLst>
+      <p:ext uri="{BB962C8B-B14F-4D97-AF65-F5344CB8AC3E}">
+        <p14:creationId xmlns:p14="http://schemas.microsoft.com/office/powerpoint/2010/main" val="2577436638"/>
+      </p:ext>
+    </p:extLst>
+  </p:cSld>
+  <p:clrMapOvr>
+    <a:masterClrMapping/>
+  </p:clrMapOvr>
+</p:sld>
+</file>
+
+<file path=ppt/slides/slide19.xml><?xml version="1.0" encoding="utf-8"?>
+<p:sld xmlns:a="http://schemas.openxmlformats.org/drawingml/2006/main" xmlns:r="http://schemas.openxmlformats.org/officeDocument/2006/relationships" xmlns:p="http://schemas.openxmlformats.org/presentationml/2006/main">
+  <p:cSld>
+    <p:spTree>
+      <p:nvGrpSpPr>
+        <p:cNvPr id="1" name="">
+          <a:extLst>
+            <a:ext uri="{FF2B5EF4-FFF2-40B4-BE49-F238E27FC236}">
+              <a16:creationId xmlns:a16="http://schemas.microsoft.com/office/drawing/2014/main" id="{65EE8179-E6AF-C546-6336-880E94EA2CD6}"/>
+            </a:ext>
+          </a:extLst>
+        </p:cNvPr>
+        <p:cNvGrpSpPr/>
+        <p:nvPr/>
+      </p:nvGrpSpPr>
+      <p:grpSpPr>
+        <a:xfrm>
+          <a:off x="0" y="0"/>
+          <a:ext cx="0" cy="0"/>
+          <a:chOff x="0" y="0"/>
+          <a:chExt cx="0" cy="0"/>
+        </a:xfrm>
+      </p:grpSpPr>
+      <p:pic>
+        <p:nvPicPr>
+          <p:cNvPr id="5" name="Picture 4">
+            <a:extLst>
+              <a:ext uri="{FF2B5EF4-FFF2-40B4-BE49-F238E27FC236}">
+                <a16:creationId xmlns:a16="http://schemas.microsoft.com/office/drawing/2014/main" id="{B6E201B5-F816-4DD2-8AAA-8AD3BDC4F9FD}"/>
+              </a:ext>
+            </a:extLst>
+          </p:cNvPr>
+          <p:cNvPicPr>
+            <a:picLocks noChangeAspect="1"/>
+          </p:cNvPicPr>
+          <p:nvPr/>
+        </p:nvPicPr>
+        <p:blipFill>
+          <a:blip r:embed="rId2"/>
+          <a:stretch>
+            <a:fillRect/>
+          </a:stretch>
+        </p:blipFill>
+        <p:spPr>
+          <a:xfrm>
+            <a:off x="1102005" y="534234"/>
+            <a:ext cx="9752962" cy="5011160"/>
+          </a:xfrm>
+          <a:prstGeom prst="rect">
+            <a:avLst/>
+          </a:prstGeom>
+        </p:spPr>
+      </p:pic>
+    </p:spTree>
+    <p:extLst>
+      <p:ext uri="{BB962C8B-B14F-4D97-AF65-F5344CB8AC3E}">
+        <p14:creationId xmlns:p14="http://schemas.microsoft.com/office/powerpoint/2010/main" val="1639626217"/>
+      </p:ext>
+    </p:extLst>
+  </p:cSld>
+  <p:clrMapOvr>
+    <a:masterClrMapping/>
+  </p:clrMapOvr>
+</p:sld>
+</file>
+
+<file path=ppt/slides/slide2.xml><?xml version="1.0" encoding="utf-8"?>
 <p:sld xmlns:a="http://schemas.openxmlformats.org/drawingml/2006/main" xmlns:r="http://schemas.openxmlformats.org/officeDocument/2006/relationships" xmlns:p="http://schemas.openxmlformats.org/presentationml/2006/main">
   <p:cSld>
     <p:spTree>
@@ -4228,14 +4494,145 @@
       </p:grpSpPr>
       <p:sp>
         <p:nvSpPr>
-          <p:cNvPr id="2" name="TextBox 1"/>
+          <p:cNvPr id="3" name="TextBox 2"/>
           <p:cNvSpPr txBox="1"/>
           <p:nvPr/>
         </p:nvSpPr>
         <p:spPr>
           <a:xfrm>
-            <a:off x="594360" y="320040"/>
-            <a:ext cx="10972800" cy="731520"/>
+            <a:off x="731520" y="1234440"/>
+            <a:ext cx="10477254" cy="2323713"/>
+          </a:xfrm>
+          <a:prstGeom prst="rect">
+            <a:avLst/>
+          </a:prstGeom>
+          <a:noFill/>
+        </p:spPr>
+        <p:txBody>
+          <a:bodyPr wrap="square">
+            <a:spAutoFit/>
+          </a:bodyPr>
+          <a:lstStyle/>
+          <a:p>
+            <a:pPr marL="342900" indent="-342900">
+              <a:spcAft>
+                <a:spcPts val="1200"/>
+              </a:spcAft>
+              <a:buFont typeface="Arial" panose="020B0604020202020204" pitchFamily="34" charset="0"/>
+              <a:buChar char="•"/>
+              <a:defRPr sz="2100"/>
+            </a:pPr>
+            <a:r>
+              <a:rPr lang="en-US" dirty="0"/>
+              <a:t>An overview of the GoodGrain project</a:t>
+            </a:r>
+          </a:p>
+          <a:p>
+            <a:pPr marL="342900" indent="-342900">
+              <a:spcAft>
+                <a:spcPts val="1200"/>
+              </a:spcAft>
+              <a:buFont typeface="Arial" panose="020B0604020202020204" pitchFamily="34" charset="0"/>
+              <a:buChar char="•"/>
+              <a:defRPr sz="2100"/>
+            </a:pPr>
+            <a:r>
+              <a:rPr lang="en-US" dirty="0"/>
+              <a:t>M</a:t>
+            </a:r>
+            <a:r>
+              <a:rPr dirty="0"/>
+              <a:t>ore in-depth information about the new </a:t>
+            </a:r>
+            <a:r>
+              <a:rPr lang="en-US" dirty="0"/>
+              <a:t>perennial rye </a:t>
+            </a:r>
+            <a:r>
+              <a:rPr dirty="0"/>
+              <a:t>variety</a:t>
+            </a:r>
+            <a:endParaRPr lang="en-US" dirty="0"/>
+          </a:p>
+          <a:p>
+            <a:pPr marL="342900" indent="-342900">
+              <a:spcAft>
+                <a:spcPts val="1200"/>
+              </a:spcAft>
+              <a:buFont typeface="Arial" panose="020B0604020202020204" pitchFamily="34" charset="0"/>
+              <a:buChar char="•"/>
+              <a:defRPr sz="2100"/>
+            </a:pPr>
+            <a:endParaRPr lang="da-DK" dirty="0"/>
+          </a:p>
+          <a:p>
+            <a:pPr>
+              <a:spcAft>
+                <a:spcPts val="1200"/>
+              </a:spcAft>
+              <a:defRPr sz="2100"/>
+            </a:pPr>
+            <a:r>
+              <a:rPr lang="da-DK" dirty="0"/>
+              <a:t>The same information is </a:t>
+            </a:r>
+            <a:r>
+              <a:rPr lang="da-DK" dirty="0" err="1"/>
+              <a:t>also</a:t>
+            </a:r>
+            <a:r>
+              <a:rPr lang="da-DK" dirty="0"/>
+              <a:t> </a:t>
+            </a:r>
+            <a:r>
+              <a:rPr lang="da-DK" dirty="0" err="1"/>
+              <a:t>available</a:t>
+            </a:r>
+            <a:r>
+              <a:rPr lang="da-DK" dirty="0"/>
+              <a:t> in an </a:t>
+            </a:r>
+            <a:r>
+              <a:rPr lang="da-DK" dirty="0" err="1"/>
+              <a:t>informational</a:t>
+            </a:r>
+            <a:r>
+              <a:rPr lang="da-DK" dirty="0"/>
+              <a:t> </a:t>
+            </a:r>
+            <a:r>
+              <a:rPr lang="da-DK" dirty="0" err="1"/>
+              <a:t>sheet</a:t>
+            </a:r>
+            <a:r>
+              <a:rPr lang="da-DK" dirty="0"/>
+              <a:t> in English and Danish</a:t>
+            </a:r>
+            <a:endParaRPr lang="en-US" dirty="0"/>
+          </a:p>
+          <a:p>
+            <a:pPr marL="342900" indent="-342900">
+              <a:spcAft>
+                <a:spcPts val="1200"/>
+              </a:spcAft>
+              <a:buFont typeface="Arial" panose="020B0604020202020204" pitchFamily="34" charset="0"/>
+              <a:buChar char="•"/>
+              <a:defRPr sz="2100"/>
+            </a:pPr>
+            <a:endParaRPr dirty="0"/>
+          </a:p>
+        </p:txBody>
+      </p:sp>
+      <p:sp>
+        <p:nvSpPr>
+          <p:cNvPr id="4" name="TextBox 3"/>
+          <p:cNvSpPr txBox="1"/>
+          <p:nvPr/>
+        </p:nvSpPr>
+        <p:spPr>
+          <a:xfrm>
+            <a:off x="594360" y="6473952"/>
+            <a:ext cx="10972800" cy="228600"/>
           </a:xfrm>
           <a:prstGeom prst="rect">
             <a:avLst/>
@@ -4249,126 +4646,6 @@
           <a:lstStyle/>
           <a:p>
             <a:pPr>
-              <a:defRPr sz="3000" b="1"/>
-            </a:pPr>
-            <a:r>
-              <a:t>Why might perennial crops be useful?</a:t>
-            </a:r>
-          </a:p>
-        </p:txBody>
-      </p:sp>
-      <p:sp>
-        <p:nvSpPr>
-          <p:cNvPr id="3" name="TextBox 2"/>
-          <p:cNvSpPr txBox="1"/>
-          <p:nvPr/>
-        </p:nvSpPr>
-        <p:spPr>
-          <a:xfrm>
-            <a:off x="731520" y="1234440"/>
-            <a:ext cx="10789920" cy="5029200"/>
-          </a:xfrm>
-          <a:prstGeom prst="rect">
-            <a:avLst/>
-          </a:prstGeom>
-          <a:noFill/>
-        </p:spPr>
-        <p:txBody>
-          <a:bodyPr wrap="square">
-            <a:spAutoFit/>
-          </a:bodyPr>
-          <a:lstStyle/>
-          <a:p>
-            <a:pPr>
-              <a:spcAft>
-                <a:spcPts val="1200"/>
-              </a:spcAft>
-              <a:defRPr sz="1800"/>
-            </a:pPr>
-            <a:r>
-              <a:t>It is not yet clear whether annual plants are inherently superior for food production or whether humans simply happened to domesticate them.</a:t>
-            </a:r>
-          </a:p>
-          <a:p>
-            <a:pPr>
-              <a:spcAft>
-                <a:spcPts val="1200"/>
-              </a:spcAft>
-              <a:defRPr sz="1800"/>
-            </a:pPr>
-            <a:r>
-              <a:t>Having more perennials integrated into agricultural land would offer environmental benefits.</a:t>
-            </a:r>
-          </a:p>
-          <a:p>
-            <a:pPr>
-              <a:spcAft>
-                <a:spcPts val="1200"/>
-              </a:spcAft>
-              <a:defRPr sz="1800"/>
-            </a:pPr>
-            <a:r>
-              <a:t>Perennials can help put carbon into the soil.</a:t>
-            </a:r>
-          </a:p>
-          <a:p>
-            <a:pPr>
-              <a:spcAft>
-                <a:spcPts val="1200"/>
-              </a:spcAft>
-              <a:defRPr sz="1800"/>
-            </a:pPr>
-            <a:r>
-              <a:t>They provide soil cover year-round.</a:t>
-            </a:r>
-          </a:p>
-          <a:p>
-            <a:pPr>
-              <a:spcAft>
-                <a:spcPts val="1200"/>
-              </a:spcAft>
-              <a:defRPr sz="1800"/>
-            </a:pPr>
-            <a:r>
-              <a:t>They can use resources such as water and nitrogen more efficiently.</a:t>
-            </a:r>
-          </a:p>
-          <a:p>
-            <a:pPr>
-              <a:spcAft>
-                <a:spcPts val="1200"/>
-              </a:spcAft>
-              <a:defRPr sz="1800"/>
-            </a:pPr>
-            <a:r>
-              <a:t>Creating perennial versions of staple crops, such as rye, is one way to integrate more perennials into agriculture.</a:t>
-            </a:r>
-          </a:p>
-        </p:txBody>
-      </p:sp>
-      <p:sp>
-        <p:nvSpPr>
-          <p:cNvPr id="4" name="TextBox 3"/>
-          <p:cNvSpPr txBox="1"/>
-          <p:nvPr/>
-        </p:nvSpPr>
-        <p:spPr>
-          <a:xfrm>
-            <a:off x="594360" y="6473952"/>
-            <a:ext cx="10972800" cy="228600"/>
-          </a:xfrm>
-          <a:prstGeom prst="rect">
-            <a:avLst/>
-          </a:prstGeom>
-          <a:noFill/>
-        </p:spPr>
-        <p:txBody>
-          <a:bodyPr wrap="none">
-            <a:spAutoFit/>
-          </a:bodyPr>
-          <a:lstStyle/>
-          <a:p>
-            <a:pPr>
               <a:defRPr sz="900"/>
             </a:pPr>
             <a:r>
@@ -4377,392 +4654,12 @@
           </a:p>
         </p:txBody>
       </p:sp>
-    </p:spTree>
-  </p:cSld>
-  <p:clrMapOvr>
-    <a:masterClrMapping/>
-  </p:clrMapOvr>
-</p:sld>
-</file>
-
-<file path=ppt/slides/slide18.xml><?xml version="1.0" encoding="utf-8"?>
-<p:sld xmlns:a="http://schemas.openxmlformats.org/drawingml/2006/main" xmlns:r="http://schemas.openxmlformats.org/officeDocument/2006/relationships" xmlns:p="http://schemas.openxmlformats.org/presentationml/2006/main">
-  <p:cSld>
-    <p:spTree>
-      <p:nvGrpSpPr>
-        <p:cNvPr id="1" name=""/>
-        <p:cNvGrpSpPr/>
-        <p:nvPr/>
-      </p:nvGrpSpPr>
-      <p:grpSpPr>
-        <a:xfrm>
-          <a:off x="0" y="0"/>
-          <a:ext cx="0" cy="0"/>
-          <a:chOff x="0" y="0"/>
-          <a:chExt cx="0" cy="0"/>
-        </a:xfrm>
-      </p:grpSpPr>
-      <p:sp>
-        <p:nvSpPr>
-          <p:cNvPr id="2" name="TextBox 1"/>
-          <p:cNvSpPr txBox="1"/>
-          <p:nvPr/>
-        </p:nvSpPr>
-        <p:spPr>
-          <a:xfrm>
-            <a:off x="594360" y="320040"/>
-            <a:ext cx="10972800" cy="731520"/>
-          </a:xfrm>
-          <a:prstGeom prst="rect">
-            <a:avLst/>
-          </a:prstGeom>
-          <a:noFill/>
-        </p:spPr>
-        <p:txBody>
-          <a:bodyPr wrap="none">
-            <a:spAutoFit/>
-          </a:bodyPr>
-          <a:lstStyle/>
-          <a:p>
-            <a:pPr>
-              <a:defRPr sz="3000" b="1"/>
-            </a:pPr>
-            <a:r>
-              <a:t>The history of this perennial rye</a:t>
-            </a:r>
-          </a:p>
-        </p:txBody>
-      </p:sp>
-      <p:sp>
-        <p:nvSpPr>
-          <p:cNvPr id="3" name="TextBox 2"/>
-          <p:cNvSpPr txBox="1"/>
-          <p:nvPr/>
-        </p:nvSpPr>
-        <p:spPr>
-          <a:xfrm>
-            <a:off x="731520" y="1234440"/>
-            <a:ext cx="10789920" cy="5029200"/>
-          </a:xfrm>
-          <a:prstGeom prst="rect">
-            <a:avLst/>
-          </a:prstGeom>
-          <a:noFill/>
-        </p:spPr>
-        <p:txBody>
-          <a:bodyPr wrap="square">
-            <a:spAutoFit/>
-          </a:bodyPr>
-          <a:lstStyle/>
-          <a:p>
-            <a:pPr>
-              <a:spcAft>
-                <a:spcPts val="1200"/>
-              </a:spcAft>
-              <a:defRPr sz="1900"/>
-            </a:pPr>
-            <a:r>
-              <a:t>There have been efforts to breed perennial wheat since the 1930s.</a:t>
-            </a:r>
-          </a:p>
-          <a:p>
-            <a:pPr>
-              <a:spcAft>
-                <a:spcPts val="1200"/>
-              </a:spcAft>
-              <a:defRPr sz="1900"/>
-            </a:pPr>
-            <a:r>
-              <a:t>At the University of Hohenheim in Germany, Dr. Reimann-Philips and his team crossed annual rye with an old perennial rye ancestor in the 1960s.</a:t>
-            </a:r>
-          </a:p>
-          <a:p>
-            <a:pPr>
-              <a:spcAft>
-                <a:spcPts val="1200"/>
-              </a:spcAft>
-              <a:defRPr sz="1900"/>
-            </a:pPr>
-            <a:r>
-              <a:t>They tested the resulting plants and made further selections.</a:t>
-            </a:r>
-          </a:p>
-          <a:p>
-            <a:pPr>
-              <a:spcAft>
-                <a:spcPts val="1200"/>
-              </a:spcAft>
-              <a:defRPr sz="1900"/>
-            </a:pPr>
-            <a:r>
-              <a:t>The resulting crop was perennial and, in the 1990s, was submitted for consideration as a variety in Germany.</a:t>
-            </a:r>
-          </a:p>
-        </p:txBody>
-      </p:sp>
-      <p:sp>
-        <p:nvSpPr>
-          <p:cNvPr id="5" name="TextBox 4"/>
-          <p:cNvSpPr txBox="1"/>
-          <p:nvPr/>
-        </p:nvSpPr>
-        <p:spPr>
-          <a:xfrm>
-            <a:off x="594360" y="6473952"/>
-            <a:ext cx="10972800" cy="228600"/>
-          </a:xfrm>
-          <a:prstGeom prst="rect">
-            <a:avLst/>
-          </a:prstGeom>
-          <a:noFill/>
-        </p:spPr>
-        <p:txBody>
-          <a:bodyPr wrap="none">
-            <a:spAutoFit/>
-          </a:bodyPr>
-          <a:lstStyle/>
-          <a:p>
-            <a:pPr>
-              <a:defRPr sz="900"/>
-            </a:pPr>
-            <a:r>
-              <a:t>GoodGrain Home Baking Evaluation</a:t>
-            </a:r>
-          </a:p>
-        </p:txBody>
-      </p:sp>
-      <p:pic>
-        <p:nvPicPr>
-          <p:cNvPr id="7" name="Picture 6">
+      <p:sp>
+        <p:nvSpPr>
+          <p:cNvPr id="6" name="TextBox 5">
             <a:extLst>
               <a:ext uri="{FF2B5EF4-FFF2-40B4-BE49-F238E27FC236}">
-                <a16:creationId xmlns:a16="http://schemas.microsoft.com/office/drawing/2014/main" id="{F0AF7D3C-81AA-7D35-390A-65E79C78087D}"/>
-              </a:ext>
-            </a:extLst>
-          </p:cNvPr>
-          <p:cNvPicPr>
-            <a:picLocks noChangeAspect="1"/>
-          </p:cNvPicPr>
-          <p:nvPr/>
-        </p:nvPicPr>
-        <p:blipFill>
-          <a:blip r:embed="rId2"/>
-          <a:stretch>
-            <a:fillRect/>
-          </a:stretch>
-        </p:blipFill>
-        <p:spPr>
-          <a:xfrm>
-            <a:off x="3256782" y="1953765"/>
-            <a:ext cx="5678436" cy="2950470"/>
-          </a:xfrm>
-          <a:prstGeom prst="rect">
-            <a:avLst/>
-          </a:prstGeom>
-        </p:spPr>
-      </p:pic>
-    </p:spTree>
-  </p:cSld>
-  <p:clrMapOvr>
-    <a:masterClrMapping/>
-  </p:clrMapOvr>
-</p:sld>
-</file>
-
-<file path=ppt/slides/slide19.xml><?xml version="1.0" encoding="utf-8"?>
-<p:sld xmlns:a="http://schemas.openxmlformats.org/drawingml/2006/main" xmlns:r="http://schemas.openxmlformats.org/officeDocument/2006/relationships" xmlns:p="http://schemas.openxmlformats.org/presentationml/2006/main">
-  <p:cSld>
-    <p:spTree>
-      <p:nvGrpSpPr>
-        <p:cNvPr id="1" name=""/>
-        <p:cNvGrpSpPr/>
-        <p:nvPr/>
-      </p:nvGrpSpPr>
-      <p:grpSpPr>
-        <a:xfrm>
-          <a:off x="0" y="0"/>
-          <a:ext cx="0" cy="0"/>
-          <a:chOff x="0" y="0"/>
-          <a:chExt cx="0" cy="0"/>
-        </a:xfrm>
-      </p:grpSpPr>
-      <p:sp>
-        <p:nvSpPr>
-          <p:cNvPr id="2" name="TextBox 1"/>
-          <p:cNvSpPr txBox="1"/>
-          <p:nvPr/>
-        </p:nvSpPr>
-        <p:spPr>
-          <a:xfrm>
-            <a:off x="594360" y="320040"/>
-            <a:ext cx="10972800" cy="731520"/>
-          </a:xfrm>
-          <a:prstGeom prst="rect">
-            <a:avLst/>
-          </a:prstGeom>
-          <a:noFill/>
-        </p:spPr>
-        <p:txBody>
-          <a:bodyPr wrap="none">
-            <a:spAutoFit/>
-          </a:bodyPr>
-          <a:lstStyle/>
-          <a:p>
-            <a:pPr>
-              <a:defRPr sz="3000" b="1"/>
-            </a:pPr>
-            <a:r>
-              <a:t>What happened to the crop?</a:t>
-            </a:r>
-          </a:p>
-        </p:txBody>
-      </p:sp>
-      <p:sp>
-        <p:nvSpPr>
-          <p:cNvPr id="3" name="TextBox 2"/>
-          <p:cNvSpPr txBox="1"/>
-          <p:nvPr/>
-        </p:nvSpPr>
-        <p:spPr>
-          <a:xfrm>
-            <a:off x="731520" y="1234440"/>
-            <a:ext cx="10789920" cy="5029200"/>
-          </a:xfrm>
-          <a:prstGeom prst="rect">
-            <a:avLst/>
-          </a:prstGeom>
-          <a:noFill/>
-        </p:spPr>
-        <p:txBody>
-          <a:bodyPr wrap="square">
-            <a:spAutoFit/>
-          </a:bodyPr>
-          <a:lstStyle/>
-          <a:p>
-            <a:pPr>
-              <a:spcAft>
-                <a:spcPts val="1200"/>
-              </a:spcAft>
-              <a:defRPr sz="1900"/>
-            </a:pPr>
-            <a:r>
-              <a:t>The German government rejected the application, and the crop was never released as a variety.</a:t>
-            </a:r>
-          </a:p>
-          <a:p>
-            <a:pPr>
-              <a:spcAft>
-                <a:spcPts val="1200"/>
-              </a:spcAft>
-              <a:defRPr sz="1900"/>
-            </a:pPr>
-            <a:r>
-              <a:t>The breeders maintained some plots as a passion project.</a:t>
-            </a:r>
-          </a:p>
-          <a:p>
-            <a:pPr>
-              <a:spcAft>
-                <a:spcPts val="1200"/>
-              </a:spcAft>
-              <a:defRPr sz="1900"/>
-            </a:pPr>
-            <a:r>
-              <a:t>Some material was later released as a wildlife forage crop.</a:t>
-            </a:r>
-          </a:p>
-          <a:p>
-            <a:pPr>
-              <a:spcAft>
-                <a:spcPts val="1200"/>
-              </a:spcAft>
-              <a:defRPr sz="1900"/>
-            </a:pPr>
-            <a:r>
-              <a:t>The perennial rye received little attention for about thirty years.</a:t>
-            </a:r>
-          </a:p>
-          <a:p>
-            <a:pPr>
-              <a:spcAft>
-                <a:spcPts val="1200"/>
-              </a:spcAft>
-              <a:defRPr sz="1900"/>
-            </a:pPr>
-            <a:r>
-              <a:t>In 2023, Dr. Thomas Miedaner shared seeds with researchers at Aarhus University.</a:t>
-            </a:r>
-          </a:p>
-        </p:txBody>
-      </p:sp>
-      <p:sp>
-        <p:nvSpPr>
-          <p:cNvPr id="4" name="TextBox 3"/>
-          <p:cNvSpPr txBox="1"/>
-          <p:nvPr/>
-        </p:nvSpPr>
-        <p:spPr>
-          <a:xfrm>
-            <a:off x="594360" y="6473952"/>
-            <a:ext cx="10972800" cy="228600"/>
-          </a:xfrm>
-          <a:prstGeom prst="rect">
-            <a:avLst/>
-          </a:prstGeom>
-          <a:noFill/>
-        </p:spPr>
-        <p:txBody>
-          <a:bodyPr wrap="none">
-            <a:spAutoFit/>
-          </a:bodyPr>
-          <a:lstStyle/>
-          <a:p>
-            <a:pPr>
-              <a:defRPr sz="900"/>
-            </a:pPr>
-            <a:r>
-              <a:t>GoodGrain Home Baking Evaluation</a:t>
-            </a:r>
-          </a:p>
-        </p:txBody>
-      </p:sp>
-    </p:spTree>
-  </p:cSld>
-  <p:clrMapOvr>
-    <a:masterClrMapping/>
-  </p:clrMapOvr>
-</p:sld>
-</file>
-
-<file path=ppt/slides/slide2.xml><?xml version="1.0" encoding="utf-8"?>
-<p:sld xmlns:a="http://schemas.openxmlformats.org/drawingml/2006/main" xmlns:r="http://schemas.openxmlformats.org/officeDocument/2006/relationships" xmlns:p="http://schemas.openxmlformats.org/presentationml/2006/main">
-  <p:cSld>
-    <p:spTree>
-      <p:nvGrpSpPr>
-        <p:cNvPr id="1" name="">
-          <a:extLst>
-            <a:ext uri="{FF2B5EF4-FFF2-40B4-BE49-F238E27FC236}">
-              <a16:creationId xmlns:a16="http://schemas.microsoft.com/office/drawing/2014/main" id="{CD3260C6-AF0F-88C5-B0BC-68F1C4129755}"/>
-            </a:ext>
-          </a:extLst>
-        </p:cNvPr>
-        <p:cNvGrpSpPr/>
-        <p:nvPr/>
-      </p:nvGrpSpPr>
-      <p:grpSpPr>
-        <a:xfrm>
-          <a:off x="0" y="0"/>
-          <a:ext cx="0" cy="0"/>
-          <a:chOff x="0" y="0"/>
-          <a:chExt cx="0" cy="0"/>
-        </a:xfrm>
-      </p:grpSpPr>
-      <p:sp>
-        <p:nvSpPr>
-          <p:cNvPr id="2" name="TextBox 1">
-            <a:extLst>
-              <a:ext uri="{FF2B5EF4-FFF2-40B4-BE49-F238E27FC236}">
-                <a16:creationId xmlns:a16="http://schemas.microsoft.com/office/drawing/2014/main" id="{23EA85EF-E86B-9E0E-F015-E0526FC67051}"/>
+                <a16:creationId xmlns:a16="http://schemas.microsoft.com/office/drawing/2014/main" id="{CED5667C-D6EB-1BA4-AC70-DBF08B24E721}"/>
               </a:ext>
             </a:extLst>
           </p:cNvPr>
@@ -4772,7 +4669,7 @@
         <p:spPr>
           <a:xfrm>
             <a:off x="594360" y="320040"/>
-            <a:ext cx="10972800" cy="731520"/>
+            <a:ext cx="4525341" cy="553998"/>
           </a:xfrm>
           <a:prstGeom prst="rect">
             <a:avLst/>
@@ -4789,84 +4686,14 @@
               <a:defRPr sz="3000" b="1"/>
             </a:pPr>
             <a:r>
-              <a:t>Introduction</a:t>
-            </a:r>
-          </a:p>
-        </p:txBody>
-      </p:sp>
-      <p:sp>
-        <p:nvSpPr>
-          <p:cNvPr id="4" name="TextBox 3">
-            <a:extLst>
-              <a:ext uri="{FF2B5EF4-FFF2-40B4-BE49-F238E27FC236}">
-                <a16:creationId xmlns:a16="http://schemas.microsoft.com/office/drawing/2014/main" id="{560AB211-EFC4-7B87-FF7D-36BFEADB85A0}"/>
-              </a:ext>
-            </a:extLst>
-          </p:cNvPr>
-          <p:cNvSpPr txBox="1"/>
-          <p:nvPr/>
-        </p:nvSpPr>
-        <p:spPr>
-          <a:xfrm>
-            <a:off x="594360" y="6473952"/>
-            <a:ext cx="10972800" cy="228600"/>
-          </a:xfrm>
-          <a:prstGeom prst="rect">
-            <a:avLst/>
-          </a:prstGeom>
-          <a:noFill/>
-        </p:spPr>
-        <p:txBody>
-          <a:bodyPr wrap="none">
-            <a:spAutoFit/>
-          </a:bodyPr>
-          <a:lstStyle/>
-          <a:p>
-            <a:pPr>
-              <a:defRPr sz="900"/>
-            </a:pPr>
-            <a:r>
-              <a:t>GoodGrain Home Baking Evaluation</a:t>
-            </a:r>
-          </a:p>
-        </p:txBody>
-      </p:sp>
-      <p:pic>
-        <p:nvPicPr>
-          <p:cNvPr id="6" name="Picture 5" descr="figure-1.png">
-            <a:extLst>
-              <a:ext uri="{FF2B5EF4-FFF2-40B4-BE49-F238E27FC236}">
-                <a16:creationId xmlns:a16="http://schemas.microsoft.com/office/drawing/2014/main" id="{8831E572-24E7-851B-E503-91E60AE91FBA}"/>
-              </a:ext>
-            </a:extLst>
-          </p:cNvPr>
-          <p:cNvPicPr>
-            <a:picLocks noChangeAspect="1"/>
-          </p:cNvPicPr>
-          <p:nvPr/>
-        </p:nvPicPr>
-        <p:blipFill>
-          <a:blip r:embed="rId2"/>
-          <a:stretch>
-            <a:fillRect/>
-          </a:stretch>
-        </p:blipFill>
-        <p:spPr>
-          <a:xfrm>
-            <a:off x="2394857" y="1140200"/>
-            <a:ext cx="6675120" cy="5333752"/>
-          </a:xfrm>
-          <a:prstGeom prst="rect">
-            <a:avLst/>
-          </a:prstGeom>
-        </p:spPr>
-      </p:pic>
+              <a:rPr lang="en-US" dirty="0"/>
+              <a:t>This presentation provides:</a:t>
+            </a:r>
+            <a:endParaRPr dirty="0"/>
+          </a:p>
+        </p:txBody>
+      </p:sp>
     </p:spTree>
-    <p:extLst>
-      <p:ext uri="{BB962C8B-B14F-4D97-AF65-F5344CB8AC3E}">
-        <p14:creationId xmlns:p14="http://schemas.microsoft.com/office/powerpoint/2010/main" val="7739472"/>
-      </p:ext>
-    </p:extLst>
   </p:cSld>
   <p:clrMapOvr>
     <a:masterClrMapping/>
@@ -4917,7 +4744,7 @@
               <a:defRPr sz="3000" b="1"/>
             </a:pPr>
             <a:r>
-              <a:t>Why are we interested now?</a:t>
+              <a:t>Why might perennial crops be useful?</a:t>
             </a:r>
           </a:p>
         </p:txBody>
@@ -4931,7 +4758,7 @@
         <p:spPr>
           <a:xfrm>
             <a:off x="731520" y="1234440"/>
-            <a:ext cx="10789920" cy="5029200"/>
+            <a:ext cx="10789920" cy="2800767"/>
           </a:xfrm>
           <a:prstGeom prst="rect">
             <a:avLst/>
@@ -4948,10 +4775,11 @@
               <a:spcAft>
                 <a:spcPts val="1200"/>
               </a:spcAft>
-              <a:defRPr sz="1900"/>
-            </a:pPr>
-            <a:r>
-              <a:t>The researchers at Aarhus University think perennial rye has a lot of potential in Denmark.</a:t>
+              <a:defRPr sz="1800"/>
+            </a:pPr>
+            <a:r>
+              <a:rPr dirty="0"/>
+              <a:t>It is not yet clear whether annual plants are inherently superior for food production or whether humans simply happened to domesticate them.</a:t>
             </a:r>
           </a:p>
           <a:p>
@@ -4959,43 +4787,65 @@
               <a:spcAft>
                 <a:spcPts val="1200"/>
               </a:spcAft>
-              <a:defRPr sz="1900"/>
-            </a:pPr>
-            <a:r>
-              <a:t>In 2025, the perennial rye was tested side-by-side with a high-yielding annual rye.</a:t>
-            </a:r>
-          </a:p>
-          <a:p>
-            <a:pPr>
+              <a:defRPr sz="1800"/>
+            </a:pPr>
+            <a:r>
+              <a:rPr dirty="0"/>
+              <a:t>Having more perennials integrated into agricultural land would offer environmental benefits.</a:t>
+            </a:r>
+          </a:p>
+          <a:p>
+            <a:pPr marL="285750" indent="-285750">
               <a:spcAft>
                 <a:spcPts val="1200"/>
               </a:spcAft>
-              <a:defRPr sz="1900"/>
-            </a:pPr>
-            <a:r>
-              <a:t>It produced about half the grain yield of the modern annual rye.</a:t>
-            </a:r>
-          </a:p>
-          <a:p>
-            <a:pPr>
+              <a:buFont typeface="Arial" panose="020B0604020202020204" pitchFamily="34" charset="0"/>
+              <a:buChar char="•"/>
+              <a:defRPr sz="1800"/>
+            </a:pPr>
+            <a:r>
+              <a:rPr dirty="0"/>
+              <a:t>Perennials can help put carbon into the soil.</a:t>
+            </a:r>
+          </a:p>
+          <a:p>
+            <a:pPr marL="285750" indent="-285750">
               <a:spcAft>
                 <a:spcPts val="1200"/>
               </a:spcAft>
-              <a:defRPr sz="1900"/>
-            </a:pPr>
-            <a:r>
-              <a:t>The result was especially promising given that the perennial rye was crossed with varieties from the 1960s.</a:t>
-            </a:r>
-          </a:p>
-          <a:p>
-            <a:pPr>
+              <a:buFont typeface="Arial" panose="020B0604020202020204" pitchFamily="34" charset="0"/>
+              <a:buChar char="•"/>
+              <a:defRPr sz="1800"/>
+            </a:pPr>
+            <a:r>
+              <a:rPr dirty="0"/>
+              <a:t>They provide soil cover year-round.</a:t>
+            </a:r>
+          </a:p>
+          <a:p>
+            <a:pPr marL="285750" indent="-285750">
               <a:spcAft>
                 <a:spcPts val="1200"/>
               </a:spcAft>
-              <a:defRPr sz="1900"/>
-            </a:pPr>
-            <a:r>
-              <a:t>GoodGrain is part of the effort to develop and understand this variety.</a:t>
+              <a:buFont typeface="Arial" panose="020B0604020202020204" pitchFamily="34" charset="0"/>
+              <a:buChar char="•"/>
+              <a:defRPr sz="1800"/>
+            </a:pPr>
+            <a:r>
+              <a:rPr dirty="0"/>
+              <a:t>They can use resources such as water and nitrogen more efficiently.</a:t>
+            </a:r>
+          </a:p>
+          <a:p>
+            <a:pPr>
+              <a:spcAft>
+                <a:spcPts val="1200"/>
+              </a:spcAft>
+              <a:defRPr sz="1800"/>
+            </a:pPr>
+            <a:r>
+              <a:rPr dirty="0"/>
+              <a:t>Creating perennial versions of staple crops, such as rye, is one way to integrate more perennials into agriculture.</a:t>
             </a:r>
           </a:p>
         </p:txBody>
@@ -5065,7 +4915,7 @@
         <p:spPr>
           <a:xfrm>
             <a:off x="594360" y="320040"/>
-            <a:ext cx="10972800" cy="731520"/>
+            <a:ext cx="2736903" cy="553998"/>
           </a:xfrm>
           <a:prstGeom prst="rect">
             <a:avLst/>
@@ -5082,8 +4932,10 @@
               <a:defRPr sz="3000" b="1"/>
             </a:pPr>
             <a:r>
-              <a:t>How long will the crop produce grain?</a:t>
-            </a:r>
+              <a:rPr lang="en-US" dirty="0"/>
+              <a:t>Perennial grains</a:t>
+            </a:r>
+            <a:endParaRPr dirty="0"/>
           </a:p>
         </p:txBody>
       </p:sp>
@@ -5096,7 +4948,7 @@
         <p:spPr>
           <a:xfrm>
             <a:off x="731520" y="1234440"/>
-            <a:ext cx="10789920" cy="5029200"/>
+            <a:ext cx="10789920" cy="3508653"/>
           </a:xfrm>
           <a:prstGeom prst="rect">
             <a:avLst/>
@@ -5113,10 +4965,19 @@
               <a:spcAft>
                 <a:spcPts val="1200"/>
               </a:spcAft>
-              <a:defRPr sz="2100"/>
-            </a:pPr>
-            <a:r>
-              <a:t>This has not yet been tested extensively.</a:t>
+              <a:defRPr sz="1900"/>
+            </a:pPr>
+            <a:r>
+              <a:rPr lang="en-US" dirty="0"/>
+              <a:t>There have been efforts to breed </a:t>
+            </a:r>
+            <a:r>
+              <a:rPr lang="en-US" b="1" dirty="0"/>
+              <a:t>perennial wheat </a:t>
+            </a:r>
+            <a:r>
+              <a:rPr lang="en-US" dirty="0"/>
+              <a:t>since the 1930s.</a:t>
             </a:r>
           </a:p>
           <a:p>
@@ -5124,10 +4985,11 @@
               <a:spcAft>
                 <a:spcPts val="1200"/>
               </a:spcAft>
-              <a:defRPr sz="2100"/>
-            </a:pPr>
-            <a:r>
-              <a:t>The perennial rye appears to reliably produce grain for at least two years.</a:t>
+              <a:defRPr sz="1900"/>
+            </a:pPr>
+            <a:r>
+              <a:rPr lang="en-US" dirty="0"/>
+              <a:t>There has been success in creating wheat plants that regrow after harvest.</a:t>
             </a:r>
           </a:p>
           <a:p>
@@ -5135,10 +4997,11 @@
               <a:spcAft>
                 <a:spcPts val="1200"/>
               </a:spcAft>
-              <a:defRPr sz="2100"/>
-            </a:pPr>
-            <a:r>
-              <a:t>After that, weeds and diseases may become problems.</a:t>
+              <a:defRPr sz="1900"/>
+            </a:pPr>
+            <a:r>
+              <a:rPr lang="en-US" dirty="0"/>
+              <a:t>Multiple harvests is still difficult, and grain yields are low. </a:t>
             </a:r>
           </a:p>
           <a:p>
@@ -5146,17 +5009,67 @@
               <a:spcAft>
                 <a:spcPts val="1200"/>
               </a:spcAft>
-              <a:defRPr sz="2100"/>
-            </a:pPr>
-            <a:r>
-              <a:t>More research is needed to determine the optimal way to manage the crop.</a:t>
-            </a:r>
-          </a:p>
-        </p:txBody>
-      </p:sp>
-      <p:sp>
-        <p:nvSpPr>
-          <p:cNvPr id="4" name="TextBox 3"/>
+              <a:defRPr sz="1900"/>
+            </a:pPr>
+            <a:endParaRPr lang="en-US" dirty="0"/>
+          </a:p>
+          <a:p>
+            <a:pPr>
+              <a:spcAft>
+                <a:spcPts val="1200"/>
+              </a:spcAft>
+              <a:defRPr sz="1900"/>
+            </a:pPr>
+            <a:r>
+              <a:rPr lang="en-US" b="1" dirty="0"/>
+              <a:t>Intermediate wheatgrass</a:t>
+            </a:r>
+            <a:r>
+              <a:rPr lang="en-US" dirty="0"/>
+              <a:t> has been used as a forage, and is being bred for grain production.</a:t>
+            </a:r>
+          </a:p>
+          <a:p>
+            <a:pPr>
+              <a:spcAft>
+                <a:spcPts val="1200"/>
+              </a:spcAft>
+              <a:defRPr sz="1900"/>
+            </a:pPr>
+            <a:r>
+              <a:rPr lang="en-US" dirty="0"/>
+              <a:t>The grain has been registered with the name Kernza®. </a:t>
+            </a:r>
+          </a:p>
+          <a:p>
+            <a:pPr>
+              <a:spcAft>
+                <a:spcPts val="1200"/>
+              </a:spcAft>
+              <a:defRPr sz="1900"/>
+            </a:pPr>
+            <a:r>
+              <a:rPr lang="en-US" dirty="0"/>
+              <a:t>As of 2026, Kernza® is not approved for human consumption in the European Union. </a:t>
+            </a:r>
+          </a:p>
+          <a:p>
+            <a:pPr>
+              <a:spcAft>
+                <a:spcPts val="1200"/>
+              </a:spcAft>
+              <a:defRPr sz="1900"/>
+            </a:pPr>
+            <a:r>
+              <a:rPr lang="en-US" dirty="0"/>
+              <a:t>Grain yields are low.</a:t>
+            </a:r>
+          </a:p>
+        </p:txBody>
+      </p:sp>
+      <p:sp>
+        <p:nvSpPr>
+          <p:cNvPr id="5" name="TextBox 4"/>
           <p:cNvSpPr txBox="1"/>
           <p:nvPr/>
         </p:nvSpPr>
@@ -5194,6 +5107,293 @@
 </file>
 
 <file path=ppt/slides/slide22.xml><?xml version="1.0" encoding="utf-8"?>
+<p:sld xmlns:a="http://schemas.openxmlformats.org/drawingml/2006/main" xmlns:r="http://schemas.openxmlformats.org/officeDocument/2006/relationships" xmlns:p="http://schemas.openxmlformats.org/presentationml/2006/main">
+  <p:cSld>
+    <p:spTree>
+      <p:nvGrpSpPr>
+        <p:cNvPr id="1" name="">
+          <a:extLst>
+            <a:ext uri="{FF2B5EF4-FFF2-40B4-BE49-F238E27FC236}">
+              <a16:creationId xmlns:a16="http://schemas.microsoft.com/office/drawing/2014/main" id="{35D6898D-4F30-88F6-EDC5-42333B3E977A}"/>
+            </a:ext>
+          </a:extLst>
+        </p:cNvPr>
+        <p:cNvGrpSpPr/>
+        <p:nvPr/>
+      </p:nvGrpSpPr>
+      <p:grpSpPr>
+        <a:xfrm>
+          <a:off x="0" y="0"/>
+          <a:ext cx="0" cy="0"/>
+          <a:chOff x="0" y="0"/>
+          <a:chExt cx="0" cy="0"/>
+        </a:xfrm>
+      </p:grpSpPr>
+      <p:sp>
+        <p:nvSpPr>
+          <p:cNvPr id="2" name="TextBox 1">
+            <a:extLst>
+              <a:ext uri="{FF2B5EF4-FFF2-40B4-BE49-F238E27FC236}">
+                <a16:creationId xmlns:a16="http://schemas.microsoft.com/office/drawing/2014/main" id="{9128F489-47C4-07FC-5954-A209F0A60B89}"/>
+              </a:ext>
+            </a:extLst>
+          </p:cNvPr>
+          <p:cNvSpPr txBox="1"/>
+          <p:nvPr/>
+        </p:nvSpPr>
+        <p:spPr>
+          <a:xfrm>
+            <a:off x="594360" y="320040"/>
+            <a:ext cx="5262466" cy="553998"/>
+          </a:xfrm>
+          <a:prstGeom prst="rect">
+            <a:avLst/>
+          </a:prstGeom>
+          <a:noFill/>
+        </p:spPr>
+        <p:txBody>
+          <a:bodyPr wrap="none">
+            <a:spAutoFit/>
+          </a:bodyPr>
+          <a:lstStyle/>
+          <a:p>
+            <a:pPr>
+              <a:defRPr sz="3000" b="1"/>
+            </a:pPr>
+            <a:r>
+              <a:rPr lang="en-US" dirty="0"/>
+              <a:t>The history of this perennial rye</a:t>
+            </a:r>
+          </a:p>
+        </p:txBody>
+      </p:sp>
+      <p:sp>
+        <p:nvSpPr>
+          <p:cNvPr id="3" name="TextBox 2">
+            <a:extLst>
+              <a:ext uri="{FF2B5EF4-FFF2-40B4-BE49-F238E27FC236}">
+                <a16:creationId xmlns:a16="http://schemas.microsoft.com/office/drawing/2014/main" id="{9F62D64E-CFA6-9879-7CF7-A409483DC921}"/>
+              </a:ext>
+            </a:extLst>
+          </p:cNvPr>
+          <p:cNvSpPr txBox="1"/>
+          <p:nvPr/>
+        </p:nvSpPr>
+        <p:spPr>
+          <a:xfrm>
+            <a:off x="731520" y="1234440"/>
+            <a:ext cx="10789920" cy="1569660"/>
+          </a:xfrm>
+          <a:prstGeom prst="rect">
+            <a:avLst/>
+          </a:prstGeom>
+          <a:noFill/>
+        </p:spPr>
+        <p:txBody>
+          <a:bodyPr wrap="square">
+            <a:spAutoFit/>
+          </a:bodyPr>
+          <a:lstStyle/>
+          <a:p>
+            <a:pPr>
+              <a:spcAft>
+                <a:spcPts val="1200"/>
+              </a:spcAft>
+              <a:defRPr sz="1900"/>
+            </a:pPr>
+            <a:r>
+              <a:rPr lang="en-US" dirty="0"/>
+              <a:t>At the University of Hohenheim in Germany, </a:t>
+            </a:r>
+            <a:r>
+              <a:rPr lang="en-US" b="1" dirty="0"/>
+              <a:t>Dr. Reimann-Philips </a:t>
+            </a:r>
+            <a:r>
+              <a:rPr lang="en-US" dirty="0"/>
+              <a:t>and his team crossed annual rye with an old perennial rye ancestor in the 1960s.</a:t>
+            </a:r>
+          </a:p>
+          <a:p>
+            <a:pPr>
+              <a:spcAft>
+                <a:spcPts val="1200"/>
+              </a:spcAft>
+              <a:defRPr sz="1900"/>
+            </a:pPr>
+            <a:r>
+              <a:rPr lang="en-US" dirty="0"/>
+              <a:t>They tested the resulting plants and made further selections.</a:t>
+            </a:r>
+          </a:p>
+          <a:p>
+            <a:pPr>
+              <a:spcAft>
+                <a:spcPts val="1200"/>
+              </a:spcAft>
+              <a:defRPr sz="1900"/>
+            </a:pPr>
+            <a:r>
+              <a:rPr lang="en-US" dirty="0"/>
+              <a:t>The resulting crop was perennial and, in the 1990s, was submitted for consideration as a variety in Germany.</a:t>
+            </a:r>
+          </a:p>
+        </p:txBody>
+      </p:sp>
+      <p:sp>
+        <p:nvSpPr>
+          <p:cNvPr id="5" name="TextBox 4">
+            <a:extLst>
+              <a:ext uri="{FF2B5EF4-FFF2-40B4-BE49-F238E27FC236}">
+                <a16:creationId xmlns:a16="http://schemas.microsoft.com/office/drawing/2014/main" id="{F91BC47B-01B8-B108-78AF-F3F9BBE7EAB3}"/>
+              </a:ext>
+            </a:extLst>
+          </p:cNvPr>
+          <p:cNvSpPr txBox="1"/>
+          <p:nvPr/>
+        </p:nvSpPr>
+        <p:spPr>
+          <a:xfrm>
+            <a:off x="594360" y="6473952"/>
+            <a:ext cx="10972800" cy="228600"/>
+          </a:xfrm>
+          <a:prstGeom prst="rect">
+            <a:avLst/>
+          </a:prstGeom>
+          <a:noFill/>
+        </p:spPr>
+        <p:txBody>
+          <a:bodyPr wrap="none">
+            <a:spAutoFit/>
+          </a:bodyPr>
+          <a:lstStyle/>
+          <a:p>
+            <a:pPr>
+              <a:defRPr sz="900"/>
+            </a:pPr>
+            <a:r>
+              <a:t>GoodGrain Home Baking Evaluation</a:t>
+            </a:r>
+          </a:p>
+        </p:txBody>
+      </p:sp>
+    </p:spTree>
+    <p:extLst>
+      <p:ext uri="{BB962C8B-B14F-4D97-AF65-F5344CB8AC3E}">
+        <p14:creationId xmlns:p14="http://schemas.microsoft.com/office/powerpoint/2010/main" val="649456743"/>
+      </p:ext>
+    </p:extLst>
+  </p:cSld>
+  <p:clrMapOvr>
+    <a:masterClrMapping/>
+  </p:clrMapOvr>
+</p:sld>
+</file>
+
+<file path=ppt/slides/slide23.xml><?xml version="1.0" encoding="utf-8"?>
+<p:sld xmlns:a="http://schemas.openxmlformats.org/drawingml/2006/main" xmlns:r="http://schemas.openxmlformats.org/officeDocument/2006/relationships" xmlns:p="http://schemas.openxmlformats.org/presentationml/2006/main">
+  <p:cSld>
+    <p:spTree>
+      <p:nvGrpSpPr>
+        <p:cNvPr id="1" name="">
+          <a:extLst>
+            <a:ext uri="{FF2B5EF4-FFF2-40B4-BE49-F238E27FC236}">
+              <a16:creationId xmlns:a16="http://schemas.microsoft.com/office/drawing/2014/main" id="{B03217A2-DFF0-F91F-EE1C-7DD6DA50E397}"/>
+            </a:ext>
+          </a:extLst>
+        </p:cNvPr>
+        <p:cNvGrpSpPr/>
+        <p:nvPr/>
+      </p:nvGrpSpPr>
+      <p:grpSpPr>
+        <a:xfrm>
+          <a:off x="0" y="0"/>
+          <a:ext cx="0" cy="0"/>
+          <a:chOff x="0" y="0"/>
+          <a:chExt cx="0" cy="0"/>
+        </a:xfrm>
+      </p:grpSpPr>
+      <p:sp>
+        <p:nvSpPr>
+          <p:cNvPr id="5" name="TextBox 4">
+            <a:extLst>
+              <a:ext uri="{FF2B5EF4-FFF2-40B4-BE49-F238E27FC236}">
+                <a16:creationId xmlns:a16="http://schemas.microsoft.com/office/drawing/2014/main" id="{22EE090C-96DA-D2BD-1855-5FC6AD7EA196}"/>
+              </a:ext>
+            </a:extLst>
+          </p:cNvPr>
+          <p:cNvSpPr txBox="1"/>
+          <p:nvPr/>
+        </p:nvSpPr>
+        <p:spPr>
+          <a:xfrm>
+            <a:off x="594360" y="6473952"/>
+            <a:ext cx="10972800" cy="228600"/>
+          </a:xfrm>
+          <a:prstGeom prst="rect">
+            <a:avLst/>
+          </a:prstGeom>
+          <a:noFill/>
+        </p:spPr>
+        <p:txBody>
+          <a:bodyPr wrap="none">
+            <a:spAutoFit/>
+          </a:bodyPr>
+          <a:lstStyle/>
+          <a:p>
+            <a:pPr>
+              <a:defRPr sz="900"/>
+            </a:pPr>
+            <a:r>
+              <a:t>GoodGrain Home Baking Evaluation</a:t>
+            </a:r>
+          </a:p>
+        </p:txBody>
+      </p:sp>
+      <p:pic>
+        <p:nvPicPr>
+          <p:cNvPr id="7" name="Picture 6">
+            <a:extLst>
+              <a:ext uri="{FF2B5EF4-FFF2-40B4-BE49-F238E27FC236}">
+                <a16:creationId xmlns:a16="http://schemas.microsoft.com/office/drawing/2014/main" id="{15ACBA8D-C84F-6610-F5E3-68E47F58C180}"/>
+              </a:ext>
+            </a:extLst>
+          </p:cNvPr>
+          <p:cNvPicPr>
+            <a:picLocks noChangeAspect="1"/>
+          </p:cNvPicPr>
+          <p:nvPr/>
+        </p:nvPicPr>
+        <p:blipFill>
+          <a:blip r:embed="rId2"/>
+          <a:stretch>
+            <a:fillRect/>
+          </a:stretch>
+        </p:blipFill>
+        <p:spPr>
+          <a:xfrm>
+            <a:off x="2088631" y="874038"/>
+            <a:ext cx="8341090" cy="4333964"/>
+          </a:xfrm>
+          <a:prstGeom prst="rect">
+            <a:avLst/>
+          </a:prstGeom>
+        </p:spPr>
+      </p:pic>
+    </p:spTree>
+    <p:extLst>
+      <p:ext uri="{BB962C8B-B14F-4D97-AF65-F5344CB8AC3E}">
+        <p14:creationId xmlns:p14="http://schemas.microsoft.com/office/powerpoint/2010/main" val="3551212110"/>
+      </p:ext>
+    </p:extLst>
+  </p:cSld>
+  <p:clrMapOvr>
+    <a:masterClrMapping/>
+  </p:clrMapOvr>
+</p:sld>
+</file>
+
+<file path=ppt/slides/slide24.xml><?xml version="1.0" encoding="utf-8"?>
 <p:sld xmlns:a="http://schemas.openxmlformats.org/drawingml/2006/main" xmlns:r="http://schemas.openxmlformats.org/officeDocument/2006/relationships" xmlns:p="http://schemas.openxmlformats.org/presentationml/2006/main">
   <p:cSld>
     <p:spTree>
@@ -5236,7 +5436,7 @@
               <a:defRPr sz="3000" b="1"/>
             </a:pPr>
             <a:r>
-              <a:t>Thank you!</a:t>
+              <a:t>How long will the crop produce grain?</a:t>
             </a:r>
           </a:p>
         </p:txBody>
@@ -5249,8 +5449,8 @@
         </p:nvSpPr>
         <p:spPr>
           <a:xfrm>
-            <a:off x="731520" y="1463040"/>
-            <a:ext cx="10789920" cy="4114800"/>
+            <a:off x="731520" y="1234440"/>
+            <a:ext cx="10789920" cy="5029200"/>
           </a:xfrm>
           <a:prstGeom prst="rect">
             <a:avLst/>
@@ -5270,7 +5470,7 @@
               <a:defRPr sz="2100"/>
             </a:pPr>
             <a:r>
-              <a:t>Thank you for considering participation in the GoodGrain Home Baking Evaluation.</a:t>
+              <a:t>This has not yet been tested extensively.</a:t>
             </a:r>
           </a:p>
           <a:p>
@@ -5281,7 +5481,7 @@
               <a:defRPr sz="2100"/>
             </a:pPr>
             <a:r>
-              <a:t>Your baking experience will help us understand how this perennial rye performs in home kitchens and how people feel about eating a perennial grain.</a:t>
+              <a:t>The perennial rye appears to reliably produce grain for at least two years.</a:t>
             </a:r>
           </a:p>
           <a:p>
@@ -5292,7 +5492,18 @@
               <a:defRPr sz="2100"/>
             </a:pPr>
             <a:r>
-              <a:t>GoodGrain project: projects.au.dk/plant2food/funded-projects/goodgrain</a:t>
+              <a:t>After that, weeds and diseases may become problems.</a:t>
+            </a:r>
+          </a:p>
+          <a:p>
+            <a:pPr>
+              <a:spcAft>
+                <a:spcPts val="1200"/>
+              </a:spcAft>
+              <a:defRPr sz="2100"/>
+            </a:pPr>
+            <a:r>
+              <a:t>More research is needed to determine the optimal way to manage the crop.</a:t>
             </a:r>
           </a:p>
         </p:txBody>
@@ -5336,7 +5547,7 @@
 </p:sld>
 </file>
 
-<file path=ppt/slides/slide3.xml><?xml version="1.0" encoding="utf-8"?>
+<file path=ppt/slides/slide25.xml><?xml version="1.0" encoding="utf-8"?>
 <p:sld xmlns:a="http://schemas.openxmlformats.org/drawingml/2006/main" xmlns:r="http://schemas.openxmlformats.org/officeDocument/2006/relationships" xmlns:p="http://schemas.openxmlformats.org/presentationml/2006/main">
   <p:cSld>
     <p:spTree>
@@ -5379,7 +5590,7 @@
               <a:defRPr sz="3000" b="1"/>
             </a:pPr>
             <a:r>
-              <a:t>Introduction</a:t>
+              <a:t>What happened to the crop?</a:t>
             </a:r>
           </a:p>
         </p:txBody>
@@ -5393,7 +5604,337 @@
         <p:spPr>
           <a:xfrm>
             <a:off x="731520" y="1234440"/>
-            <a:ext cx="10477254" cy="2015936"/>
+            <a:ext cx="10789920" cy="5029200"/>
+          </a:xfrm>
+          <a:prstGeom prst="rect">
+            <a:avLst/>
+          </a:prstGeom>
+          <a:noFill/>
+        </p:spPr>
+        <p:txBody>
+          <a:bodyPr wrap="square">
+            <a:spAutoFit/>
+          </a:bodyPr>
+          <a:lstStyle/>
+          <a:p>
+            <a:pPr>
+              <a:spcAft>
+                <a:spcPts val="1200"/>
+              </a:spcAft>
+              <a:defRPr sz="1900"/>
+            </a:pPr>
+            <a:r>
+              <a:t>The German government rejected the application, and the crop was never released as a variety.</a:t>
+            </a:r>
+          </a:p>
+          <a:p>
+            <a:pPr>
+              <a:spcAft>
+                <a:spcPts val="1200"/>
+              </a:spcAft>
+              <a:defRPr sz="1900"/>
+            </a:pPr>
+            <a:r>
+              <a:t>The breeders maintained some plots as a passion project.</a:t>
+            </a:r>
+          </a:p>
+          <a:p>
+            <a:pPr>
+              <a:spcAft>
+                <a:spcPts val="1200"/>
+              </a:spcAft>
+              <a:defRPr sz="1900"/>
+            </a:pPr>
+            <a:r>
+              <a:t>Some material was later released as a wildlife forage crop.</a:t>
+            </a:r>
+          </a:p>
+          <a:p>
+            <a:pPr>
+              <a:spcAft>
+                <a:spcPts val="1200"/>
+              </a:spcAft>
+              <a:defRPr sz="1900"/>
+            </a:pPr>
+            <a:r>
+              <a:t>The perennial rye received little attention for about thirty years.</a:t>
+            </a:r>
+          </a:p>
+          <a:p>
+            <a:pPr>
+              <a:spcAft>
+                <a:spcPts val="1200"/>
+              </a:spcAft>
+              <a:defRPr sz="1900"/>
+            </a:pPr>
+            <a:r>
+              <a:t>In 2023, Dr. Thomas Miedaner shared seeds with researchers at Aarhus University.</a:t>
+            </a:r>
+          </a:p>
+        </p:txBody>
+      </p:sp>
+      <p:sp>
+        <p:nvSpPr>
+          <p:cNvPr id="4" name="TextBox 3"/>
+          <p:cNvSpPr txBox="1"/>
+          <p:nvPr/>
+        </p:nvSpPr>
+        <p:spPr>
+          <a:xfrm>
+            <a:off x="594360" y="6473952"/>
+            <a:ext cx="10972800" cy="228600"/>
+          </a:xfrm>
+          <a:prstGeom prst="rect">
+            <a:avLst/>
+          </a:prstGeom>
+          <a:noFill/>
+        </p:spPr>
+        <p:txBody>
+          <a:bodyPr wrap="none">
+            <a:spAutoFit/>
+          </a:bodyPr>
+          <a:lstStyle/>
+          <a:p>
+            <a:pPr>
+              <a:defRPr sz="900"/>
+            </a:pPr>
+            <a:r>
+              <a:t>GoodGrain Home Baking Evaluation</a:t>
+            </a:r>
+          </a:p>
+        </p:txBody>
+      </p:sp>
+    </p:spTree>
+  </p:cSld>
+  <p:clrMapOvr>
+    <a:masterClrMapping/>
+  </p:clrMapOvr>
+</p:sld>
+</file>
+
+<file path=ppt/slides/slide26.xml><?xml version="1.0" encoding="utf-8"?>
+<p:sld xmlns:a="http://schemas.openxmlformats.org/drawingml/2006/main" xmlns:r="http://schemas.openxmlformats.org/officeDocument/2006/relationships" xmlns:p="http://schemas.openxmlformats.org/presentationml/2006/main">
+  <p:cSld>
+    <p:spTree>
+      <p:nvGrpSpPr>
+        <p:cNvPr id="1" name=""/>
+        <p:cNvGrpSpPr/>
+        <p:nvPr/>
+      </p:nvGrpSpPr>
+      <p:grpSpPr>
+        <a:xfrm>
+          <a:off x="0" y="0"/>
+          <a:ext cx="0" cy="0"/>
+          <a:chOff x="0" y="0"/>
+          <a:chExt cx="0" cy="0"/>
+        </a:xfrm>
+      </p:grpSpPr>
+      <p:sp>
+        <p:nvSpPr>
+          <p:cNvPr id="2" name="TextBox 1"/>
+          <p:cNvSpPr txBox="1"/>
+          <p:nvPr/>
+        </p:nvSpPr>
+        <p:spPr>
+          <a:xfrm>
+            <a:off x="594360" y="320040"/>
+            <a:ext cx="10972800" cy="731520"/>
+          </a:xfrm>
+          <a:prstGeom prst="rect">
+            <a:avLst/>
+          </a:prstGeom>
+          <a:noFill/>
+        </p:spPr>
+        <p:txBody>
+          <a:bodyPr wrap="none">
+            <a:spAutoFit/>
+          </a:bodyPr>
+          <a:lstStyle/>
+          <a:p>
+            <a:pPr>
+              <a:defRPr sz="3000" b="1"/>
+            </a:pPr>
+            <a:r>
+              <a:t>Why are we interested now?</a:t>
+            </a:r>
+          </a:p>
+        </p:txBody>
+      </p:sp>
+      <p:sp>
+        <p:nvSpPr>
+          <p:cNvPr id="3" name="TextBox 2"/>
+          <p:cNvSpPr txBox="1"/>
+          <p:nvPr/>
+        </p:nvSpPr>
+        <p:spPr>
+          <a:xfrm>
+            <a:off x="731520" y="1234440"/>
+            <a:ext cx="10789920" cy="5029200"/>
+          </a:xfrm>
+          <a:prstGeom prst="rect">
+            <a:avLst/>
+          </a:prstGeom>
+          <a:noFill/>
+        </p:spPr>
+        <p:txBody>
+          <a:bodyPr wrap="square">
+            <a:spAutoFit/>
+          </a:bodyPr>
+          <a:lstStyle/>
+          <a:p>
+            <a:pPr>
+              <a:spcAft>
+                <a:spcPts val="1200"/>
+              </a:spcAft>
+              <a:defRPr sz="1900"/>
+            </a:pPr>
+            <a:r>
+              <a:t>The researchers at Aarhus University think perennial rye has a lot of potential in Denmark.</a:t>
+            </a:r>
+          </a:p>
+          <a:p>
+            <a:pPr>
+              <a:spcAft>
+                <a:spcPts val="1200"/>
+              </a:spcAft>
+              <a:defRPr sz="1900"/>
+            </a:pPr>
+            <a:r>
+              <a:t>In 2025, the perennial rye was tested side-by-side with a high-yielding annual rye.</a:t>
+            </a:r>
+          </a:p>
+          <a:p>
+            <a:pPr>
+              <a:spcAft>
+                <a:spcPts val="1200"/>
+              </a:spcAft>
+              <a:defRPr sz="1900"/>
+            </a:pPr>
+            <a:r>
+              <a:t>It produced about half the grain yield of the modern annual rye.</a:t>
+            </a:r>
+          </a:p>
+          <a:p>
+            <a:pPr>
+              <a:spcAft>
+                <a:spcPts val="1200"/>
+              </a:spcAft>
+              <a:defRPr sz="1900"/>
+            </a:pPr>
+            <a:r>
+              <a:t>The result was especially promising given that the perennial rye was crossed with varieties from the 1960s.</a:t>
+            </a:r>
+          </a:p>
+          <a:p>
+            <a:pPr>
+              <a:spcAft>
+                <a:spcPts val="1200"/>
+              </a:spcAft>
+              <a:defRPr sz="1900"/>
+            </a:pPr>
+            <a:r>
+              <a:t>GoodGrain is part of the effort to develop and understand this variety.</a:t>
+            </a:r>
+          </a:p>
+        </p:txBody>
+      </p:sp>
+      <p:sp>
+        <p:nvSpPr>
+          <p:cNvPr id="4" name="TextBox 3"/>
+          <p:cNvSpPr txBox="1"/>
+          <p:nvPr/>
+        </p:nvSpPr>
+        <p:spPr>
+          <a:xfrm>
+            <a:off x="594360" y="6473952"/>
+            <a:ext cx="10972800" cy="228600"/>
+          </a:xfrm>
+          <a:prstGeom prst="rect">
+            <a:avLst/>
+          </a:prstGeom>
+          <a:noFill/>
+        </p:spPr>
+        <p:txBody>
+          <a:bodyPr wrap="none">
+            <a:spAutoFit/>
+          </a:bodyPr>
+          <a:lstStyle/>
+          <a:p>
+            <a:pPr>
+              <a:defRPr sz="900"/>
+            </a:pPr>
+            <a:r>
+              <a:t>GoodGrain Home Baking Evaluation</a:t>
+            </a:r>
+          </a:p>
+        </p:txBody>
+      </p:sp>
+    </p:spTree>
+  </p:cSld>
+  <p:clrMapOvr>
+    <a:masterClrMapping/>
+  </p:clrMapOvr>
+</p:sld>
+</file>
+
+<file path=ppt/slides/slide27.xml><?xml version="1.0" encoding="utf-8"?>
+<p:sld xmlns:a="http://schemas.openxmlformats.org/drawingml/2006/main" xmlns:r="http://schemas.openxmlformats.org/officeDocument/2006/relationships" xmlns:p="http://schemas.openxmlformats.org/presentationml/2006/main">
+  <p:cSld>
+    <p:spTree>
+      <p:nvGrpSpPr>
+        <p:cNvPr id="1" name=""/>
+        <p:cNvGrpSpPr/>
+        <p:nvPr/>
+      </p:nvGrpSpPr>
+      <p:grpSpPr>
+        <a:xfrm>
+          <a:off x="0" y="0"/>
+          <a:ext cx="0" cy="0"/>
+          <a:chOff x="0" y="0"/>
+          <a:chExt cx="0" cy="0"/>
+        </a:xfrm>
+      </p:grpSpPr>
+      <p:sp>
+        <p:nvSpPr>
+          <p:cNvPr id="2" name="TextBox 1"/>
+          <p:cNvSpPr txBox="1"/>
+          <p:nvPr/>
+        </p:nvSpPr>
+        <p:spPr>
+          <a:xfrm>
+            <a:off x="594360" y="320040"/>
+            <a:ext cx="10972800" cy="731520"/>
+          </a:xfrm>
+          <a:prstGeom prst="rect">
+            <a:avLst/>
+          </a:prstGeom>
+          <a:noFill/>
+        </p:spPr>
+        <p:txBody>
+          <a:bodyPr wrap="none">
+            <a:spAutoFit/>
+          </a:bodyPr>
+          <a:lstStyle/>
+          <a:p>
+            <a:pPr>
+              <a:defRPr sz="3000" b="1"/>
+            </a:pPr>
+            <a:r>
+              <a:t>Thank you!</a:t>
+            </a:r>
+          </a:p>
+        </p:txBody>
+      </p:sp>
+      <p:sp>
+        <p:nvSpPr>
+          <p:cNvPr id="3" name="TextBox 2"/>
+          <p:cNvSpPr txBox="1"/>
+          <p:nvPr/>
+        </p:nvSpPr>
+        <p:spPr>
+          <a:xfrm>
+            <a:off x="731520" y="1463040"/>
+            <a:ext cx="10789920" cy="1215717"/>
           </a:xfrm>
           <a:prstGeom prst="rect">
             <a:avLst/>
@@ -5414,7 +5955,7 @@
             </a:pPr>
             <a:r>
               <a:rPr dirty="0"/>
-              <a:t>You have expressed interest in conducting a home baking evaluation using a new perennial variety of rye.</a:t>
+              <a:t>Thank you for considering participation in the GoodGrain Home Baking Evaluation.</a:t>
             </a:r>
           </a:p>
           <a:p>
@@ -5426,19 +5967,7 @@
             </a:pPr>
             <a:r>
               <a:rPr dirty="0"/>
-              <a:t>Thank you for your interest!</a:t>
-            </a:r>
-          </a:p>
-          <a:p>
-            <a:pPr>
-              <a:spcAft>
-                <a:spcPts val="1200"/>
-              </a:spcAft>
-              <a:defRPr sz="2100"/>
-            </a:pPr>
-            <a:r>
-              <a:rPr dirty="0"/>
-              <a:t>This presentation provides more in-depth information about the new variety so you can decide whether you would like to participate.</a:t>
+              <a:t>Your baking experience will help us understand how this perennial rye performs in home kitchens and how people feel about eating a perennial grain.</a:t>
             </a:r>
           </a:p>
         </p:txBody>
@@ -5475,6 +6004,212 @@
         </p:txBody>
       </p:sp>
     </p:spTree>
+  </p:cSld>
+  <p:clrMapOvr>
+    <a:masterClrMapping/>
+  </p:clrMapOvr>
+</p:sld>
+</file>
+
+<file path=ppt/slides/slide28.xml><?xml version="1.0" encoding="utf-8"?>
+<p:sld xmlns:a="http://schemas.openxmlformats.org/drawingml/2006/main" xmlns:r="http://schemas.openxmlformats.org/officeDocument/2006/relationships" xmlns:p="http://schemas.openxmlformats.org/presentationml/2006/main">
+  <p:cSld>
+    <p:spTree>
+      <p:nvGrpSpPr>
+        <p:cNvPr id="1" name="">
+          <a:extLst>
+            <a:ext uri="{FF2B5EF4-FFF2-40B4-BE49-F238E27FC236}">
+              <a16:creationId xmlns:a16="http://schemas.microsoft.com/office/drawing/2014/main" id="{DBD55048-EE4E-CE47-C6FB-36903CC078F2}"/>
+            </a:ext>
+          </a:extLst>
+        </p:cNvPr>
+        <p:cNvGrpSpPr/>
+        <p:nvPr/>
+      </p:nvGrpSpPr>
+      <p:grpSpPr>
+        <a:xfrm>
+          <a:off x="0" y="0"/>
+          <a:ext cx="0" cy="0"/>
+          <a:chOff x="0" y="0"/>
+          <a:chExt cx="0" cy="0"/>
+        </a:xfrm>
+      </p:grpSpPr>
+      <p:sp>
+        <p:nvSpPr>
+          <p:cNvPr id="4" name="TextBox 3">
+            <a:extLst>
+              <a:ext uri="{FF2B5EF4-FFF2-40B4-BE49-F238E27FC236}">
+                <a16:creationId xmlns:a16="http://schemas.microsoft.com/office/drawing/2014/main" id="{BC5C0D15-96B2-96FC-117B-8059D410F680}"/>
+              </a:ext>
+            </a:extLst>
+          </p:cNvPr>
+          <p:cNvSpPr txBox="1"/>
+          <p:nvPr/>
+        </p:nvSpPr>
+        <p:spPr>
+          <a:xfrm>
+            <a:off x="594360" y="6473952"/>
+            <a:ext cx="10972800" cy="228600"/>
+          </a:xfrm>
+          <a:prstGeom prst="rect">
+            <a:avLst/>
+          </a:prstGeom>
+          <a:noFill/>
+        </p:spPr>
+        <p:txBody>
+          <a:bodyPr wrap="none">
+            <a:spAutoFit/>
+          </a:bodyPr>
+          <a:lstStyle/>
+          <a:p>
+            <a:pPr>
+              <a:defRPr sz="900"/>
+            </a:pPr>
+            <a:r>
+              <a:t>GoodGrain Home Baking Evaluation</a:t>
+            </a:r>
+          </a:p>
+        </p:txBody>
+      </p:sp>
+      <p:pic>
+        <p:nvPicPr>
+          <p:cNvPr id="6" name="Picture 5">
+            <a:extLst>
+              <a:ext uri="{FF2B5EF4-FFF2-40B4-BE49-F238E27FC236}">
+                <a16:creationId xmlns:a16="http://schemas.microsoft.com/office/drawing/2014/main" id="{FC053283-D9FD-4551-92AD-59AA734D0191}"/>
+              </a:ext>
+            </a:extLst>
+          </p:cNvPr>
+          <p:cNvPicPr>
+            <a:picLocks noChangeAspect="1"/>
+          </p:cNvPicPr>
+          <p:nvPr/>
+        </p:nvPicPr>
+        <p:blipFill>
+          <a:blip r:embed="rId2"/>
+          <a:stretch>
+            <a:fillRect/>
+          </a:stretch>
+        </p:blipFill>
+        <p:spPr>
+          <a:xfrm>
+            <a:off x="1802594" y="0"/>
+            <a:ext cx="8586812" cy="6858000"/>
+          </a:xfrm>
+          <a:prstGeom prst="rect">
+            <a:avLst/>
+          </a:prstGeom>
+        </p:spPr>
+      </p:pic>
+    </p:spTree>
+    <p:extLst>
+      <p:ext uri="{BB962C8B-B14F-4D97-AF65-F5344CB8AC3E}">
+        <p14:creationId xmlns:p14="http://schemas.microsoft.com/office/powerpoint/2010/main" val="1016804310"/>
+      </p:ext>
+    </p:extLst>
+  </p:cSld>
+  <p:clrMapOvr>
+    <a:masterClrMapping/>
+  </p:clrMapOvr>
+</p:sld>
+</file>
+
+<file path=ppt/slides/slide3.xml><?xml version="1.0" encoding="utf-8"?>
+<p:sld xmlns:a="http://schemas.openxmlformats.org/drawingml/2006/main" xmlns:r="http://schemas.openxmlformats.org/officeDocument/2006/relationships" xmlns:p="http://schemas.openxmlformats.org/presentationml/2006/main">
+  <p:cSld>
+    <p:spTree>
+      <p:nvGrpSpPr>
+        <p:cNvPr id="1" name="">
+          <a:extLst>
+            <a:ext uri="{FF2B5EF4-FFF2-40B4-BE49-F238E27FC236}">
+              <a16:creationId xmlns:a16="http://schemas.microsoft.com/office/drawing/2014/main" id="{CD3260C6-AF0F-88C5-B0BC-68F1C4129755}"/>
+            </a:ext>
+          </a:extLst>
+        </p:cNvPr>
+        <p:cNvGrpSpPr/>
+        <p:nvPr/>
+      </p:nvGrpSpPr>
+      <p:grpSpPr>
+        <a:xfrm>
+          <a:off x="0" y="0"/>
+          <a:ext cx="0" cy="0"/>
+          <a:chOff x="0" y="0"/>
+          <a:chExt cx="0" cy="0"/>
+        </a:xfrm>
+      </p:grpSpPr>
+      <p:sp>
+        <p:nvSpPr>
+          <p:cNvPr id="4" name="TextBox 3">
+            <a:extLst>
+              <a:ext uri="{FF2B5EF4-FFF2-40B4-BE49-F238E27FC236}">
+                <a16:creationId xmlns:a16="http://schemas.microsoft.com/office/drawing/2014/main" id="{560AB211-EFC4-7B87-FF7D-36BFEADB85A0}"/>
+              </a:ext>
+            </a:extLst>
+          </p:cNvPr>
+          <p:cNvSpPr txBox="1"/>
+          <p:nvPr/>
+        </p:nvSpPr>
+        <p:spPr>
+          <a:xfrm>
+            <a:off x="594360" y="6473952"/>
+            <a:ext cx="10972800" cy="228600"/>
+          </a:xfrm>
+          <a:prstGeom prst="rect">
+            <a:avLst/>
+          </a:prstGeom>
+          <a:noFill/>
+        </p:spPr>
+        <p:txBody>
+          <a:bodyPr wrap="none">
+            <a:spAutoFit/>
+          </a:bodyPr>
+          <a:lstStyle/>
+          <a:p>
+            <a:pPr>
+              <a:defRPr sz="900"/>
+            </a:pPr>
+            <a:r>
+              <a:t>GoodGrain Home Baking Evaluation</a:t>
+            </a:r>
+          </a:p>
+        </p:txBody>
+      </p:sp>
+      <p:pic>
+        <p:nvPicPr>
+          <p:cNvPr id="6" name="Picture 5" descr="figure-1.png">
+            <a:extLst>
+              <a:ext uri="{FF2B5EF4-FFF2-40B4-BE49-F238E27FC236}">
+                <a16:creationId xmlns:a16="http://schemas.microsoft.com/office/drawing/2014/main" id="{8831E572-24E7-851B-E503-91E60AE91FBA}"/>
+              </a:ext>
+            </a:extLst>
+          </p:cNvPr>
+          <p:cNvPicPr>
+            <a:picLocks noChangeAspect="1"/>
+          </p:cNvPicPr>
+          <p:nvPr/>
+        </p:nvPicPr>
+        <p:blipFill>
+          <a:blip r:embed="rId2"/>
+          <a:stretch>
+            <a:fillRect/>
+          </a:stretch>
+        </p:blipFill>
+        <p:spPr>
+          <a:xfrm>
+            <a:off x="2407963" y="482075"/>
+            <a:ext cx="7376074" cy="5893849"/>
+          </a:xfrm>
+          <a:prstGeom prst="rect">
+            <a:avLst/>
+          </a:prstGeom>
+        </p:spPr>
+      </p:pic>
+    </p:spTree>
+    <p:extLst>
+      <p:ext uri="{BB962C8B-B14F-4D97-AF65-F5344CB8AC3E}">
+        <p14:creationId xmlns:p14="http://schemas.microsoft.com/office/powerpoint/2010/main" val="7739472"/>
+      </p:ext>
+    </p:extLst>
   </p:cSld>
   <p:clrMapOvr>
     <a:masterClrMapping/>
@@ -5525,6 +6260,7 @@
               <a:defRPr sz="3000" b="1"/>
             </a:pPr>
             <a:r>
+              <a:rPr dirty="0"/>
               <a:t>What happens next?</a:t>
             </a:r>
           </a:p>
@@ -5539,7 +6275,7 @@
         <p:spPr>
           <a:xfrm>
             <a:off x="731520" y="1234440"/>
-            <a:ext cx="10789920" cy="2015936"/>
+            <a:ext cx="10789920" cy="1215717"/>
           </a:xfrm>
           <a:prstGeom prst="rect">
             <a:avLst/>
@@ -5560,7 +6296,15 @@
             </a:pPr>
             <a:r>
               <a:rPr b="1" dirty="0"/>
-              <a:t>Watch the Informational Video (in English)</a:t>
+              <a:t>Watch th</a:t>
+            </a:r>
+            <a:r>
+              <a:rPr lang="en-US" b="1" dirty="0"/>
+              <a:t>is</a:t>
+            </a:r>
+            <a:r>
+              <a:rPr b="1" dirty="0"/>
+              <a:t> Informational Video (in English)</a:t>
             </a:r>
             <a:r>
               <a:rPr dirty="0"/>
@@ -5575,20 +6319,20 @@
               <a:defRPr sz="2100"/>
             </a:pPr>
             <a:r>
+              <a:rPr lang="en-US" dirty="0"/>
+              <a:t>Afterwards, i</a:t>
+            </a:r>
+            <a:r>
               <a:rPr dirty="0"/>
-              <a:t>If you decide you would like to participate in the research, complete the intake form.</a:t>
-            </a:r>
-          </a:p>
-          <a:p>
-            <a:pPr>
-              <a:spcAft>
-                <a:spcPts val="1200"/>
-              </a:spcAft>
-              <a:defRPr sz="2100"/>
-            </a:pPr>
+              <a:t>f you </a:t>
+            </a:r>
+            <a:r>
+              <a:rPr b="1" dirty="0"/>
+              <a:t>decide you would like to participate in the research</a:t>
+            </a:r>
             <a:r>
               <a:rPr dirty="0"/>
-              <a:t>Attendance at the GoodGrain field event and symposium is optional and is not required for participation in the Home Baking Evaluation.</a:t>
+              <a:t>, complete the intake form.</a:t>
             </a:r>
           </a:p>
         </p:txBody>
@@ -5637,13 +6381,7 @@
   <p:cSld>
     <p:spTree>
       <p:nvGrpSpPr>
-        <p:cNvPr id="1" name="">
-          <a:extLst>
-            <a:ext uri="{FF2B5EF4-FFF2-40B4-BE49-F238E27FC236}">
-              <a16:creationId xmlns:a16="http://schemas.microsoft.com/office/drawing/2014/main" id="{A4545A0E-532B-187A-82E8-E144501C82CE}"/>
-            </a:ext>
-          </a:extLst>
-        </p:cNvPr>
+        <p:cNvPr id="1" name=""/>
         <p:cNvGrpSpPr/>
         <p:nvPr/>
       </p:nvGrpSpPr>
@@ -5657,20 +6395,14 @@
       </p:grpSpPr>
       <p:sp>
         <p:nvSpPr>
-          <p:cNvPr id="2" name="TextBox 1">
-            <a:extLst>
-              <a:ext uri="{FF2B5EF4-FFF2-40B4-BE49-F238E27FC236}">
-                <a16:creationId xmlns:a16="http://schemas.microsoft.com/office/drawing/2014/main" id="{2A351185-1806-3660-B8F0-4FCD1D546330}"/>
-              </a:ext>
-            </a:extLst>
-          </p:cNvPr>
+          <p:cNvPr id="2" name="TextBox 1"/>
           <p:cNvSpPr txBox="1"/>
           <p:nvPr/>
         </p:nvSpPr>
         <p:spPr>
           <a:xfrm>
             <a:off x="594360" y="320040"/>
-            <a:ext cx="2716513" cy="553998"/>
+            <a:ext cx="2910412" cy="553998"/>
           </a:xfrm>
           <a:prstGeom prst="rect">
             <a:avLst/>
@@ -5688,7 +6420,7 @@
             </a:pPr>
             <a:r>
               <a:rPr lang="en-US" dirty="0"/>
-              <a:t>Optional events</a:t>
+              <a:t>Why GoodGrain?</a:t>
             </a:r>
             <a:endParaRPr dirty="0"/>
           </a:p>
@@ -5696,20 +6428,14 @@
       </p:sp>
       <p:sp>
         <p:nvSpPr>
-          <p:cNvPr id="3" name="TextBox 2">
-            <a:extLst>
-              <a:ext uri="{FF2B5EF4-FFF2-40B4-BE49-F238E27FC236}">
-                <a16:creationId xmlns:a16="http://schemas.microsoft.com/office/drawing/2014/main" id="{3CCAA353-A4ED-5BF4-C061-B20B0CC9AB5F}"/>
-              </a:ext>
-            </a:extLst>
-          </p:cNvPr>
+          <p:cNvPr id="3" name="TextBox 2"/>
           <p:cNvSpPr txBox="1"/>
           <p:nvPr/>
         </p:nvSpPr>
         <p:spPr>
           <a:xfrm>
             <a:off x="731520" y="1234440"/>
-            <a:ext cx="10789920" cy="2169825"/>
+            <a:ext cx="10789920" cy="2754600"/>
           </a:xfrm>
           <a:prstGeom prst="rect">
             <a:avLst/>
@@ -5726,39 +6452,113 @@
               <a:spcAft>
                 <a:spcPts val="1200"/>
               </a:spcAft>
-              <a:defRPr sz="2100"/>
-            </a:pPr>
-            <a:r>
-              <a:rPr lang="en-US" dirty="0"/>
-              <a:t>Summer 2027: Public event where you can see perennial rye growing in the field</a:t>
-            </a:r>
+              <a:defRPr sz="1900"/>
+            </a:pPr>
+            <a:r>
+              <a:rPr dirty="0"/>
+              <a:t>Common bread crops such as wheat, oats, rye and barley are </a:t>
+            </a:r>
+            <a:r>
+              <a:rPr b="1" dirty="0"/>
+              <a:t>annual</a:t>
+            </a:r>
+            <a:r>
+              <a:rPr lang="en-US" b="1" dirty="0"/>
+              <a:t> grains</a:t>
+            </a:r>
+            <a:r>
+              <a:rPr dirty="0"/>
+              <a:t>: they are sown, produce one grain harvest, and must then be sown again.</a:t>
+            </a:r>
+            <a:endParaRPr lang="en-US" dirty="0"/>
           </a:p>
           <a:p>
             <a:pPr>
               <a:spcAft>
                 <a:spcPts val="1200"/>
               </a:spcAft>
-              <a:defRPr sz="2100"/>
-            </a:pPr>
-            <a:r>
-              <a:rPr lang="en-US"/>
-              <a:t>Fall 2027: A </a:t>
-            </a:r>
-            <a:r>
-              <a:rPr lang="en-US" dirty="0"/>
-              <a:t>public symposium to share information about perennial rye</a:t>
-            </a:r>
+              <a:defRPr sz="1900"/>
+            </a:pPr>
+            <a:r>
+              <a:rPr lang="da-DK" dirty="0"/>
+              <a:t>An alternative </a:t>
+            </a:r>
+            <a:r>
+              <a:rPr lang="da-DK" dirty="0" err="1"/>
+              <a:t>would</a:t>
+            </a:r>
+            <a:r>
+              <a:rPr lang="da-DK" dirty="0"/>
+              <a:t> </a:t>
+            </a:r>
+            <a:r>
+              <a:rPr lang="da-DK" dirty="0" err="1"/>
+              <a:t>be</a:t>
+            </a:r>
+            <a:r>
+              <a:rPr lang="da-DK" dirty="0"/>
+              <a:t> a </a:t>
+            </a:r>
+            <a:r>
+              <a:rPr lang="da-DK" b="1" dirty="0" err="1"/>
+              <a:t>perennial</a:t>
+            </a:r>
+            <a:r>
+              <a:rPr lang="da-DK" b="1" dirty="0"/>
+              <a:t> </a:t>
+            </a:r>
+            <a:r>
+              <a:rPr lang="da-DK" b="1" dirty="0" err="1"/>
+              <a:t>grain</a:t>
+            </a:r>
+            <a:r>
+              <a:rPr lang="da-DK" dirty="0"/>
+              <a:t>, </a:t>
+            </a:r>
+            <a:r>
+              <a:rPr lang="da-DK" dirty="0" err="1"/>
+              <a:t>which</a:t>
+            </a:r>
+            <a:r>
+              <a:rPr lang="da-DK" dirty="0"/>
+              <a:t> </a:t>
+            </a:r>
+            <a:r>
+              <a:rPr lang="da-DK" dirty="0" err="1"/>
+              <a:t>would</a:t>
+            </a:r>
+            <a:r>
+              <a:rPr lang="da-DK" dirty="0"/>
+              <a:t> </a:t>
+            </a:r>
+            <a:r>
+              <a:rPr lang="da-DK" dirty="0" err="1"/>
+              <a:t>continue</a:t>
+            </a:r>
+            <a:r>
+              <a:rPr lang="da-DK" dirty="0"/>
+              <a:t> to live </a:t>
+            </a:r>
+            <a:r>
+              <a:rPr lang="da-DK" dirty="0" err="1"/>
+              <a:t>after</a:t>
+            </a:r>
+            <a:r>
+              <a:rPr lang="da-DK" dirty="0"/>
+              <a:t> it is harvested.</a:t>
+            </a:r>
+            <a:endParaRPr dirty="0"/>
           </a:p>
           <a:p>
             <a:pPr>
               <a:spcAft>
                 <a:spcPts val="1200"/>
               </a:spcAft>
-              <a:defRPr sz="2100"/>
-            </a:pPr>
-            <a:r>
-              <a:rPr lang="en-US" dirty="0"/>
-              <a:t>Both are free and open to the public!</a:t>
+              <a:defRPr sz="1900"/>
+            </a:pPr>
+            <a:r>
+              <a:rPr dirty="0"/>
+              <a:t>A crop producing two or three grain harvests from one sowing could save farmers work and tractor driving.</a:t>
             </a:r>
           </a:p>
           <a:p>
@@ -5766,32 +6566,58 @@
               <a:spcAft>
                 <a:spcPts val="1200"/>
               </a:spcAft>
-              <a:defRPr sz="2100"/>
-            </a:pPr>
+              <a:defRPr sz="1900"/>
+            </a:pPr>
+            <a:r>
+              <a:rPr lang="en-US" dirty="0"/>
+              <a:t>A crop that r</a:t>
+            </a:r>
             <a:r>
               <a:rPr dirty="0"/>
-              <a:t>Attendance at the GoodGrain field event and symposium is </a:t>
-            </a:r>
-            <a:r>
-              <a:rPr b="1" i="1" dirty="0"/>
-              <a:t>optional</a:t>
+              <a:t>emain</a:t>
+            </a:r>
+            <a:r>
+              <a:rPr lang="en-US" dirty="0"/>
+              <a:t>s</a:t>
             </a:r>
             <a:r>
               <a:rPr dirty="0"/>
-              <a:t> and is not required for participation in the Home Baking Evaluation.</a:t>
-            </a:r>
-          </a:p>
-        </p:txBody>
-      </p:sp>
-      <p:sp>
-        <p:nvSpPr>
-          <p:cNvPr id="4" name="TextBox 3">
-            <a:extLst>
-              <a:ext uri="{FF2B5EF4-FFF2-40B4-BE49-F238E27FC236}">
-                <a16:creationId xmlns:a16="http://schemas.microsoft.com/office/drawing/2014/main" id="{E6CE7918-B1E7-58A8-C3B5-AE044EC2C291}"/>
-              </a:ext>
-            </a:extLst>
-          </p:cNvPr>
+              <a:t> in the field and develop</a:t>
+            </a:r>
+            <a:r>
+              <a:rPr lang="en-US" dirty="0"/>
+              <a:t>s</a:t>
+            </a:r>
+            <a:r>
+              <a:rPr dirty="0"/>
+              <a:t> more roots may also create better environmental outcomes.</a:t>
+            </a:r>
+          </a:p>
+          <a:p>
+            <a:pPr>
+              <a:spcAft>
+                <a:spcPts val="1200"/>
+              </a:spcAft>
+              <a:defRPr sz="1900"/>
+            </a:pPr>
+            <a:r>
+              <a:rPr dirty="0"/>
+              <a:t>A few perennial grain varieties have recently been developed, including a </a:t>
+            </a:r>
+            <a:r>
+              <a:rPr b="1" dirty="0"/>
+              <a:t>perennial rye </a:t>
+            </a:r>
+            <a:r>
+              <a:rPr dirty="0"/>
+              <a:t>that is being tested in Denmark.</a:t>
+            </a:r>
+          </a:p>
+        </p:txBody>
+      </p:sp>
+      <p:sp>
+        <p:nvSpPr>
+          <p:cNvPr id="4" name="TextBox 3"/>
           <p:cNvSpPr txBox="1"/>
           <p:nvPr/>
         </p:nvSpPr>
@@ -5821,11 +6647,6 @@
         </p:txBody>
       </p:sp>
     </p:spTree>
-    <p:extLst>
-      <p:ext uri="{BB962C8B-B14F-4D97-AF65-F5344CB8AC3E}">
-        <p14:creationId xmlns:p14="http://schemas.microsoft.com/office/powerpoint/2010/main" val="183905824"/>
-      </p:ext>
-    </p:extLst>
   </p:cSld>
   <p:clrMapOvr>
     <a:masterClrMapping/>
@@ -5876,7 +6697,7 @@
               <a:defRPr sz="3000" b="1"/>
             </a:pPr>
             <a:r>
-              <a:t>An overview of the project</a:t>
+              <a:t>Why GoodGrain?</a:t>
             </a:r>
           </a:p>
         </p:txBody>
@@ -5890,7 +6711,7 @@
         <p:spPr>
           <a:xfrm>
             <a:off x="731520" y="1234440"/>
-            <a:ext cx="10789920" cy="5029200"/>
+            <a:ext cx="10789920" cy="2708434"/>
           </a:xfrm>
           <a:prstGeom prst="rect">
             <a:avLst/>
@@ -5907,10 +6728,11 @@
               <a:spcAft>
                 <a:spcPts val="1200"/>
               </a:spcAft>
-              <a:defRPr sz="1900"/>
-            </a:pPr>
-            <a:r>
-              <a:t>Common bread crops such as wheat, oats, rye and barley are annuals: they are sown, produce one grain harvest, and must then be sown again.</a:t>
+              <a:defRPr sz="2000"/>
+            </a:pPr>
+            <a:r>
+              <a:rPr dirty="0"/>
+              <a:t>Field testing is evaluating how the new perennial rye grows in Denmark and how it affects the environment compared with annual rye.</a:t>
             </a:r>
           </a:p>
           <a:p>
@@ -5918,10 +6740,19 @@
               <a:spcAft>
                 <a:spcPts val="1200"/>
               </a:spcAft>
-              <a:defRPr sz="1900"/>
-            </a:pPr>
-            <a:r>
-              <a:t>A crop producing two or three grain harvests from one sowing could save farmers work and tractor driving.</a:t>
+              <a:defRPr sz="2000"/>
+            </a:pPr>
+            <a:r>
+              <a:rPr dirty="0"/>
+              <a:t>GoodGrain builds on this </a:t>
+            </a:r>
+            <a:r>
+              <a:rPr lang="en-US" dirty="0"/>
+              <a:t>field testing </a:t>
+            </a:r>
+            <a:r>
+              <a:rPr dirty="0"/>
+              <a:t>by looking specifically at the new perennial rye's grain characteristics.</a:t>
             </a:r>
           </a:p>
           <a:p>
@@ -5929,22 +6760,134 @@
               <a:spcAft>
                 <a:spcPts val="1200"/>
               </a:spcAft>
-              <a:defRPr sz="1900"/>
-            </a:pPr>
-            <a:r>
-              <a:t>Remaining in the field and developing more roots may also create better environmental outcomes.</a:t>
-            </a:r>
+              <a:defRPr sz="2000"/>
+            </a:pPr>
+            <a:r>
+              <a:rPr dirty="0"/>
+              <a:t>One important characteristic is baking quality.</a:t>
+            </a:r>
+            <a:endParaRPr lang="en-US" dirty="0"/>
           </a:p>
           <a:p>
             <a:pPr>
               <a:spcAft>
                 <a:spcPts val="1200"/>
               </a:spcAft>
-              <a:defRPr sz="1900"/>
-            </a:pPr>
-            <a:r>
-              <a:t>A few perennial grain varieties have recently been developed, including a perennial rye that is being tested in Denmark.</a:t>
-            </a:r>
+              <a:defRPr sz="2000"/>
+            </a:pPr>
+            <a:r>
+              <a:rPr lang="da-DK" dirty="0" err="1"/>
+              <a:t>Other</a:t>
+            </a:r>
+            <a:r>
+              <a:rPr lang="da-DK" dirty="0"/>
+              <a:t> </a:t>
+            </a:r>
+            <a:r>
+              <a:rPr lang="da-DK" dirty="0" err="1"/>
+              <a:t>aspects</a:t>
+            </a:r>
+            <a:r>
+              <a:rPr lang="da-DK" dirty="0"/>
+              <a:t> </a:t>
+            </a:r>
+            <a:r>
+              <a:rPr lang="da-DK" dirty="0" err="1"/>
+              <a:t>include</a:t>
+            </a:r>
+            <a:r>
+              <a:rPr lang="da-DK" dirty="0"/>
+              <a:t> the </a:t>
+            </a:r>
+            <a:r>
+              <a:rPr lang="da-DK" dirty="0" err="1"/>
+              <a:t>nutritional</a:t>
+            </a:r>
+            <a:r>
+              <a:rPr lang="da-DK" dirty="0"/>
+              <a:t> </a:t>
+            </a:r>
+            <a:r>
+              <a:rPr lang="da-DK" dirty="0" err="1"/>
+              <a:t>quality</a:t>
+            </a:r>
+            <a:r>
+              <a:rPr lang="da-DK" dirty="0"/>
+              <a:t> of the </a:t>
+            </a:r>
+            <a:r>
+              <a:rPr lang="da-DK" dirty="0" err="1"/>
+              <a:t>grain</a:t>
+            </a:r>
+            <a:r>
+              <a:rPr lang="da-DK" dirty="0"/>
+              <a:t>, and the </a:t>
+            </a:r>
+            <a:r>
+              <a:rPr lang="da-DK" dirty="0" err="1"/>
+              <a:t>prevalence</a:t>
+            </a:r>
+            <a:r>
+              <a:rPr lang="da-DK" dirty="0"/>
+              <a:t> of a common </a:t>
+            </a:r>
+            <a:r>
+              <a:rPr lang="da-DK" dirty="0" err="1"/>
+              <a:t>disease</a:t>
+            </a:r>
+            <a:r>
+              <a:rPr lang="da-DK" dirty="0"/>
+              <a:t>, </a:t>
+            </a:r>
+            <a:r>
+              <a:rPr lang="da-DK" dirty="0" err="1"/>
+              <a:t>ergot</a:t>
+            </a:r>
+            <a:r>
+              <a:rPr lang="da-DK" dirty="0"/>
+              <a:t>, </a:t>
+            </a:r>
+            <a:r>
+              <a:rPr lang="da-DK" dirty="0" err="1"/>
+              <a:t>which</a:t>
+            </a:r>
+            <a:r>
+              <a:rPr lang="da-DK" dirty="0"/>
+              <a:t> </a:t>
+            </a:r>
+            <a:r>
+              <a:rPr lang="da-DK" dirty="0" err="1"/>
+              <a:t>can</a:t>
+            </a:r>
+            <a:r>
+              <a:rPr lang="da-DK" dirty="0"/>
+              <a:t> </a:t>
+            </a:r>
+            <a:r>
+              <a:rPr lang="da-DK" dirty="0" err="1"/>
+              <a:t>be</a:t>
+            </a:r>
+            <a:r>
+              <a:rPr lang="da-DK" dirty="0"/>
+              <a:t> </a:t>
+            </a:r>
+            <a:r>
+              <a:rPr lang="da-DK" dirty="0" err="1"/>
+              <a:t>found</a:t>
+            </a:r>
+            <a:r>
+              <a:rPr lang="da-DK" dirty="0"/>
+              <a:t> in harvested </a:t>
+            </a:r>
+            <a:r>
+              <a:rPr lang="da-DK" dirty="0" err="1"/>
+              <a:t>grain</a:t>
+            </a:r>
+            <a:r>
+              <a:rPr lang="da-DK" dirty="0"/>
+              <a:t>. </a:t>
+            </a:r>
+            <a:endParaRPr dirty="0"/>
           </a:p>
         </p:txBody>
       </p:sp>
@@ -6030,7 +6973,7 @@
               <a:defRPr sz="3000" b="1"/>
             </a:pPr>
             <a:r>
-              <a:t>Why GoodGrain?</a:t>
+              <a:t>What does participating involve?</a:t>
             </a:r>
           </a:p>
         </p:txBody>
@@ -6044,7 +6987,7 @@
         <p:spPr>
           <a:xfrm>
             <a:off x="731520" y="1234440"/>
-            <a:ext cx="10789920" cy="5029200"/>
+            <a:ext cx="10789920" cy="1785104"/>
           </a:xfrm>
           <a:prstGeom prst="rect">
             <a:avLst/>
@@ -6064,7 +7007,16 @@
               <a:defRPr sz="2000"/>
             </a:pPr>
             <a:r>
-              <a:t>Field testing is evaluating how the new perennial rye grows in Denmark and how it affects the environment compared with annual rye.</a:t>
+              <a:rPr dirty="0"/>
+              <a:t>You will receive </a:t>
+            </a:r>
+            <a:r>
+              <a:rPr lang="en-US" dirty="0"/>
+              <a:t>400 or 800</a:t>
+            </a:r>
+            <a:r>
+              <a:rPr dirty="0"/>
+              <a:t> g of rye flour from the new perennial variety.</a:t>
             </a:r>
           </a:p>
           <a:p>
@@ -6075,7 +7027,8 @@
               <a:defRPr sz="2000"/>
             </a:pPr>
             <a:r>
-              <a:t>GoodGrain builds on this knowledge by looking specifically at the new perennial rye's grain characteristics.</a:t>
+              <a:rPr dirty="0"/>
+              <a:t>You will purchase any additional ingredients needed for your baking.</a:t>
             </a:r>
           </a:p>
           <a:p>
@@ -6086,7 +7039,8 @@
               <a:defRPr sz="2000"/>
             </a:pPr>
             <a:r>
-              <a:t>One important characteristic is baking quality.</a:t>
+              <a:rPr dirty="0"/>
+              <a:t>You will take notes during baking and use them to complete a follow-up survey.</a:t>
             </a:r>
           </a:p>
           <a:p>
@@ -6097,7 +7051,8 @@
               <a:defRPr sz="2000"/>
             </a:pPr>
             <a:r>
-              <a:t>The project also wants to engage with communities in this research.</a:t>
+              <a:rPr dirty="0"/>
+              <a:t>After completing the survey, you will receive a small thank-you gift.</a:t>
             </a:r>
           </a:p>
         </p:txBody>
@@ -6146,7 +7101,13 @@
   <p:cSld>
     <p:spTree>
       <p:nvGrpSpPr>
-        <p:cNvPr id="1" name=""/>
+        <p:cNvPr id="1" name="">
+          <a:extLst>
+            <a:ext uri="{FF2B5EF4-FFF2-40B4-BE49-F238E27FC236}">
+              <a16:creationId xmlns:a16="http://schemas.microsoft.com/office/drawing/2014/main" id="{A4545A0E-532B-187A-82E8-E144501C82CE}"/>
+            </a:ext>
+          </a:extLst>
+        </p:cNvPr>
         <p:cNvGrpSpPr/>
         <p:nvPr/>
       </p:nvGrpSpPr>
@@ -6160,14 +7121,20 @@
       </p:grpSpPr>
       <p:sp>
         <p:nvSpPr>
-          <p:cNvPr id="2" name="TextBox 1"/>
+          <p:cNvPr id="2" name="TextBox 1">
+            <a:extLst>
+              <a:ext uri="{FF2B5EF4-FFF2-40B4-BE49-F238E27FC236}">
+                <a16:creationId xmlns:a16="http://schemas.microsoft.com/office/drawing/2014/main" id="{2A351185-1806-3660-B8F0-4FCD1D546330}"/>
+              </a:ext>
+            </a:extLst>
+          </p:cNvPr>
           <p:cNvSpPr txBox="1"/>
           <p:nvPr/>
         </p:nvSpPr>
         <p:spPr>
           <a:xfrm>
             <a:off x="594360" y="320040"/>
-            <a:ext cx="10972800" cy="731520"/>
+            <a:ext cx="2716513" cy="553998"/>
           </a:xfrm>
           <a:prstGeom prst="rect">
             <a:avLst/>
@@ -6184,21 +7151,29 @@
               <a:defRPr sz="3000" b="1"/>
             </a:pPr>
             <a:r>
-              <a:t>What does participating involve?</a:t>
-            </a:r>
-          </a:p>
-        </p:txBody>
-      </p:sp>
-      <p:sp>
-        <p:nvSpPr>
-          <p:cNvPr id="3" name="TextBox 2"/>
+              <a:rPr lang="en-US" dirty="0"/>
+              <a:t>Optional events</a:t>
+            </a:r>
+            <a:endParaRPr dirty="0"/>
+          </a:p>
+        </p:txBody>
+      </p:sp>
+      <p:sp>
+        <p:nvSpPr>
+          <p:cNvPr id="3" name="TextBox 2">
+            <a:extLst>
+              <a:ext uri="{FF2B5EF4-FFF2-40B4-BE49-F238E27FC236}">
+                <a16:creationId xmlns:a16="http://schemas.microsoft.com/office/drawing/2014/main" id="{3CCAA353-A4ED-5BF4-C061-B20B0CC9AB5F}"/>
+              </a:ext>
+            </a:extLst>
+          </p:cNvPr>
           <p:cNvSpPr txBox="1"/>
           <p:nvPr/>
         </p:nvSpPr>
         <p:spPr>
           <a:xfrm>
             <a:off x="731520" y="1234440"/>
-            <a:ext cx="10789920" cy="5029200"/>
+            <a:ext cx="10789920" cy="2169825"/>
           </a:xfrm>
           <a:prstGeom prst="rect">
             <a:avLst/>
@@ -6215,10 +7190,11 @@
               <a:spcAft>
                 <a:spcPts val="1200"/>
               </a:spcAft>
-              <a:defRPr sz="2000"/>
-            </a:pPr>
-            <a:r>
-              <a:t>You will receive approximately 1 kg of rye flour from the new perennial variety.</a:t>
+              <a:defRPr sz="2100"/>
+            </a:pPr>
+            <a:r>
+              <a:rPr lang="en-US" dirty="0"/>
+              <a:t>Summer 2027: Public event where you can see perennial rye growing in the field</a:t>
             </a:r>
           </a:p>
           <a:p>
@@ -6226,10 +7202,15 @@
               <a:spcAft>
                 <a:spcPts val="1200"/>
               </a:spcAft>
-              <a:defRPr sz="2000"/>
-            </a:pPr>
-            <a:r>
-              <a:t>You will purchase any additional ingredients needed for your baking.</a:t>
+              <a:defRPr sz="2100"/>
+            </a:pPr>
+            <a:r>
+              <a:rPr lang="en-US"/>
+              <a:t>Fall 2027: A </a:t>
+            </a:r>
+            <a:r>
+              <a:rPr lang="en-US" dirty="0"/>
+              <a:t>public symposium to share information about perennial rye</a:t>
             </a:r>
           </a:p>
           <a:p>
@@ -6237,10 +7218,11 @@
               <a:spcAft>
                 <a:spcPts val="1200"/>
               </a:spcAft>
-              <a:defRPr sz="2000"/>
-            </a:pPr>
-            <a:r>
-              <a:t>You will take notes during baking and use them to complete a follow-up survey.</a:t>
+              <a:defRPr sz="2100"/>
+            </a:pPr>
+            <a:r>
+              <a:rPr lang="en-US" dirty="0"/>
+              <a:t>Both are free and open to the public!</a:t>
             </a:r>
           </a:p>
           <a:p>
@@ -6248,17 +7230,32 @@
               <a:spcAft>
                 <a:spcPts val="1200"/>
               </a:spcAft>
-              <a:defRPr sz="2000"/>
-            </a:pPr>
-            <a:r>
-              <a:t>After completing the survey, you will receive a small thank-you gift.</a:t>
-            </a:r>
-          </a:p>
-        </p:txBody>
-      </p:sp>
-      <p:sp>
-        <p:nvSpPr>
-          <p:cNvPr id="4" name="TextBox 3"/>
+              <a:defRPr sz="2100"/>
+            </a:pPr>
+            <a:r>
+              <a:rPr dirty="0"/>
+              <a:t>Attendance at the GoodGrain field event and symposium is </a:t>
+            </a:r>
+            <a:r>
+              <a:rPr b="1" i="1" dirty="0"/>
+              <a:t>optional</a:t>
+            </a:r>
+            <a:r>
+              <a:rPr dirty="0"/>
+              <a:t> and is not required for participation in the Home Baking Evaluation.</a:t>
+            </a:r>
+          </a:p>
+        </p:txBody>
+      </p:sp>
+      <p:sp>
+        <p:nvSpPr>
+          <p:cNvPr id="4" name="TextBox 3">
+            <a:extLst>
+              <a:ext uri="{FF2B5EF4-FFF2-40B4-BE49-F238E27FC236}">
+                <a16:creationId xmlns:a16="http://schemas.microsoft.com/office/drawing/2014/main" id="{E6CE7918-B1E7-58A8-C3B5-AE044EC2C291}"/>
+              </a:ext>
+            </a:extLst>
+          </p:cNvPr>
           <p:cNvSpPr txBox="1"/>
           <p:nvPr/>
         </p:nvSpPr>
@@ -6288,6 +7285,11 @@
         </p:txBody>
       </p:sp>
     </p:spTree>
+    <p:extLst>
+      <p:ext uri="{BB962C8B-B14F-4D97-AF65-F5344CB8AC3E}">
+        <p14:creationId xmlns:p14="http://schemas.microsoft.com/office/powerpoint/2010/main" val="183905824"/>
+      </p:ext>
+    </p:extLst>
   </p:cSld>
   <p:clrMapOvr>
     <a:masterClrMapping/>
@@ -6338,7 +7340,7 @@
               <a:defRPr sz="3000" b="1"/>
             </a:pPr>
             <a:r>
-              <a:t>GoodGrain events in 2027</a:t>
+              <a:t>Funding and project partners</a:t>
             </a:r>
           </a:p>
         </p:txBody>
@@ -6352,7 +7354,7 @@
         <p:spPr>
           <a:xfrm>
             <a:off x="731520" y="1234440"/>
-            <a:ext cx="10789920" cy="5029200"/>
+            <a:ext cx="10789920" cy="2169825"/>
           </a:xfrm>
           <a:prstGeom prst="rect">
             <a:avLst/>
@@ -6372,7 +7374,50 @@
               <a:defRPr sz="1900"/>
             </a:pPr>
             <a:r>
-              <a:t>Summer 2027: an event where you can see the perennial rye growing in a field test plot in Jutland.</a:t>
+              <a:rPr dirty="0"/>
+              <a:t>This citizen science project is part of an NNF Plant2Food research project (Grant #NNF22SA0081019).</a:t>
+            </a:r>
+          </a:p>
+          <a:p>
+            <a:pPr marL="342900" indent="-342900">
+              <a:spcAft>
+                <a:spcPts val="1200"/>
+              </a:spcAft>
+              <a:buFont typeface="Arial" panose="020B0604020202020204" pitchFamily="34" charset="0"/>
+              <a:buChar char="•"/>
+              <a:defRPr sz="1900"/>
+            </a:pPr>
+            <a:r>
+              <a:rPr dirty="0"/>
+              <a:t>Aarhus University: Department of Agroecology and Department of Food Science</a:t>
+            </a:r>
+          </a:p>
+          <a:p>
+            <a:pPr marL="342900" indent="-342900">
+              <a:spcAft>
+                <a:spcPts val="1200"/>
+              </a:spcAft>
+              <a:buFont typeface="Arial" panose="020B0604020202020204" pitchFamily="34" charset="0"/>
+              <a:buChar char="•"/>
+              <a:defRPr sz="1900"/>
+            </a:pPr>
+            <a:r>
+              <a:rPr dirty="0"/>
+              <a:t>Wageningen University and Research, Netherlands</a:t>
+            </a:r>
+          </a:p>
+          <a:p>
+            <a:pPr marL="342900" indent="-342900">
+              <a:spcAft>
+                <a:spcPts val="1200"/>
+              </a:spcAft>
+              <a:buFont typeface="Arial" panose="020B0604020202020204" pitchFamily="34" charset="0"/>
+              <a:buChar char="•"/>
+              <a:defRPr sz="1900"/>
+            </a:pPr>
+            <a:r>
+              <a:rPr dirty="0"/>
+              <a:t>Meyers, a Danish food enterprise</a:t>
             </a:r>
           </a:p>
           <a:p>
@@ -6383,30 +7428,14 @@
               <a:defRPr sz="1900"/>
             </a:pPr>
             <a:r>
-              <a:t>Fall 2027: a public symposium in Copenhagen sharing current knowledge about perennial rye.</a:t>
-            </a:r>
-          </a:p>
-          <a:p>
-            <a:pPr>
-              <a:spcAft>
-                <a:spcPts val="1200"/>
-              </a:spcAft>
-              <a:defRPr sz="1900"/>
-            </a:pPr>
-            <a:r>
-              <a:t>The symposium will bring together people across the value chain: researchers, breeders, farmers, millers, bakers and bread eaters.</a:t>
-            </a:r>
-          </a:p>
-          <a:p>
-            <a:pPr>
-              <a:spcAft>
-                <a:spcPts val="1200"/>
-              </a:spcAft>
-              <a:defRPr sz="1900"/>
-            </a:pPr>
-            <a:r>
-              <a:t>Both events are free and open to the public, and attendance is optional.</a:t>
-            </a:r>
+              <a:rPr dirty="0"/>
+              <a:t>More information: projects.au.dk/plant2food/funded-projects/</a:t>
+            </a:r>
+            <a:r>
+              <a:rPr dirty="0" err="1"/>
+              <a:t>goodgrain</a:t>
+            </a:r>
+            <a:endParaRPr dirty="0"/>
           </a:p>
         </p:txBody>
       </p:sp>
@@ -6441,6 +7470,126 @@
           </a:p>
         </p:txBody>
       </p:sp>
+      <p:pic>
+        <p:nvPicPr>
+          <p:cNvPr id="6" name="Picture 5">
+            <a:extLst>
+              <a:ext uri="{FF2B5EF4-FFF2-40B4-BE49-F238E27FC236}">
+                <a16:creationId xmlns:a16="http://schemas.microsoft.com/office/drawing/2014/main" id="{F50E1FB6-3B1A-9CE0-8ADB-A7A625C20210}"/>
+              </a:ext>
+            </a:extLst>
+          </p:cNvPr>
+          <p:cNvPicPr>
+            <a:picLocks noChangeAspect="1"/>
+          </p:cNvPicPr>
+          <p:nvPr/>
+        </p:nvPicPr>
+        <p:blipFill>
+          <a:blip r:embed="rId2"/>
+          <a:stretch>
+            <a:fillRect/>
+          </a:stretch>
+        </p:blipFill>
+        <p:spPr>
+          <a:xfrm>
+            <a:off x="3259640" y="4231977"/>
+            <a:ext cx="3311781" cy="1380555"/>
+          </a:xfrm>
+          <a:prstGeom prst="rect">
+            <a:avLst/>
+          </a:prstGeom>
+        </p:spPr>
+      </p:pic>
+      <p:pic>
+        <p:nvPicPr>
+          <p:cNvPr id="8" name="Picture 7">
+            <a:extLst>
+              <a:ext uri="{FF2B5EF4-FFF2-40B4-BE49-F238E27FC236}">
+                <a16:creationId xmlns:a16="http://schemas.microsoft.com/office/drawing/2014/main" id="{D2B5BF54-6B09-E712-9F0F-EB29AE4F0AFC}"/>
+              </a:ext>
+            </a:extLst>
+          </p:cNvPr>
+          <p:cNvPicPr>
+            <a:picLocks noChangeAspect="1"/>
+          </p:cNvPicPr>
+          <p:nvPr/>
+        </p:nvPicPr>
+        <p:blipFill>
+          <a:blip r:embed="rId3"/>
+          <a:stretch>
+            <a:fillRect/>
+          </a:stretch>
+        </p:blipFill>
+        <p:spPr>
+          <a:xfrm>
+            <a:off x="8249265" y="4598047"/>
+            <a:ext cx="3660699" cy="819997"/>
+          </a:xfrm>
+          <a:prstGeom prst="rect">
+            <a:avLst/>
+          </a:prstGeom>
+        </p:spPr>
+      </p:pic>
+      <p:pic>
+        <p:nvPicPr>
+          <p:cNvPr id="10" name="Picture 9">
+            <a:extLst>
+              <a:ext uri="{FF2B5EF4-FFF2-40B4-BE49-F238E27FC236}">
+                <a16:creationId xmlns:a16="http://schemas.microsoft.com/office/drawing/2014/main" id="{458C58AB-41F2-9A15-E37C-889CC005006F}"/>
+              </a:ext>
+            </a:extLst>
+          </p:cNvPr>
+          <p:cNvPicPr>
+            <a:picLocks noChangeAspect="1"/>
+          </p:cNvPicPr>
+          <p:nvPr/>
+        </p:nvPicPr>
+        <p:blipFill>
+          <a:blip r:embed="rId4"/>
+          <a:stretch>
+            <a:fillRect/>
+          </a:stretch>
+        </p:blipFill>
+        <p:spPr>
+          <a:xfrm>
+            <a:off x="205929" y="3487771"/>
+            <a:ext cx="2868968" cy="2868968"/>
+          </a:xfrm>
+          <a:prstGeom prst="rect">
+            <a:avLst/>
+          </a:prstGeom>
+        </p:spPr>
+      </p:pic>
+      <p:pic>
+        <p:nvPicPr>
+          <p:cNvPr id="12" name="Picture 11">
+            <a:extLst>
+              <a:ext uri="{FF2B5EF4-FFF2-40B4-BE49-F238E27FC236}">
+                <a16:creationId xmlns:a16="http://schemas.microsoft.com/office/drawing/2014/main" id="{99FE654F-B31E-3319-FE9B-453B9E88B92A}"/>
+              </a:ext>
+            </a:extLst>
+          </p:cNvPr>
+          <p:cNvPicPr>
+            <a:picLocks noChangeAspect="1"/>
+          </p:cNvPicPr>
+          <p:nvPr/>
+        </p:nvPicPr>
+        <p:blipFill>
+          <a:blip r:embed="rId5"/>
+          <a:stretch>
+            <a:fillRect/>
+          </a:stretch>
+        </p:blipFill>
+        <p:spPr>
+          <a:xfrm>
+            <a:off x="6756165" y="4418981"/>
+            <a:ext cx="1204579" cy="1204579"/>
+          </a:xfrm>
+          <a:prstGeom prst="rect">
+            <a:avLst/>
+          </a:prstGeom>
+        </p:spPr>
+      </p:pic>
     </p:spTree>
   </p:cSld>
   <p:clrMapOvr>

--- a/documents/informational sheet power point.pptx
+++ b/documents/informational sheet power point.pptx
@@ -12,27 +12,29 @@
     <p:sldId id="259" r:id="rId6"/>
     <p:sldId id="260" r:id="rId7"/>
     <p:sldId id="261" r:id="rId8"/>
-    <p:sldId id="277" r:id="rId9"/>
-    <p:sldId id="263" r:id="rId10"/>
-    <p:sldId id="264" r:id="rId11"/>
-    <p:sldId id="265" r:id="rId12"/>
-    <p:sldId id="266" r:id="rId13"/>
-    <p:sldId id="267" r:id="rId14"/>
-    <p:sldId id="268" r:id="rId15"/>
-    <p:sldId id="275" r:id="rId16"/>
-    <p:sldId id="278" r:id="rId17"/>
-    <p:sldId id="279" r:id="rId18"/>
-    <p:sldId id="281" r:id="rId19"/>
-    <p:sldId id="280" r:id="rId20"/>
-    <p:sldId id="269" r:id="rId21"/>
-    <p:sldId id="270" r:id="rId22"/>
-    <p:sldId id="283" r:id="rId23"/>
-    <p:sldId id="282" r:id="rId24"/>
-    <p:sldId id="273" r:id="rId25"/>
-    <p:sldId id="271" r:id="rId26"/>
-    <p:sldId id="272" r:id="rId27"/>
-    <p:sldId id="274" r:id="rId28"/>
-    <p:sldId id="284" r:id="rId29"/>
+    <p:sldId id="285" r:id="rId9"/>
+    <p:sldId id="286" r:id="rId10"/>
+    <p:sldId id="277" r:id="rId11"/>
+    <p:sldId id="264" r:id="rId12"/>
+    <p:sldId id="265" r:id="rId13"/>
+    <p:sldId id="266" r:id="rId14"/>
+    <p:sldId id="267" r:id="rId15"/>
+    <p:sldId id="268" r:id="rId16"/>
+    <p:sldId id="275" r:id="rId17"/>
+    <p:sldId id="278" r:id="rId18"/>
+    <p:sldId id="279" r:id="rId19"/>
+    <p:sldId id="281" r:id="rId20"/>
+    <p:sldId id="280" r:id="rId21"/>
+    <p:sldId id="269" r:id="rId22"/>
+    <p:sldId id="270" r:id="rId23"/>
+    <p:sldId id="283" r:id="rId24"/>
+    <p:sldId id="282" r:id="rId25"/>
+    <p:sldId id="273" r:id="rId26"/>
+    <p:sldId id="271" r:id="rId27"/>
+    <p:sldId id="272" r:id="rId28"/>
+    <p:sldId id="274" r:id="rId29"/>
+    <p:sldId id="284" r:id="rId30"/>
+    <p:sldId id="263" r:id="rId31"/>
   </p:sldIdLst>
   <p:sldSz cx="12192000" cy="6858000"/>
   <p:notesSz cx="6858000" cy="9144000"/>
@@ -329,7 +331,7 @@
           <a:p>
             <a:fld id="{5BCAD085-E8A6-8845-BD4E-CB4CCA059FC4}" type="datetimeFigureOut">
               <a:rPr lang="en-US" smtClean="0"/>
-              <a:t>10/18/2026</a:t>
+              <a:t>10/22/2026</a:t>
             </a:fld>
             <a:endParaRPr lang="en-US"/>
           </a:p>
@@ -497,7 +499,7 @@
           <a:p>
             <a:fld id="{5BCAD085-E8A6-8845-BD4E-CB4CCA059FC4}" type="datetimeFigureOut">
               <a:rPr lang="en-US" smtClean="0"/>
-              <a:t>10/18/2026</a:t>
+              <a:t>10/22/2026</a:t>
             </a:fld>
             <a:endParaRPr lang="en-US"/>
           </a:p>
@@ -675,7 +677,7 @@
           <a:p>
             <a:fld id="{5BCAD085-E8A6-8845-BD4E-CB4CCA059FC4}" type="datetimeFigureOut">
               <a:rPr lang="en-US" smtClean="0"/>
-              <a:t>10/18/2026</a:t>
+              <a:t>10/22/2026</a:t>
             </a:fld>
             <a:endParaRPr lang="en-US"/>
           </a:p>
@@ -843,7 +845,7 @@
           <a:p>
             <a:fld id="{5BCAD085-E8A6-8845-BD4E-CB4CCA059FC4}" type="datetimeFigureOut">
               <a:rPr lang="en-US" smtClean="0"/>
-              <a:t>10/18/2026</a:t>
+              <a:t>10/22/2026</a:t>
             </a:fld>
             <a:endParaRPr lang="en-US"/>
           </a:p>
@@ -1088,7 +1090,7 @@
           <a:p>
             <a:fld id="{5BCAD085-E8A6-8845-BD4E-CB4CCA059FC4}" type="datetimeFigureOut">
               <a:rPr lang="en-US" smtClean="0"/>
-              <a:t>10/18/2026</a:t>
+              <a:t>10/22/2026</a:t>
             </a:fld>
             <a:endParaRPr lang="en-US"/>
           </a:p>
@@ -1373,7 +1375,7 @@
           <a:p>
             <a:fld id="{5BCAD085-E8A6-8845-BD4E-CB4CCA059FC4}" type="datetimeFigureOut">
               <a:rPr lang="en-US" smtClean="0"/>
-              <a:t>10/18/2026</a:t>
+              <a:t>10/22/2026</a:t>
             </a:fld>
             <a:endParaRPr lang="en-US"/>
           </a:p>
@@ -1792,7 +1794,7 @@
           <a:p>
             <a:fld id="{5BCAD085-E8A6-8845-BD4E-CB4CCA059FC4}" type="datetimeFigureOut">
               <a:rPr lang="en-US" smtClean="0"/>
-              <a:t>10/18/2026</a:t>
+              <a:t>10/22/2026</a:t>
             </a:fld>
             <a:endParaRPr lang="en-US"/>
           </a:p>
@@ -1909,7 +1911,7 @@
           <a:p>
             <a:fld id="{5BCAD085-E8A6-8845-BD4E-CB4CCA059FC4}" type="datetimeFigureOut">
               <a:rPr lang="en-US" smtClean="0"/>
-              <a:t>10/18/2026</a:t>
+              <a:t>10/22/2026</a:t>
             </a:fld>
             <a:endParaRPr lang="en-US"/>
           </a:p>
@@ -2004,7 +2006,7 @@
           <a:p>
             <a:fld id="{5BCAD085-E8A6-8845-BD4E-CB4CCA059FC4}" type="datetimeFigureOut">
               <a:rPr lang="en-US" smtClean="0"/>
-              <a:t>10/18/2026</a:t>
+              <a:t>10/22/2026</a:t>
             </a:fld>
             <a:endParaRPr lang="en-US"/>
           </a:p>
@@ -2279,7 +2281,7 @@
           <a:p>
             <a:fld id="{5BCAD085-E8A6-8845-BD4E-CB4CCA059FC4}" type="datetimeFigureOut">
               <a:rPr lang="en-US" smtClean="0"/>
-              <a:t>10/18/2026</a:t>
+              <a:t>10/22/2026</a:t>
             </a:fld>
             <a:endParaRPr lang="en-US"/>
           </a:p>
@@ -2531,7 +2533,7 @@
           <a:p>
             <a:fld id="{5BCAD085-E8A6-8845-BD4E-CB4CCA059FC4}" type="datetimeFigureOut">
               <a:rPr lang="en-US" smtClean="0"/>
-              <a:t>10/18/2026</a:t>
+              <a:t>10/22/2026</a:t>
             </a:fld>
             <a:endParaRPr lang="en-US"/>
           </a:p>
@@ -2742,7 +2744,7 @@
           <a:p>
             <a:fld id="{5BCAD085-E8A6-8845-BD4E-CB4CCA059FC4}" type="datetimeFigureOut">
               <a:rPr lang="en-US" smtClean="0"/>
-              <a:t>10/18/2026</a:t>
+              <a:t>10/22/2026</a:t>
             </a:fld>
             <a:endParaRPr lang="en-US"/>
           </a:p>
@@ -3238,7 +3240,13 @@
   <p:cSld>
     <p:spTree>
       <p:nvGrpSpPr>
-        <p:cNvPr id="1" name=""/>
+        <p:cNvPr id="1" name="">
+          <a:extLst>
+            <a:ext uri="{FF2B5EF4-FFF2-40B4-BE49-F238E27FC236}">
+              <a16:creationId xmlns:a16="http://schemas.microsoft.com/office/drawing/2014/main" id="{A4545A0E-532B-187A-82E8-E144501C82CE}"/>
+            </a:ext>
+          </a:extLst>
+        </p:cNvPr>
         <p:cNvGrpSpPr/>
         <p:nvPr/>
       </p:nvGrpSpPr>
@@ -3252,14 +3260,20 @@
       </p:grpSpPr>
       <p:sp>
         <p:nvSpPr>
-          <p:cNvPr id="2" name="TextBox 1"/>
+          <p:cNvPr id="2" name="TextBox 1">
+            <a:extLst>
+              <a:ext uri="{FF2B5EF4-FFF2-40B4-BE49-F238E27FC236}">
+                <a16:creationId xmlns:a16="http://schemas.microsoft.com/office/drawing/2014/main" id="{2A351185-1806-3660-B8F0-4FCD1D546330}"/>
+              </a:ext>
+            </a:extLst>
+          </p:cNvPr>
           <p:cNvSpPr txBox="1"/>
           <p:nvPr/>
         </p:nvSpPr>
         <p:spPr>
           <a:xfrm>
             <a:off x="594360" y="320040"/>
-            <a:ext cx="10972800" cy="731520"/>
+            <a:ext cx="2716513" cy="553998"/>
           </a:xfrm>
           <a:prstGeom prst="rect">
             <a:avLst/>
@@ -3276,21 +3290,29 @@
               <a:defRPr sz="3000" b="1"/>
             </a:pPr>
             <a:r>
-              <a:t>Is it safe to eat?</a:t>
-            </a:r>
-          </a:p>
-        </p:txBody>
-      </p:sp>
-      <p:sp>
-        <p:nvSpPr>
-          <p:cNvPr id="3" name="TextBox 2"/>
+              <a:rPr lang="en-US" dirty="0"/>
+              <a:t>Optional events</a:t>
+            </a:r>
+            <a:endParaRPr dirty="0"/>
+          </a:p>
+        </p:txBody>
+      </p:sp>
+      <p:sp>
+        <p:nvSpPr>
+          <p:cNvPr id="3" name="TextBox 2">
+            <a:extLst>
+              <a:ext uri="{FF2B5EF4-FFF2-40B4-BE49-F238E27FC236}">
+                <a16:creationId xmlns:a16="http://schemas.microsoft.com/office/drawing/2014/main" id="{3CCAA353-A4ED-5BF4-C061-B20B0CC9AB5F}"/>
+              </a:ext>
+            </a:extLst>
+          </p:cNvPr>
           <p:cNvSpPr txBox="1"/>
           <p:nvPr/>
         </p:nvSpPr>
         <p:spPr>
           <a:xfrm>
             <a:off x="731520" y="1234440"/>
-            <a:ext cx="10789920" cy="2015936"/>
+            <a:ext cx="10789920" cy="4078039"/>
           </a:xfrm>
           <a:prstGeom prst="rect">
             <a:avLst/>
@@ -3310,8 +3332,8 @@
               <a:defRPr sz="2100"/>
             </a:pPr>
             <a:r>
-              <a:rPr dirty="0"/>
-              <a:t>Yes.</a:t>
+              <a:rPr lang="en-US" b="1" dirty="0"/>
+              <a:t>Summer 2027</a:t>
             </a:r>
           </a:p>
           <a:p>
@@ -3322,8 +3344,8 @@
               <a:defRPr sz="2100"/>
             </a:pPr>
             <a:r>
-              <a:rPr dirty="0"/>
-              <a:t>The grain used to make the flour you will receive was tested at an independent laboratory to ensure it is safe for human consumption.</a:t>
+              <a:rPr lang="en-US" dirty="0"/>
+              <a:t>Public event where you can see perennial rye growing in the field</a:t>
             </a:r>
           </a:p>
           <a:p>
@@ -3333,21 +3355,84 @@
               </a:spcAft>
               <a:defRPr sz="2100"/>
             </a:pPr>
-            <a:r>
-              <a:rPr dirty="0"/>
-              <a:t>The laboratory results are available in the GoodGrain Lab Results PDF</a:t>
-            </a:r>
+            <a:endParaRPr lang="en-US" dirty="0"/>
+          </a:p>
+          <a:p>
+            <a:pPr>
+              <a:spcAft>
+                <a:spcPts val="1200"/>
+              </a:spcAft>
+              <a:defRPr sz="2100"/>
+            </a:pPr>
+            <a:r>
+              <a:rPr lang="en-US" b="1" dirty="0"/>
+              <a:t>Fall 2027</a:t>
+            </a:r>
+          </a:p>
+          <a:p>
+            <a:pPr>
+              <a:spcAft>
+                <a:spcPts val="1200"/>
+              </a:spcAft>
+              <a:defRPr sz="2100"/>
+            </a:pPr>
             <a:r>
               <a:rPr lang="en-US" dirty="0"/>
-              <a:t>, which you can access through the intake survey and/or the Informational Sheet website. </a:t>
-            </a:r>
-            <a:endParaRPr dirty="0"/>
-          </a:p>
-        </p:txBody>
-      </p:sp>
-      <p:sp>
-        <p:nvSpPr>
-          <p:cNvPr id="4" name="TextBox 3"/>
+              <a:t>A public symposium to share information about perennial rye</a:t>
+            </a:r>
+          </a:p>
+          <a:p>
+            <a:pPr>
+              <a:spcAft>
+                <a:spcPts val="1200"/>
+              </a:spcAft>
+              <a:defRPr sz="2100"/>
+            </a:pPr>
+            <a:endParaRPr lang="en-US" dirty="0"/>
+          </a:p>
+          <a:p>
+            <a:pPr>
+              <a:spcAft>
+                <a:spcPts val="1200"/>
+              </a:spcAft>
+              <a:defRPr sz="2100"/>
+            </a:pPr>
+            <a:r>
+              <a:rPr lang="en-US" b="1" dirty="0"/>
+              <a:t>Both are free and open to the public!</a:t>
+            </a:r>
+          </a:p>
+          <a:p>
+            <a:pPr>
+              <a:spcAft>
+                <a:spcPts val="1200"/>
+              </a:spcAft>
+              <a:defRPr sz="2100"/>
+            </a:pPr>
+            <a:r>
+              <a:rPr dirty="0"/>
+              <a:t>Attendance at the GoodGrain field event and symposium is </a:t>
+            </a:r>
+            <a:r>
+              <a:rPr b="1" i="1" dirty="0"/>
+              <a:t>optional</a:t>
+            </a:r>
+            <a:r>
+              <a:rPr dirty="0"/>
+              <a:t> and is not required for participation in the Home Baking Evaluation.</a:t>
+            </a:r>
+          </a:p>
+        </p:txBody>
+      </p:sp>
+      <p:sp>
+        <p:nvSpPr>
+          <p:cNvPr id="4" name="TextBox 3">
+            <a:extLst>
+              <a:ext uri="{FF2B5EF4-FFF2-40B4-BE49-F238E27FC236}">
+                <a16:creationId xmlns:a16="http://schemas.microsoft.com/office/drawing/2014/main" id="{E6CE7918-B1E7-58A8-C3B5-AE044EC2C291}"/>
+              </a:ext>
+            </a:extLst>
+          </p:cNvPr>
           <p:cNvSpPr txBox="1"/>
           <p:nvPr/>
         </p:nvSpPr>
@@ -3377,6 +3462,11 @@
         </p:txBody>
       </p:sp>
     </p:spTree>
+    <p:extLst>
+      <p:ext uri="{BB962C8B-B14F-4D97-AF65-F5344CB8AC3E}">
+        <p14:creationId xmlns:p14="http://schemas.microsoft.com/office/powerpoint/2010/main" val="183905824"/>
+      </p:ext>
+    </p:extLst>
   </p:cSld>
   <p:clrMapOvr>
     <a:masterClrMapping/>
@@ -3427,7 +3517,7 @@
               <a:defRPr sz="3000" b="1"/>
             </a:pPr>
             <a:r>
-              <a:t>Is the perennial rye genetically modified?</a:t>
+              <a:t>Is it safe to eat?</a:t>
             </a:r>
           </a:p>
         </p:txBody>
@@ -3441,7 +3531,7 @@
         <p:spPr>
           <a:xfrm>
             <a:off x="731520" y="1234440"/>
-            <a:ext cx="10789920" cy="1785104"/>
+            <a:ext cx="10789920" cy="2015936"/>
           </a:xfrm>
           <a:prstGeom prst="rect">
             <a:avLst/>
@@ -3458,11 +3548,11 @@
               <a:spcAft>
                 <a:spcPts val="1200"/>
               </a:spcAft>
-              <a:defRPr sz="2000"/>
-            </a:pPr>
-            <a:r>
-              <a:rPr dirty="0"/>
-              <a:t>No.</a:t>
+              <a:defRPr sz="2100"/>
+            </a:pPr>
+            <a:r>
+              <a:rPr dirty="0"/>
+              <a:t>Yes.</a:t>
             </a:r>
           </a:p>
           <a:p>
@@ -3470,11 +3560,11 @@
               <a:spcAft>
                 <a:spcPts val="1200"/>
               </a:spcAft>
-              <a:defRPr sz="2000"/>
-            </a:pPr>
-            <a:r>
-              <a:rPr dirty="0"/>
-              <a:t>This variety was developed using traditional breeding methods.</a:t>
+              <a:defRPr sz="2100"/>
+            </a:pPr>
+            <a:r>
+              <a:rPr dirty="0"/>
+              <a:t>The grain used to make the flour you will receive was tested at an independent laboratory to ensure it is safe for human consumption.</a:t>
             </a:r>
           </a:p>
           <a:p>
@@ -3482,31 +3572,35 @@
               <a:spcAft>
                 <a:spcPts val="1200"/>
               </a:spcAft>
-              <a:defRPr sz="2000"/>
-            </a:pPr>
-            <a:r>
-              <a:rPr dirty="0"/>
-              <a:t>Plants were crossed by hand, followed by selection based on their physical characteristics.</a:t>
-            </a:r>
-          </a:p>
-          <a:p>
-            <a:pPr>
-              <a:spcAft>
-                <a:spcPts val="1200"/>
-              </a:spcAft>
-              <a:defRPr sz="2000"/>
-            </a:pPr>
+              <a:defRPr sz="2100"/>
+            </a:pPr>
+            <a:r>
+              <a:rPr dirty="0"/>
+              <a:t>The laboratory results are available </a:t>
+            </a:r>
             <a:r>
               <a:rPr lang="en-US" dirty="0"/>
-              <a:t>You can see a scientific publication </a:t>
-            </a:r>
-            <a:r>
-              <a:rPr dirty="0"/>
-              <a:t>from 1986 for more information</a:t>
+              <a:t>(</a:t>
+            </a:r>
+            <a:r>
+              <a:rPr dirty="0"/>
+              <a:t>in </a:t>
             </a:r>
             <a:r>
               <a:rPr lang="en-US" dirty="0"/>
-              <a:t>:</a:t>
+              <a:t>Danish) </a:t>
+            </a:r>
+            <a:r>
+              <a:rPr dirty="0"/>
+              <a:t>the </a:t>
+            </a:r>
+            <a:r>
+              <a:rPr b="1" dirty="0"/>
+              <a:t>GoodGrain Lab Results PDF</a:t>
+            </a:r>
+            <a:r>
+              <a:rPr lang="en-US" dirty="0"/>
+              <a:t>, which you can access through the intake survey and/or the Informational Sheet website. </a:t>
             </a:r>
             <a:endParaRPr dirty="0"/>
           </a:p>
@@ -3543,36 +3637,6 @@
           </a:p>
         </p:txBody>
       </p:sp>
-      <p:pic>
-        <p:nvPicPr>
-          <p:cNvPr id="6" name="Picture 5">
-            <a:extLst>
-              <a:ext uri="{FF2B5EF4-FFF2-40B4-BE49-F238E27FC236}">
-                <a16:creationId xmlns:a16="http://schemas.microsoft.com/office/drawing/2014/main" id="{995DAE88-9238-64B0-F3AA-4D7C1A5A106A}"/>
-              </a:ext>
-            </a:extLst>
-          </p:cNvPr>
-          <p:cNvPicPr>
-            <a:picLocks noChangeAspect="1"/>
-          </p:cNvPicPr>
-          <p:nvPr/>
-        </p:nvPicPr>
-        <p:blipFill>
-          <a:blip r:embed="rId2"/>
-          <a:stretch>
-            <a:fillRect/>
-          </a:stretch>
-        </p:blipFill>
-        <p:spPr>
-          <a:xfrm>
-            <a:off x="1586912" y="3019544"/>
-            <a:ext cx="8759356" cy="3031228"/>
-          </a:xfrm>
-          <a:prstGeom prst="rect">
-            <a:avLst/>
-          </a:prstGeom>
-        </p:spPr>
-      </p:pic>
     </p:spTree>
   </p:cSld>
   <p:clrMapOvr>
@@ -3624,7 +3688,7 @@
               <a:defRPr sz="3000" b="1"/>
             </a:pPr>
             <a:r>
-              <a:t>Is this grain organic?</a:t>
+              <a:t>Is the perennial rye genetically modified?</a:t>
             </a:r>
           </a:p>
         </p:txBody>
@@ -3638,7 +3702,7 @@
         <p:spPr>
           <a:xfrm>
             <a:off x="731520" y="1234440"/>
-            <a:ext cx="10789920" cy="5029200"/>
+            <a:ext cx="10789920" cy="1785104"/>
           </a:xfrm>
           <a:prstGeom prst="rect">
             <a:avLst/>
@@ -3655,9 +3719,10 @@
               <a:spcAft>
                 <a:spcPts val="1200"/>
               </a:spcAft>
-              <a:defRPr sz="2100"/>
-            </a:pPr>
-            <a:r>
+              <a:defRPr sz="2000"/>
+            </a:pPr>
+            <a:r>
+              <a:rPr dirty="0"/>
               <a:t>No.</a:t>
             </a:r>
           </a:p>
@@ -3666,10 +3731,19 @@
               <a:spcAft>
                 <a:spcPts val="1200"/>
               </a:spcAft>
-              <a:defRPr sz="2100"/>
-            </a:pPr>
-            <a:r>
-              <a:t>Aarhus University does not have organically certified land because of the costs and additional administrative complexity.</a:t>
+              <a:defRPr sz="2000"/>
+            </a:pPr>
+            <a:r>
+              <a:rPr dirty="0"/>
+              <a:t>This variety was developed using </a:t>
+            </a:r>
+            <a:r>
+              <a:rPr b="1" dirty="0"/>
+              <a:t>traditional breeding methods</a:t>
+            </a:r>
+            <a:r>
+              <a:rPr dirty="0"/>
+              <a:t>.</a:t>
             </a:r>
           </a:p>
           <a:p>
@@ -3677,11 +3751,33 @@
               <a:spcAft>
                 <a:spcPts val="1200"/>
               </a:spcAft>
-              <a:defRPr sz="2100"/>
-            </a:pPr>
-            <a:r>
-              <a:t>However, this grain was grown without the use of pesticides.</a:t>
-            </a:r>
+              <a:defRPr sz="2000"/>
+            </a:pPr>
+            <a:r>
+              <a:rPr dirty="0"/>
+              <a:t>Plants were crossed by hand, followed by selection based on their physical characteristics.</a:t>
+            </a:r>
+          </a:p>
+          <a:p>
+            <a:pPr>
+              <a:spcAft>
+                <a:spcPts val="1200"/>
+              </a:spcAft>
+              <a:defRPr sz="2000"/>
+            </a:pPr>
+            <a:r>
+              <a:rPr lang="en-US" dirty="0"/>
+              <a:t>You can see a scientific publication </a:t>
+            </a:r>
+            <a:r>
+              <a:rPr dirty="0"/>
+              <a:t>from 1986 for more information</a:t>
+            </a:r>
+            <a:r>
+              <a:rPr lang="en-US" dirty="0"/>
+              <a:t>:</a:t>
+            </a:r>
+            <a:endParaRPr dirty="0"/>
           </a:p>
         </p:txBody>
       </p:sp>
@@ -3716,6 +3812,36 @@
           </a:p>
         </p:txBody>
       </p:sp>
+      <p:pic>
+        <p:nvPicPr>
+          <p:cNvPr id="6" name="Picture 5">
+            <a:extLst>
+              <a:ext uri="{FF2B5EF4-FFF2-40B4-BE49-F238E27FC236}">
+                <a16:creationId xmlns:a16="http://schemas.microsoft.com/office/drawing/2014/main" id="{995DAE88-9238-64B0-F3AA-4D7C1A5A106A}"/>
+              </a:ext>
+            </a:extLst>
+          </p:cNvPr>
+          <p:cNvPicPr>
+            <a:picLocks noChangeAspect="1"/>
+          </p:cNvPicPr>
+          <p:nvPr/>
+        </p:nvPicPr>
+        <p:blipFill>
+          <a:blip r:embed="rId2"/>
+          <a:stretch>
+            <a:fillRect/>
+          </a:stretch>
+        </p:blipFill>
+        <p:spPr>
+          <a:xfrm>
+            <a:off x="1586912" y="3019544"/>
+            <a:ext cx="8759356" cy="3031228"/>
+          </a:xfrm>
+          <a:prstGeom prst="rect">
+            <a:avLst/>
+          </a:prstGeom>
+        </p:spPr>
+      </p:pic>
     </p:spTree>
   </p:cSld>
   <p:clrMapOvr>
@@ -3767,7 +3893,7 @@
               <a:defRPr sz="3000" b="1"/>
             </a:pPr>
             <a:r>
-              <a:t>Can I buy this flour?</a:t>
+              <a:t>Is this grain organic?</a:t>
             </a:r>
           </a:p>
         </p:txBody>
@@ -3781,7 +3907,7 @@
         <p:spPr>
           <a:xfrm>
             <a:off x="731520" y="1234440"/>
-            <a:ext cx="10789920" cy="5029200"/>
+            <a:ext cx="10789920" cy="1692771"/>
           </a:xfrm>
           <a:prstGeom prst="rect">
             <a:avLst/>
@@ -3801,7 +3927,8 @@
               <a:defRPr sz="2100"/>
             </a:pPr>
             <a:r>
-              <a:t>Flour from this perennial rye variety is not currently available commercially.</a:t>
+              <a:rPr dirty="0"/>
+              <a:t>No.</a:t>
             </a:r>
           </a:p>
           <a:p>
@@ -3812,7 +3939,8 @@
               <a:defRPr sz="2100"/>
             </a:pPr>
             <a:r>
-              <a:t>The project is laying the groundwork for a potential commercial release.</a:t>
+              <a:rPr dirty="0"/>
+              <a:t>Aarhus University does not have organically certified land because of the costs and additional administrative complexity.</a:t>
             </a:r>
           </a:p>
           <a:p>
@@ -3823,7 +3951,16 @@
               <a:defRPr sz="2100"/>
             </a:pPr>
             <a:r>
-              <a:t>Your help with the home baking evaluation is appreciated!</a:t>
+              <a:rPr dirty="0"/>
+              <a:t>However, this grain was grown </a:t>
+            </a:r>
+            <a:r>
+              <a:rPr b="1" dirty="0"/>
+              <a:t>without the use of pesticides</a:t>
+            </a:r>
+            <a:r>
+              <a:rPr dirty="0"/>
+              <a:t>.</a:t>
             </a:r>
           </a:p>
         </p:txBody>
@@ -3893,7 +4030,7 @@
         <p:spPr>
           <a:xfrm>
             <a:off x="594360" y="320040"/>
-            <a:ext cx="2677464" cy="553998"/>
+            <a:ext cx="10972800" cy="731520"/>
           </a:xfrm>
           <a:prstGeom prst="rect">
             <a:avLst/>
@@ -3910,15 +4047,93 @@
               <a:defRPr sz="3000" b="1"/>
             </a:pPr>
             <a:r>
-              <a:rPr dirty="0"/>
-              <a:t>For the curious:</a:t>
-            </a:r>
-          </a:p>
-        </p:txBody>
-      </p:sp>
-      <p:sp>
-        <p:nvSpPr>
-          <p:cNvPr id="5" name="TextBox 4"/>
+              <a:t>Can I buy this flour?</a:t>
+            </a:r>
+          </a:p>
+        </p:txBody>
+      </p:sp>
+      <p:sp>
+        <p:nvSpPr>
+          <p:cNvPr id="3" name="TextBox 2"/>
+          <p:cNvSpPr txBox="1"/>
+          <p:nvPr/>
+        </p:nvSpPr>
+        <p:spPr>
+          <a:xfrm>
+            <a:off x="731520" y="1234440"/>
+            <a:ext cx="10789920" cy="1846659"/>
+          </a:xfrm>
+          <a:prstGeom prst="rect">
+            <a:avLst/>
+          </a:prstGeom>
+          <a:noFill/>
+        </p:spPr>
+        <p:txBody>
+          <a:bodyPr wrap="square">
+            <a:spAutoFit/>
+          </a:bodyPr>
+          <a:lstStyle/>
+          <a:p>
+            <a:pPr>
+              <a:spcAft>
+                <a:spcPts val="1200"/>
+              </a:spcAft>
+              <a:defRPr sz="2100"/>
+            </a:pPr>
+            <a:r>
+              <a:rPr lang="en-US" dirty="0"/>
+              <a:t>No. </a:t>
+            </a:r>
+          </a:p>
+          <a:p>
+            <a:pPr>
+              <a:spcAft>
+                <a:spcPts val="1200"/>
+              </a:spcAft>
+              <a:defRPr sz="2100"/>
+            </a:pPr>
+            <a:r>
+              <a:rPr dirty="0"/>
+              <a:t>Flour from this perennial rye variety is </a:t>
+            </a:r>
+            <a:r>
+              <a:rPr b="1" dirty="0"/>
+              <a:t>not currently available commercially</a:t>
+            </a:r>
+            <a:r>
+              <a:rPr dirty="0"/>
+              <a:t>.</a:t>
+            </a:r>
+          </a:p>
+          <a:p>
+            <a:pPr>
+              <a:spcAft>
+                <a:spcPts val="1200"/>
+              </a:spcAft>
+              <a:defRPr sz="2100"/>
+            </a:pPr>
+            <a:r>
+              <a:rPr dirty="0"/>
+              <a:t>The project is laying the groundwork for a potential commercial release.</a:t>
+            </a:r>
+          </a:p>
+          <a:p>
+            <a:pPr>
+              <a:spcAft>
+                <a:spcPts val="1200"/>
+              </a:spcAft>
+              <a:defRPr sz="2100"/>
+            </a:pPr>
+            <a:r>
+              <a:rPr dirty="0"/>
+              <a:t>Your help with the home baking evaluation is appreciated!</a:t>
+            </a:r>
+          </a:p>
+        </p:txBody>
+      </p:sp>
+      <p:sp>
+        <p:nvSpPr>
+          <p:cNvPr id="4" name="TextBox 3"/>
           <p:cNvSpPr txBox="1"/>
           <p:nvPr/>
         </p:nvSpPr>
@@ -3956,6 +4171,94 @@
 </file>
 
 <file path=ppt/slides/slide15.xml><?xml version="1.0" encoding="utf-8"?>
+<p:sld xmlns:a="http://schemas.openxmlformats.org/drawingml/2006/main" xmlns:r="http://schemas.openxmlformats.org/officeDocument/2006/relationships" xmlns:p="http://schemas.openxmlformats.org/presentationml/2006/main">
+  <p:cSld>
+    <p:spTree>
+      <p:nvGrpSpPr>
+        <p:cNvPr id="1" name=""/>
+        <p:cNvGrpSpPr/>
+        <p:nvPr/>
+      </p:nvGrpSpPr>
+      <p:grpSpPr>
+        <a:xfrm>
+          <a:off x="0" y="0"/>
+          <a:ext cx="0" cy="0"/>
+          <a:chOff x="0" y="0"/>
+          <a:chExt cx="0" cy="0"/>
+        </a:xfrm>
+      </p:grpSpPr>
+      <p:sp>
+        <p:nvSpPr>
+          <p:cNvPr id="2" name="TextBox 1"/>
+          <p:cNvSpPr txBox="1"/>
+          <p:nvPr/>
+        </p:nvSpPr>
+        <p:spPr>
+          <a:xfrm>
+            <a:off x="594360" y="320040"/>
+            <a:ext cx="2677464" cy="553998"/>
+          </a:xfrm>
+          <a:prstGeom prst="rect">
+            <a:avLst/>
+          </a:prstGeom>
+          <a:noFill/>
+        </p:spPr>
+        <p:txBody>
+          <a:bodyPr wrap="none">
+            <a:spAutoFit/>
+          </a:bodyPr>
+          <a:lstStyle/>
+          <a:p>
+            <a:pPr>
+              <a:defRPr sz="3000" b="1"/>
+            </a:pPr>
+            <a:r>
+              <a:rPr dirty="0"/>
+              <a:t>For the curious:</a:t>
+            </a:r>
+          </a:p>
+        </p:txBody>
+      </p:sp>
+      <p:sp>
+        <p:nvSpPr>
+          <p:cNvPr id="5" name="TextBox 4"/>
+          <p:cNvSpPr txBox="1"/>
+          <p:nvPr/>
+        </p:nvSpPr>
+        <p:spPr>
+          <a:xfrm>
+            <a:off x="594360" y="6473952"/>
+            <a:ext cx="10972800" cy="228600"/>
+          </a:xfrm>
+          <a:prstGeom prst="rect">
+            <a:avLst/>
+          </a:prstGeom>
+          <a:noFill/>
+        </p:spPr>
+        <p:txBody>
+          <a:bodyPr wrap="none">
+            <a:spAutoFit/>
+          </a:bodyPr>
+          <a:lstStyle/>
+          <a:p>
+            <a:pPr>
+              <a:defRPr sz="900"/>
+            </a:pPr>
+            <a:r>
+              <a:t>GoodGrain Home Baking Evaluation</a:t>
+            </a:r>
+          </a:p>
+        </p:txBody>
+      </p:sp>
+    </p:spTree>
+  </p:cSld>
+  <p:clrMapOvr>
+    <a:masterClrMapping/>
+  </p:clrMapOvr>
+</p:sld>
+</file>
+
+<file path=ppt/slides/slide16.xml><?xml version="1.0" encoding="utf-8"?>
 <p:sld xmlns:a="http://schemas.openxmlformats.org/drawingml/2006/main" xmlns:r="http://schemas.openxmlformats.org/officeDocument/2006/relationships" xmlns:p="http://schemas.openxmlformats.org/presentationml/2006/main">
   <p:cSld>
     <p:spTree>
@@ -4064,7 +4367,7 @@
 </p:sld>
 </file>
 
-<file path=ppt/slides/slide16.xml><?xml version="1.0" encoding="utf-8"?>
+<file path=ppt/slides/slide17.xml><?xml version="1.0" encoding="utf-8"?>
 <p:sld xmlns:a="http://schemas.openxmlformats.org/drawingml/2006/main" xmlns:r="http://schemas.openxmlformats.org/officeDocument/2006/relationships" xmlns:p="http://schemas.openxmlformats.org/presentationml/2006/main">
   <p:cSld>
     <p:spTree>
@@ -4179,7 +4482,7 @@
 </p:sld>
 </file>
 
-<file path=ppt/slides/slide17.xml><?xml version="1.0" encoding="utf-8"?>
+<file path=ppt/slides/slide18.xml><?xml version="1.0" encoding="utf-8"?>
 <p:sld xmlns:a="http://schemas.openxmlformats.org/drawingml/2006/main" xmlns:r="http://schemas.openxmlformats.org/officeDocument/2006/relationships" xmlns:p="http://schemas.openxmlformats.org/presentationml/2006/main">
   <p:cSld>
     <p:spTree>
@@ -4294,7 +4597,7 @@
 </p:sld>
 </file>
 
-<file path=ppt/slides/slide18.xml><?xml version="1.0" encoding="utf-8"?>
+<file path=ppt/slides/slide19.xml><?xml version="1.0" encoding="utf-8"?>
 <p:sld xmlns:a="http://schemas.openxmlformats.org/drawingml/2006/main" xmlns:r="http://schemas.openxmlformats.org/officeDocument/2006/relationships" xmlns:p="http://schemas.openxmlformats.org/presentationml/2006/main">
   <p:cSld>
     <p:spTree>
@@ -4409,7 +4712,247 @@
 </p:sld>
 </file>
 
-<file path=ppt/slides/slide19.xml><?xml version="1.0" encoding="utf-8"?>
+<file path=ppt/slides/slide2.xml><?xml version="1.0" encoding="utf-8"?>
+<p:sld xmlns:a="http://schemas.openxmlformats.org/drawingml/2006/main" xmlns:r="http://schemas.openxmlformats.org/officeDocument/2006/relationships" xmlns:p="http://schemas.openxmlformats.org/presentationml/2006/main">
+  <p:cSld>
+    <p:spTree>
+      <p:nvGrpSpPr>
+        <p:cNvPr id="1" name=""/>
+        <p:cNvGrpSpPr/>
+        <p:nvPr/>
+      </p:nvGrpSpPr>
+      <p:grpSpPr>
+        <a:xfrm>
+          <a:off x="0" y="0"/>
+          <a:ext cx="0" cy="0"/>
+          <a:chOff x="0" y="0"/>
+          <a:chExt cx="0" cy="0"/>
+        </a:xfrm>
+      </p:grpSpPr>
+      <p:sp>
+        <p:nvSpPr>
+          <p:cNvPr id="3" name="TextBox 2"/>
+          <p:cNvSpPr txBox="1"/>
+          <p:nvPr/>
+        </p:nvSpPr>
+        <p:spPr>
+          <a:xfrm>
+            <a:off x="731520" y="1234440"/>
+            <a:ext cx="10477254" cy="2800767"/>
+          </a:xfrm>
+          <a:prstGeom prst="rect">
+            <a:avLst/>
+          </a:prstGeom>
+          <a:noFill/>
+        </p:spPr>
+        <p:txBody>
+          <a:bodyPr wrap="square">
+            <a:spAutoFit/>
+          </a:bodyPr>
+          <a:lstStyle/>
+          <a:p>
+            <a:pPr marL="342900" indent="-342900">
+              <a:spcAft>
+                <a:spcPts val="1200"/>
+              </a:spcAft>
+              <a:buFont typeface="Arial" panose="020B0604020202020204" pitchFamily="34" charset="0"/>
+              <a:buChar char="•"/>
+              <a:defRPr sz="2100"/>
+            </a:pPr>
+            <a:r>
+              <a:rPr lang="en-US" dirty="0"/>
+              <a:t>An overview of the GoodGrain project</a:t>
+            </a:r>
+          </a:p>
+          <a:p>
+            <a:pPr marL="342900" indent="-342900">
+              <a:spcAft>
+                <a:spcPts val="1200"/>
+              </a:spcAft>
+              <a:buFont typeface="Arial" panose="020B0604020202020204" pitchFamily="34" charset="0"/>
+              <a:buChar char="•"/>
+              <a:defRPr sz="2100"/>
+            </a:pPr>
+            <a:r>
+              <a:rPr lang="en-US" dirty="0"/>
+              <a:t>What is expected of you as a citizen scientist in the Home Baking Evaluation</a:t>
+            </a:r>
+          </a:p>
+          <a:p>
+            <a:pPr marL="342900" indent="-342900">
+              <a:spcAft>
+                <a:spcPts val="1200"/>
+              </a:spcAft>
+              <a:buFont typeface="Arial" panose="020B0604020202020204" pitchFamily="34" charset="0"/>
+              <a:buChar char="•"/>
+              <a:defRPr sz="2100"/>
+            </a:pPr>
+            <a:r>
+              <a:rPr lang="en-US" dirty="0"/>
+              <a:t>M</a:t>
+            </a:r>
+            <a:r>
+              <a:rPr dirty="0"/>
+              <a:t>ore in-depth information about the new </a:t>
+            </a:r>
+            <a:r>
+              <a:rPr lang="en-US" dirty="0"/>
+              <a:t>perennial rye </a:t>
+            </a:r>
+            <a:r>
+              <a:rPr dirty="0"/>
+              <a:t>variety</a:t>
+            </a:r>
+            <a:endParaRPr lang="en-US" dirty="0"/>
+          </a:p>
+          <a:p>
+            <a:pPr marL="342900" indent="-342900">
+              <a:spcAft>
+                <a:spcPts val="1200"/>
+              </a:spcAft>
+              <a:buFont typeface="Arial" panose="020B0604020202020204" pitchFamily="34" charset="0"/>
+              <a:buChar char="•"/>
+              <a:defRPr sz="2100"/>
+            </a:pPr>
+            <a:endParaRPr lang="da-DK" dirty="0"/>
+          </a:p>
+          <a:p>
+            <a:pPr>
+              <a:spcAft>
+                <a:spcPts val="1200"/>
+              </a:spcAft>
+              <a:defRPr sz="2100"/>
+            </a:pPr>
+            <a:r>
+              <a:rPr lang="da-DK" dirty="0"/>
+              <a:t>The same information is </a:t>
+            </a:r>
+            <a:r>
+              <a:rPr lang="da-DK" dirty="0" err="1"/>
+              <a:t>also</a:t>
+            </a:r>
+            <a:r>
+              <a:rPr lang="da-DK" dirty="0"/>
+              <a:t> </a:t>
+            </a:r>
+            <a:r>
+              <a:rPr lang="da-DK" dirty="0" err="1"/>
+              <a:t>available</a:t>
+            </a:r>
+            <a:r>
+              <a:rPr lang="da-DK" dirty="0"/>
+              <a:t> in an </a:t>
+            </a:r>
+            <a:r>
+              <a:rPr lang="da-DK" dirty="0" err="1"/>
+              <a:t>informational</a:t>
+            </a:r>
+            <a:r>
+              <a:rPr lang="da-DK" dirty="0"/>
+              <a:t> </a:t>
+            </a:r>
+            <a:r>
+              <a:rPr lang="da-DK" dirty="0" err="1"/>
+              <a:t>sheet</a:t>
+            </a:r>
+            <a:r>
+              <a:rPr lang="da-DK" dirty="0"/>
+              <a:t> in English and Danish</a:t>
+            </a:r>
+            <a:endParaRPr lang="en-US" dirty="0"/>
+          </a:p>
+          <a:p>
+            <a:pPr marL="342900" indent="-342900">
+              <a:spcAft>
+                <a:spcPts val="1200"/>
+              </a:spcAft>
+              <a:buFont typeface="Arial" panose="020B0604020202020204" pitchFamily="34" charset="0"/>
+              <a:buChar char="•"/>
+              <a:defRPr sz="2100"/>
+            </a:pPr>
+            <a:endParaRPr dirty="0"/>
+          </a:p>
+        </p:txBody>
+      </p:sp>
+      <p:sp>
+        <p:nvSpPr>
+          <p:cNvPr id="4" name="TextBox 3"/>
+          <p:cNvSpPr txBox="1"/>
+          <p:nvPr/>
+        </p:nvSpPr>
+        <p:spPr>
+          <a:xfrm>
+            <a:off x="594360" y="6473952"/>
+            <a:ext cx="10972800" cy="228600"/>
+          </a:xfrm>
+          <a:prstGeom prst="rect">
+            <a:avLst/>
+          </a:prstGeom>
+          <a:noFill/>
+        </p:spPr>
+        <p:txBody>
+          <a:bodyPr wrap="none">
+            <a:spAutoFit/>
+          </a:bodyPr>
+          <a:lstStyle/>
+          <a:p>
+            <a:pPr>
+              <a:defRPr sz="900"/>
+            </a:pPr>
+            <a:r>
+              <a:t>GoodGrain Home Baking Evaluation</a:t>
+            </a:r>
+          </a:p>
+        </p:txBody>
+      </p:sp>
+      <p:sp>
+        <p:nvSpPr>
+          <p:cNvPr id="6" name="TextBox 5">
+            <a:extLst>
+              <a:ext uri="{FF2B5EF4-FFF2-40B4-BE49-F238E27FC236}">
+                <a16:creationId xmlns:a16="http://schemas.microsoft.com/office/drawing/2014/main" id="{CED5667C-D6EB-1BA4-AC70-DBF08B24E721}"/>
+              </a:ext>
+            </a:extLst>
+          </p:cNvPr>
+          <p:cNvSpPr txBox="1"/>
+          <p:nvPr/>
+        </p:nvSpPr>
+        <p:spPr>
+          <a:xfrm>
+            <a:off x="594360" y="320040"/>
+            <a:ext cx="4525341" cy="553998"/>
+          </a:xfrm>
+          <a:prstGeom prst="rect">
+            <a:avLst/>
+          </a:prstGeom>
+          <a:noFill/>
+        </p:spPr>
+        <p:txBody>
+          <a:bodyPr wrap="none">
+            <a:spAutoFit/>
+          </a:bodyPr>
+          <a:lstStyle/>
+          <a:p>
+            <a:pPr>
+              <a:defRPr sz="3000" b="1"/>
+            </a:pPr>
+            <a:r>
+              <a:rPr lang="en-US" dirty="0"/>
+              <a:t>This presentation provides:</a:t>
+            </a:r>
+            <a:endParaRPr dirty="0"/>
+          </a:p>
+        </p:txBody>
+      </p:sp>
+    </p:spTree>
+  </p:cSld>
+  <p:clrMapOvr>
+    <a:masterClrMapping/>
+  </p:clrMapOvr>
+</p:sld>
+</file>
+
+<file path=ppt/slides/slide20.xml><?xml version="1.0" encoding="utf-8"?>
 <p:sld xmlns:a="http://schemas.openxmlformats.org/drawingml/2006/main" xmlns:r="http://schemas.openxmlformats.org/officeDocument/2006/relationships" xmlns:p="http://schemas.openxmlformats.org/presentationml/2006/main">
   <p:cSld>
     <p:spTree>
@@ -4475,420 +5018,6 @@
 </p:sld>
 </file>
 
-<file path=ppt/slides/slide2.xml><?xml version="1.0" encoding="utf-8"?>
-<p:sld xmlns:a="http://schemas.openxmlformats.org/drawingml/2006/main" xmlns:r="http://schemas.openxmlformats.org/officeDocument/2006/relationships" xmlns:p="http://schemas.openxmlformats.org/presentationml/2006/main">
-  <p:cSld>
-    <p:spTree>
-      <p:nvGrpSpPr>
-        <p:cNvPr id="1" name=""/>
-        <p:cNvGrpSpPr/>
-        <p:nvPr/>
-      </p:nvGrpSpPr>
-      <p:grpSpPr>
-        <a:xfrm>
-          <a:off x="0" y="0"/>
-          <a:ext cx="0" cy="0"/>
-          <a:chOff x="0" y="0"/>
-          <a:chExt cx="0" cy="0"/>
-        </a:xfrm>
-      </p:grpSpPr>
-      <p:sp>
-        <p:nvSpPr>
-          <p:cNvPr id="3" name="TextBox 2"/>
-          <p:cNvSpPr txBox="1"/>
-          <p:nvPr/>
-        </p:nvSpPr>
-        <p:spPr>
-          <a:xfrm>
-            <a:off x="731520" y="1234440"/>
-            <a:ext cx="10477254" cy="2323713"/>
-          </a:xfrm>
-          <a:prstGeom prst="rect">
-            <a:avLst/>
-          </a:prstGeom>
-          <a:noFill/>
-        </p:spPr>
-        <p:txBody>
-          <a:bodyPr wrap="square">
-            <a:spAutoFit/>
-          </a:bodyPr>
-          <a:lstStyle/>
-          <a:p>
-            <a:pPr marL="342900" indent="-342900">
-              <a:spcAft>
-                <a:spcPts val="1200"/>
-              </a:spcAft>
-              <a:buFont typeface="Arial" panose="020B0604020202020204" pitchFamily="34" charset="0"/>
-              <a:buChar char="•"/>
-              <a:defRPr sz="2100"/>
-            </a:pPr>
-            <a:r>
-              <a:rPr lang="en-US" dirty="0"/>
-              <a:t>An overview of the GoodGrain project</a:t>
-            </a:r>
-          </a:p>
-          <a:p>
-            <a:pPr marL="342900" indent="-342900">
-              <a:spcAft>
-                <a:spcPts val="1200"/>
-              </a:spcAft>
-              <a:buFont typeface="Arial" panose="020B0604020202020204" pitchFamily="34" charset="0"/>
-              <a:buChar char="•"/>
-              <a:defRPr sz="2100"/>
-            </a:pPr>
-            <a:r>
-              <a:rPr lang="en-US" dirty="0"/>
-              <a:t>M</a:t>
-            </a:r>
-            <a:r>
-              <a:rPr dirty="0"/>
-              <a:t>ore in-depth information about the new </a:t>
-            </a:r>
-            <a:r>
-              <a:rPr lang="en-US" dirty="0"/>
-              <a:t>perennial rye </a:t>
-            </a:r>
-            <a:r>
-              <a:rPr dirty="0"/>
-              <a:t>variety</a:t>
-            </a:r>
-            <a:endParaRPr lang="en-US" dirty="0"/>
-          </a:p>
-          <a:p>
-            <a:pPr marL="342900" indent="-342900">
-              <a:spcAft>
-                <a:spcPts val="1200"/>
-              </a:spcAft>
-              <a:buFont typeface="Arial" panose="020B0604020202020204" pitchFamily="34" charset="0"/>
-              <a:buChar char="•"/>
-              <a:defRPr sz="2100"/>
-            </a:pPr>
-            <a:endParaRPr lang="da-DK" dirty="0"/>
-          </a:p>
-          <a:p>
-            <a:pPr>
-              <a:spcAft>
-                <a:spcPts val="1200"/>
-              </a:spcAft>
-              <a:defRPr sz="2100"/>
-            </a:pPr>
-            <a:r>
-              <a:rPr lang="da-DK" dirty="0"/>
-              <a:t>The same information is </a:t>
-            </a:r>
-            <a:r>
-              <a:rPr lang="da-DK" dirty="0" err="1"/>
-              <a:t>also</a:t>
-            </a:r>
-            <a:r>
-              <a:rPr lang="da-DK" dirty="0"/>
-              <a:t> </a:t>
-            </a:r>
-            <a:r>
-              <a:rPr lang="da-DK" dirty="0" err="1"/>
-              <a:t>available</a:t>
-            </a:r>
-            <a:r>
-              <a:rPr lang="da-DK" dirty="0"/>
-              <a:t> in an </a:t>
-            </a:r>
-            <a:r>
-              <a:rPr lang="da-DK" dirty="0" err="1"/>
-              <a:t>informational</a:t>
-            </a:r>
-            <a:r>
-              <a:rPr lang="da-DK" dirty="0"/>
-              <a:t> </a:t>
-            </a:r>
-            <a:r>
-              <a:rPr lang="da-DK" dirty="0" err="1"/>
-              <a:t>sheet</a:t>
-            </a:r>
-            <a:r>
-              <a:rPr lang="da-DK" dirty="0"/>
-              <a:t> in English and Danish</a:t>
-            </a:r>
-            <a:endParaRPr lang="en-US" dirty="0"/>
-          </a:p>
-          <a:p>
-            <a:pPr marL="342900" indent="-342900">
-              <a:spcAft>
-                <a:spcPts val="1200"/>
-              </a:spcAft>
-              <a:buFont typeface="Arial" panose="020B0604020202020204" pitchFamily="34" charset="0"/>
-              <a:buChar char="•"/>
-              <a:defRPr sz="2100"/>
-            </a:pPr>
-            <a:endParaRPr dirty="0"/>
-          </a:p>
-        </p:txBody>
-      </p:sp>
-      <p:sp>
-        <p:nvSpPr>
-          <p:cNvPr id="4" name="TextBox 3"/>
-          <p:cNvSpPr txBox="1"/>
-          <p:nvPr/>
-        </p:nvSpPr>
-        <p:spPr>
-          <a:xfrm>
-            <a:off x="594360" y="6473952"/>
-            <a:ext cx="10972800" cy="228600"/>
-          </a:xfrm>
-          <a:prstGeom prst="rect">
-            <a:avLst/>
-          </a:prstGeom>
-          <a:noFill/>
-        </p:spPr>
-        <p:txBody>
-          <a:bodyPr wrap="none">
-            <a:spAutoFit/>
-          </a:bodyPr>
-          <a:lstStyle/>
-          <a:p>
-            <a:pPr>
-              <a:defRPr sz="900"/>
-            </a:pPr>
-            <a:r>
-              <a:t>GoodGrain Home Baking Evaluation</a:t>
-            </a:r>
-          </a:p>
-        </p:txBody>
-      </p:sp>
-      <p:sp>
-        <p:nvSpPr>
-          <p:cNvPr id="6" name="TextBox 5">
-            <a:extLst>
-              <a:ext uri="{FF2B5EF4-FFF2-40B4-BE49-F238E27FC236}">
-                <a16:creationId xmlns:a16="http://schemas.microsoft.com/office/drawing/2014/main" id="{CED5667C-D6EB-1BA4-AC70-DBF08B24E721}"/>
-              </a:ext>
-            </a:extLst>
-          </p:cNvPr>
-          <p:cNvSpPr txBox="1"/>
-          <p:nvPr/>
-        </p:nvSpPr>
-        <p:spPr>
-          <a:xfrm>
-            <a:off x="594360" y="320040"/>
-            <a:ext cx="4525341" cy="553998"/>
-          </a:xfrm>
-          <a:prstGeom prst="rect">
-            <a:avLst/>
-          </a:prstGeom>
-          <a:noFill/>
-        </p:spPr>
-        <p:txBody>
-          <a:bodyPr wrap="none">
-            <a:spAutoFit/>
-          </a:bodyPr>
-          <a:lstStyle/>
-          <a:p>
-            <a:pPr>
-              <a:defRPr sz="3000" b="1"/>
-            </a:pPr>
-            <a:r>
-              <a:rPr lang="en-US" dirty="0"/>
-              <a:t>This presentation provides:</a:t>
-            </a:r>
-            <a:endParaRPr dirty="0"/>
-          </a:p>
-        </p:txBody>
-      </p:sp>
-    </p:spTree>
-  </p:cSld>
-  <p:clrMapOvr>
-    <a:masterClrMapping/>
-  </p:clrMapOvr>
-</p:sld>
-</file>
-
-<file path=ppt/slides/slide20.xml><?xml version="1.0" encoding="utf-8"?>
-<p:sld xmlns:a="http://schemas.openxmlformats.org/drawingml/2006/main" xmlns:r="http://schemas.openxmlformats.org/officeDocument/2006/relationships" xmlns:p="http://schemas.openxmlformats.org/presentationml/2006/main">
-  <p:cSld>
-    <p:spTree>
-      <p:nvGrpSpPr>
-        <p:cNvPr id="1" name=""/>
-        <p:cNvGrpSpPr/>
-        <p:nvPr/>
-      </p:nvGrpSpPr>
-      <p:grpSpPr>
-        <a:xfrm>
-          <a:off x="0" y="0"/>
-          <a:ext cx="0" cy="0"/>
-          <a:chOff x="0" y="0"/>
-          <a:chExt cx="0" cy="0"/>
-        </a:xfrm>
-      </p:grpSpPr>
-      <p:sp>
-        <p:nvSpPr>
-          <p:cNvPr id="2" name="TextBox 1"/>
-          <p:cNvSpPr txBox="1"/>
-          <p:nvPr/>
-        </p:nvSpPr>
-        <p:spPr>
-          <a:xfrm>
-            <a:off x="594360" y="320040"/>
-            <a:ext cx="10972800" cy="731520"/>
-          </a:xfrm>
-          <a:prstGeom prst="rect">
-            <a:avLst/>
-          </a:prstGeom>
-          <a:noFill/>
-        </p:spPr>
-        <p:txBody>
-          <a:bodyPr wrap="none">
-            <a:spAutoFit/>
-          </a:bodyPr>
-          <a:lstStyle/>
-          <a:p>
-            <a:pPr>
-              <a:defRPr sz="3000" b="1"/>
-            </a:pPr>
-            <a:r>
-              <a:t>Why might perennial crops be useful?</a:t>
-            </a:r>
-          </a:p>
-        </p:txBody>
-      </p:sp>
-      <p:sp>
-        <p:nvSpPr>
-          <p:cNvPr id="3" name="TextBox 2"/>
-          <p:cNvSpPr txBox="1"/>
-          <p:nvPr/>
-        </p:nvSpPr>
-        <p:spPr>
-          <a:xfrm>
-            <a:off x="731520" y="1234440"/>
-            <a:ext cx="10789920" cy="2800767"/>
-          </a:xfrm>
-          <a:prstGeom prst="rect">
-            <a:avLst/>
-          </a:prstGeom>
-          <a:noFill/>
-        </p:spPr>
-        <p:txBody>
-          <a:bodyPr wrap="square">
-            <a:spAutoFit/>
-          </a:bodyPr>
-          <a:lstStyle/>
-          <a:p>
-            <a:pPr>
-              <a:spcAft>
-                <a:spcPts val="1200"/>
-              </a:spcAft>
-              <a:defRPr sz="1800"/>
-            </a:pPr>
-            <a:r>
-              <a:rPr dirty="0"/>
-              <a:t>It is not yet clear whether annual plants are inherently superior for food production or whether humans simply happened to domesticate them.</a:t>
-            </a:r>
-          </a:p>
-          <a:p>
-            <a:pPr>
-              <a:spcAft>
-                <a:spcPts val="1200"/>
-              </a:spcAft>
-              <a:defRPr sz="1800"/>
-            </a:pPr>
-            <a:r>
-              <a:rPr dirty="0"/>
-              <a:t>Having more perennials integrated into agricultural land would offer environmental benefits.</a:t>
-            </a:r>
-          </a:p>
-          <a:p>
-            <a:pPr marL="285750" indent="-285750">
-              <a:spcAft>
-                <a:spcPts val="1200"/>
-              </a:spcAft>
-              <a:buFont typeface="Arial" panose="020B0604020202020204" pitchFamily="34" charset="0"/>
-              <a:buChar char="•"/>
-              <a:defRPr sz="1800"/>
-            </a:pPr>
-            <a:r>
-              <a:rPr dirty="0"/>
-              <a:t>Perennials can help put carbon into the soil.</a:t>
-            </a:r>
-          </a:p>
-          <a:p>
-            <a:pPr marL="285750" indent="-285750">
-              <a:spcAft>
-                <a:spcPts val="1200"/>
-              </a:spcAft>
-              <a:buFont typeface="Arial" panose="020B0604020202020204" pitchFamily="34" charset="0"/>
-              <a:buChar char="•"/>
-              <a:defRPr sz="1800"/>
-            </a:pPr>
-            <a:r>
-              <a:rPr dirty="0"/>
-              <a:t>They provide soil cover year-round.</a:t>
-            </a:r>
-          </a:p>
-          <a:p>
-            <a:pPr marL="285750" indent="-285750">
-              <a:spcAft>
-                <a:spcPts val="1200"/>
-              </a:spcAft>
-              <a:buFont typeface="Arial" panose="020B0604020202020204" pitchFamily="34" charset="0"/>
-              <a:buChar char="•"/>
-              <a:defRPr sz="1800"/>
-            </a:pPr>
-            <a:r>
-              <a:rPr dirty="0"/>
-              <a:t>They can use resources such as water and nitrogen more efficiently.</a:t>
-            </a:r>
-          </a:p>
-          <a:p>
-            <a:pPr>
-              <a:spcAft>
-                <a:spcPts val="1200"/>
-              </a:spcAft>
-              <a:defRPr sz="1800"/>
-            </a:pPr>
-            <a:r>
-              <a:rPr dirty="0"/>
-              <a:t>Creating perennial versions of staple crops, such as rye, is one way to integrate more perennials into agriculture.</a:t>
-            </a:r>
-          </a:p>
-        </p:txBody>
-      </p:sp>
-      <p:sp>
-        <p:nvSpPr>
-          <p:cNvPr id="4" name="TextBox 3"/>
-          <p:cNvSpPr txBox="1"/>
-          <p:nvPr/>
-        </p:nvSpPr>
-        <p:spPr>
-          <a:xfrm>
-            <a:off x="594360" y="6473952"/>
-            <a:ext cx="10972800" cy="228600"/>
-          </a:xfrm>
-          <a:prstGeom prst="rect">
-            <a:avLst/>
-          </a:prstGeom>
-          <a:noFill/>
-        </p:spPr>
-        <p:txBody>
-          <a:bodyPr wrap="none">
-            <a:spAutoFit/>
-          </a:bodyPr>
-          <a:lstStyle/>
-          <a:p>
-            <a:pPr>
-              <a:defRPr sz="900"/>
-            </a:pPr>
-            <a:r>
-              <a:t>GoodGrain Home Baking Evaluation</a:t>
-            </a:r>
-          </a:p>
-        </p:txBody>
-      </p:sp>
-    </p:spTree>
-  </p:cSld>
-  <p:clrMapOvr>
-    <a:masterClrMapping/>
-  </p:clrMapOvr>
-</p:sld>
-</file>
-
 <file path=ppt/slides/slide21.xml><?xml version="1.0" encoding="utf-8"?>
 <p:sld xmlns:a="http://schemas.openxmlformats.org/drawingml/2006/main" xmlns:r="http://schemas.openxmlformats.org/officeDocument/2006/relationships" xmlns:p="http://schemas.openxmlformats.org/presentationml/2006/main">
   <p:cSld>
@@ -4915,7 +5044,7 @@
         <p:spPr>
           <a:xfrm>
             <a:off x="594360" y="320040"/>
-            <a:ext cx="2736903" cy="553998"/>
+            <a:ext cx="10972800" cy="731520"/>
           </a:xfrm>
           <a:prstGeom prst="rect">
             <a:avLst/>
@@ -4932,10 +5061,8 @@
               <a:defRPr sz="3000" b="1"/>
             </a:pPr>
             <a:r>
-              <a:rPr lang="en-US" dirty="0"/>
-              <a:t>Perennial grains</a:t>
-            </a:r>
-            <a:endParaRPr dirty="0"/>
+              <a:t>Why might perennial crops be useful?</a:t>
+            </a:r>
           </a:p>
         </p:txBody>
       </p:sp>
@@ -4948,7 +5075,7 @@
         <p:spPr>
           <a:xfrm>
             <a:off x="731520" y="1234440"/>
-            <a:ext cx="10789920" cy="3508653"/>
+            <a:ext cx="10789920" cy="3662541"/>
           </a:xfrm>
           <a:prstGeom prst="rect">
             <a:avLst/>
@@ -4965,19 +5092,11 @@
               <a:spcAft>
                 <a:spcPts val="1200"/>
               </a:spcAft>
-              <a:defRPr sz="1900"/>
-            </a:pPr>
-            <a:r>
-              <a:rPr lang="en-US" dirty="0"/>
-              <a:t>There have been efforts to breed </a:t>
-            </a:r>
-            <a:r>
-              <a:rPr lang="en-US" b="1" dirty="0"/>
-              <a:t>perennial wheat </a:t>
-            </a:r>
-            <a:r>
-              <a:rPr lang="en-US" dirty="0"/>
-              <a:t>since the 1930s.</a:t>
+              <a:defRPr sz="1800"/>
+            </a:pPr>
+            <a:r>
+              <a:rPr dirty="0"/>
+              <a:t>It is not yet clear whether annual plants are inherently superior for food production or whether humans simply happened to domesticate them.</a:t>
             </a:r>
           </a:p>
           <a:p>
@@ -4985,91 +5104,201 @@
               <a:spcAft>
                 <a:spcPts val="1200"/>
               </a:spcAft>
-              <a:defRPr sz="1900"/>
-            </a:pPr>
-            <a:r>
-              <a:rPr lang="en-US" dirty="0"/>
-              <a:t>There has been success in creating wheat plants that regrow after harvest.</a:t>
-            </a:r>
-          </a:p>
-          <a:p>
-            <a:pPr>
+              <a:defRPr sz="1800"/>
+            </a:pPr>
+            <a:r>
+              <a:rPr dirty="0"/>
+              <a:t>Having more perennials integrated into agricultural land would offer environmental benefits.</a:t>
+            </a:r>
+          </a:p>
+          <a:p>
+            <a:pPr marL="285750" indent="-285750">
               <a:spcAft>
                 <a:spcPts val="1200"/>
               </a:spcAft>
-              <a:defRPr sz="1900"/>
-            </a:pPr>
-            <a:r>
-              <a:rPr lang="en-US" dirty="0"/>
-              <a:t>Multiple harvests is still difficult, and grain yields are low. </a:t>
-            </a:r>
-          </a:p>
-          <a:p>
-            <a:pPr>
+              <a:buFont typeface="Arial" panose="020B0604020202020204" pitchFamily="34" charset="0"/>
+              <a:buChar char="•"/>
+              <a:defRPr sz="1800"/>
+            </a:pPr>
+            <a:r>
+              <a:rPr dirty="0"/>
+              <a:t>Perennials can help </a:t>
+            </a:r>
+            <a:r>
+              <a:rPr b="1" dirty="0"/>
+              <a:t>put carbon into the soil</a:t>
+            </a:r>
+            <a:r>
+              <a:rPr dirty="0"/>
+              <a:t>.</a:t>
+            </a:r>
+          </a:p>
+          <a:p>
+            <a:pPr marL="285750" indent="-285750">
               <a:spcAft>
                 <a:spcPts val="1200"/>
               </a:spcAft>
-              <a:defRPr sz="1900"/>
-            </a:pPr>
-            <a:endParaRPr lang="en-US" dirty="0"/>
-          </a:p>
-          <a:p>
-            <a:pPr>
+              <a:buFont typeface="Arial" panose="020B0604020202020204" pitchFamily="34" charset="0"/>
+              <a:buChar char="•"/>
+              <a:defRPr sz="1800"/>
+            </a:pPr>
+            <a:r>
+              <a:rPr dirty="0"/>
+              <a:t>They </a:t>
+            </a:r>
+            <a:r>
+              <a:rPr b="1" dirty="0"/>
+              <a:t>provide soil cover year-round</a:t>
+            </a:r>
+            <a:r>
+              <a:rPr lang="en-US" dirty="0"/>
+              <a:t>, protecting it from wind and rain</a:t>
+            </a:r>
+            <a:r>
+              <a:rPr dirty="0"/>
+              <a:t>.</a:t>
+            </a:r>
+          </a:p>
+          <a:p>
+            <a:pPr marL="285750" indent="-285750">
               <a:spcAft>
                 <a:spcPts val="1200"/>
               </a:spcAft>
-              <a:defRPr sz="1900"/>
-            </a:pPr>
-            <a:r>
-              <a:rPr lang="en-US" b="1" dirty="0"/>
-              <a:t>Intermediate wheatgrass</a:t>
+              <a:buFont typeface="Arial" panose="020B0604020202020204" pitchFamily="34" charset="0"/>
+              <a:buChar char="•"/>
+              <a:defRPr sz="1800"/>
+            </a:pPr>
+            <a:r>
+              <a:rPr dirty="0"/>
+              <a:t>They can use resources</a:t>
             </a:r>
             <a:r>
               <a:rPr lang="en-US" dirty="0"/>
-              <a:t> has been used as a forage, and is being bred for grain production.</a:t>
-            </a:r>
-          </a:p>
-          <a:p>
-            <a:pPr>
+              <a:t>,</a:t>
+            </a:r>
+            <a:r>
+              <a:rPr dirty="0"/>
+              <a:t> such as water and nitrogen</a:t>
+            </a:r>
+            <a:r>
+              <a:rPr lang="en-US" dirty="0"/>
+              <a:t>,</a:t>
+            </a:r>
+            <a:r>
+              <a:rPr dirty="0"/>
+              <a:t> </a:t>
+            </a:r>
+            <a:r>
+              <a:rPr b="1" dirty="0"/>
+              <a:t>more efficiently</a:t>
+            </a:r>
+            <a:r>
+              <a:rPr dirty="0"/>
+              <a:t>.</a:t>
+            </a:r>
+            <a:endParaRPr lang="en-US" dirty="0"/>
+          </a:p>
+          <a:p>
+            <a:pPr marL="285750" indent="-285750">
               <a:spcAft>
                 <a:spcPts val="1200"/>
               </a:spcAft>
-              <a:defRPr sz="1900"/>
-            </a:pPr>
-            <a:r>
-              <a:rPr lang="en-US" dirty="0"/>
-              <a:t>The grain has been registered with the name Kernza®. </a:t>
-            </a:r>
+              <a:buFont typeface="Arial" panose="020B0604020202020204" pitchFamily="34" charset="0"/>
+              <a:buChar char="•"/>
+              <a:defRPr sz="1800"/>
+            </a:pPr>
+            <a:r>
+              <a:rPr lang="da-DK" dirty="0"/>
+              <a:t>Living </a:t>
+            </a:r>
+            <a:r>
+              <a:rPr lang="da-DK" dirty="0" err="1"/>
+              <a:t>roots</a:t>
+            </a:r>
+            <a:r>
+              <a:rPr lang="da-DK" dirty="0"/>
+              <a:t> </a:t>
+            </a:r>
+            <a:r>
+              <a:rPr lang="da-DK" dirty="0" err="1"/>
+              <a:t>can</a:t>
+            </a:r>
+            <a:r>
+              <a:rPr lang="da-DK" dirty="0"/>
+              <a:t> </a:t>
+            </a:r>
+            <a:r>
+              <a:rPr lang="da-DK" dirty="0" err="1"/>
+              <a:t>help</a:t>
+            </a:r>
+            <a:r>
+              <a:rPr lang="da-DK" dirty="0"/>
+              <a:t> promote a </a:t>
+            </a:r>
+            <a:r>
+              <a:rPr lang="da-DK" dirty="0" err="1"/>
+              <a:t>healthier</a:t>
+            </a:r>
+            <a:r>
+              <a:rPr lang="da-DK" dirty="0"/>
+              <a:t> and </a:t>
+            </a:r>
+            <a:r>
+              <a:rPr lang="da-DK" b="1" dirty="0"/>
+              <a:t>more </a:t>
+            </a:r>
+            <a:r>
+              <a:rPr lang="da-DK" b="1" dirty="0" err="1"/>
+              <a:t>active</a:t>
+            </a:r>
+            <a:r>
+              <a:rPr lang="da-DK" b="1" dirty="0"/>
+              <a:t> </a:t>
+            </a:r>
+            <a:r>
+              <a:rPr lang="da-DK" b="1" dirty="0" err="1"/>
+              <a:t>soil</a:t>
+            </a:r>
+            <a:r>
+              <a:rPr lang="da-DK" b="1" dirty="0"/>
+              <a:t> </a:t>
+            </a:r>
+            <a:r>
+              <a:rPr lang="da-DK" b="1" dirty="0" err="1"/>
+              <a:t>biology</a:t>
+            </a:r>
+            <a:endParaRPr lang="da-DK" b="1" dirty="0"/>
           </a:p>
           <a:p>
             <a:pPr>
               <a:spcAft>
                 <a:spcPts val="1200"/>
               </a:spcAft>
-              <a:defRPr sz="1900"/>
-            </a:pPr>
-            <a:r>
-              <a:rPr lang="en-US" dirty="0"/>
-              <a:t>As of 2026, Kernza® is not approved for human consumption in the European Union. </a:t>
-            </a:r>
+              <a:defRPr sz="1800"/>
+            </a:pPr>
+            <a:r>
+              <a:rPr lang="da-DK" dirty="0"/>
+              <a:t> </a:t>
+            </a:r>
+            <a:endParaRPr dirty="0"/>
           </a:p>
           <a:p>
             <a:pPr>
               <a:spcAft>
                 <a:spcPts val="1200"/>
               </a:spcAft>
-              <a:defRPr sz="1900"/>
-            </a:pPr>
-            <a:r>
-              <a:rPr lang="en-US" dirty="0"/>
-              <a:t>Grain yields are low.</a:t>
-            </a:r>
-          </a:p>
-        </p:txBody>
-      </p:sp>
-      <p:sp>
-        <p:nvSpPr>
-          <p:cNvPr id="5" name="TextBox 4"/>
+              <a:defRPr sz="1800"/>
+            </a:pPr>
+            <a:r>
+              <a:rPr dirty="0"/>
+              <a:t>Creating perennial versions of staple crops, such as rye, is one way to integrate more perennials into agriculture.</a:t>
+            </a:r>
+          </a:p>
+        </p:txBody>
+      </p:sp>
+      <p:sp>
+        <p:nvSpPr>
+          <p:cNvPr id="4" name="TextBox 3"/>
           <p:cNvSpPr txBox="1"/>
           <p:nvPr/>
         </p:nvSpPr>
@@ -5107,6 +5336,223 @@
 </file>
 
 <file path=ppt/slides/slide22.xml><?xml version="1.0" encoding="utf-8"?>
+<p:sld xmlns:a="http://schemas.openxmlformats.org/drawingml/2006/main" xmlns:r="http://schemas.openxmlformats.org/officeDocument/2006/relationships" xmlns:p="http://schemas.openxmlformats.org/presentationml/2006/main">
+  <p:cSld>
+    <p:spTree>
+      <p:nvGrpSpPr>
+        <p:cNvPr id="1" name=""/>
+        <p:cNvGrpSpPr/>
+        <p:nvPr/>
+      </p:nvGrpSpPr>
+      <p:grpSpPr>
+        <a:xfrm>
+          <a:off x="0" y="0"/>
+          <a:ext cx="0" cy="0"/>
+          <a:chOff x="0" y="0"/>
+          <a:chExt cx="0" cy="0"/>
+        </a:xfrm>
+      </p:grpSpPr>
+      <p:sp>
+        <p:nvSpPr>
+          <p:cNvPr id="2" name="TextBox 1"/>
+          <p:cNvSpPr txBox="1"/>
+          <p:nvPr/>
+        </p:nvSpPr>
+        <p:spPr>
+          <a:xfrm>
+            <a:off x="594360" y="320040"/>
+            <a:ext cx="2736903" cy="553998"/>
+          </a:xfrm>
+          <a:prstGeom prst="rect">
+            <a:avLst/>
+          </a:prstGeom>
+          <a:noFill/>
+        </p:spPr>
+        <p:txBody>
+          <a:bodyPr wrap="none">
+            <a:spAutoFit/>
+          </a:bodyPr>
+          <a:lstStyle/>
+          <a:p>
+            <a:pPr>
+              <a:defRPr sz="3000" b="1"/>
+            </a:pPr>
+            <a:r>
+              <a:rPr lang="en-US" dirty="0"/>
+              <a:t>Perennial grains</a:t>
+            </a:r>
+            <a:endParaRPr dirty="0"/>
+          </a:p>
+        </p:txBody>
+      </p:sp>
+      <p:sp>
+        <p:nvSpPr>
+          <p:cNvPr id="3" name="TextBox 2"/>
+          <p:cNvSpPr txBox="1"/>
+          <p:nvPr/>
+        </p:nvSpPr>
+        <p:spPr>
+          <a:xfrm>
+            <a:off x="731520" y="1234440"/>
+            <a:ext cx="10789920" cy="3508653"/>
+          </a:xfrm>
+          <a:prstGeom prst="rect">
+            <a:avLst/>
+          </a:prstGeom>
+          <a:noFill/>
+        </p:spPr>
+        <p:txBody>
+          <a:bodyPr wrap="square">
+            <a:spAutoFit/>
+          </a:bodyPr>
+          <a:lstStyle/>
+          <a:p>
+            <a:pPr>
+              <a:spcAft>
+                <a:spcPts val="1200"/>
+              </a:spcAft>
+              <a:defRPr sz="1900"/>
+            </a:pPr>
+            <a:r>
+              <a:rPr lang="en-US" dirty="0"/>
+              <a:t>There have been efforts to breed </a:t>
+            </a:r>
+            <a:r>
+              <a:rPr lang="en-US" b="1" dirty="0"/>
+              <a:t>perennial wheat </a:t>
+            </a:r>
+            <a:r>
+              <a:rPr lang="en-US" dirty="0"/>
+              <a:t>since the 1930s.</a:t>
+            </a:r>
+          </a:p>
+          <a:p>
+            <a:pPr>
+              <a:spcAft>
+                <a:spcPts val="1200"/>
+              </a:spcAft>
+              <a:defRPr sz="1900"/>
+            </a:pPr>
+            <a:r>
+              <a:rPr lang="en-US" dirty="0"/>
+              <a:t>There has been success in creating wheat plants that regrow after harvest.</a:t>
+            </a:r>
+          </a:p>
+          <a:p>
+            <a:pPr>
+              <a:spcAft>
+                <a:spcPts val="1200"/>
+              </a:spcAft>
+              <a:defRPr sz="1900"/>
+            </a:pPr>
+            <a:r>
+              <a:rPr lang="en-US" dirty="0"/>
+              <a:t>Multiple harvests is still difficult, and grain yields are low. </a:t>
+            </a:r>
+          </a:p>
+          <a:p>
+            <a:pPr>
+              <a:spcAft>
+                <a:spcPts val="1200"/>
+              </a:spcAft>
+              <a:defRPr sz="1900"/>
+            </a:pPr>
+            <a:endParaRPr lang="en-US" dirty="0"/>
+          </a:p>
+          <a:p>
+            <a:pPr>
+              <a:spcAft>
+                <a:spcPts val="1200"/>
+              </a:spcAft>
+              <a:defRPr sz="1900"/>
+            </a:pPr>
+            <a:r>
+              <a:rPr lang="en-US" b="1" dirty="0"/>
+              <a:t>Intermediate wheatgrass</a:t>
+            </a:r>
+            <a:r>
+              <a:rPr lang="en-US" dirty="0"/>
+              <a:t> has been used as a forage, and is being bred for grain production.</a:t>
+            </a:r>
+          </a:p>
+          <a:p>
+            <a:pPr>
+              <a:spcAft>
+                <a:spcPts val="1200"/>
+              </a:spcAft>
+              <a:defRPr sz="1900"/>
+            </a:pPr>
+            <a:r>
+              <a:rPr lang="en-US" dirty="0"/>
+              <a:t>The grain has been registered with the name Kernza®. </a:t>
+            </a:r>
+          </a:p>
+          <a:p>
+            <a:pPr>
+              <a:spcAft>
+                <a:spcPts val="1200"/>
+              </a:spcAft>
+              <a:defRPr sz="1900"/>
+            </a:pPr>
+            <a:r>
+              <a:rPr lang="en-US" dirty="0"/>
+              <a:t>As of 2026, Kernza® is not approved for human consumption in the European Union. </a:t>
+            </a:r>
+          </a:p>
+          <a:p>
+            <a:pPr>
+              <a:spcAft>
+                <a:spcPts val="1200"/>
+              </a:spcAft>
+              <a:defRPr sz="1900"/>
+            </a:pPr>
+            <a:r>
+              <a:rPr lang="en-US" dirty="0"/>
+              <a:t>Grain yields are low.</a:t>
+            </a:r>
+          </a:p>
+        </p:txBody>
+      </p:sp>
+      <p:sp>
+        <p:nvSpPr>
+          <p:cNvPr id="5" name="TextBox 4"/>
+          <p:cNvSpPr txBox="1"/>
+          <p:nvPr/>
+        </p:nvSpPr>
+        <p:spPr>
+          <a:xfrm>
+            <a:off x="594360" y="6473952"/>
+            <a:ext cx="10972800" cy="228600"/>
+          </a:xfrm>
+          <a:prstGeom prst="rect">
+            <a:avLst/>
+          </a:prstGeom>
+          <a:noFill/>
+        </p:spPr>
+        <p:txBody>
+          <a:bodyPr wrap="none">
+            <a:spAutoFit/>
+          </a:bodyPr>
+          <a:lstStyle/>
+          <a:p>
+            <a:pPr>
+              <a:defRPr sz="900"/>
+            </a:pPr>
+            <a:r>
+              <a:t>GoodGrain Home Baking Evaluation</a:t>
+            </a:r>
+          </a:p>
+        </p:txBody>
+      </p:sp>
+    </p:spTree>
+  </p:cSld>
+  <p:clrMapOvr>
+    <a:masterClrMapping/>
+  </p:clrMapOvr>
+</p:sld>
+</file>
+
+<file path=ppt/slides/slide23.xml><?xml version="1.0" encoding="utf-8"?>
 <p:sld xmlns:a="http://schemas.openxmlformats.org/drawingml/2006/main" xmlns:r="http://schemas.openxmlformats.org/officeDocument/2006/relationships" xmlns:p="http://schemas.openxmlformats.org/presentationml/2006/main">
   <p:cSld>
     <p:spTree>
@@ -5290,7 +5736,7 @@
 </p:sld>
 </file>
 
-<file path=ppt/slides/slide23.xml><?xml version="1.0" encoding="utf-8"?>
+<file path=ppt/slides/slide24.xml><?xml version="1.0" encoding="utf-8"?>
 <p:sld xmlns:a="http://schemas.openxmlformats.org/drawingml/2006/main" xmlns:r="http://schemas.openxmlformats.org/officeDocument/2006/relationships" xmlns:p="http://schemas.openxmlformats.org/presentationml/2006/main">
   <p:cSld>
     <p:spTree>
@@ -5386,160 +5832,6 @@
         <p14:creationId xmlns:p14="http://schemas.microsoft.com/office/powerpoint/2010/main" val="3551212110"/>
       </p:ext>
     </p:extLst>
-  </p:cSld>
-  <p:clrMapOvr>
-    <a:masterClrMapping/>
-  </p:clrMapOvr>
-</p:sld>
-</file>
-
-<file path=ppt/slides/slide24.xml><?xml version="1.0" encoding="utf-8"?>
-<p:sld xmlns:a="http://schemas.openxmlformats.org/drawingml/2006/main" xmlns:r="http://schemas.openxmlformats.org/officeDocument/2006/relationships" xmlns:p="http://schemas.openxmlformats.org/presentationml/2006/main">
-  <p:cSld>
-    <p:spTree>
-      <p:nvGrpSpPr>
-        <p:cNvPr id="1" name=""/>
-        <p:cNvGrpSpPr/>
-        <p:nvPr/>
-      </p:nvGrpSpPr>
-      <p:grpSpPr>
-        <a:xfrm>
-          <a:off x="0" y="0"/>
-          <a:ext cx="0" cy="0"/>
-          <a:chOff x="0" y="0"/>
-          <a:chExt cx="0" cy="0"/>
-        </a:xfrm>
-      </p:grpSpPr>
-      <p:sp>
-        <p:nvSpPr>
-          <p:cNvPr id="2" name="TextBox 1"/>
-          <p:cNvSpPr txBox="1"/>
-          <p:nvPr/>
-        </p:nvSpPr>
-        <p:spPr>
-          <a:xfrm>
-            <a:off x="594360" y="320040"/>
-            <a:ext cx="10972800" cy="731520"/>
-          </a:xfrm>
-          <a:prstGeom prst="rect">
-            <a:avLst/>
-          </a:prstGeom>
-          <a:noFill/>
-        </p:spPr>
-        <p:txBody>
-          <a:bodyPr wrap="none">
-            <a:spAutoFit/>
-          </a:bodyPr>
-          <a:lstStyle/>
-          <a:p>
-            <a:pPr>
-              <a:defRPr sz="3000" b="1"/>
-            </a:pPr>
-            <a:r>
-              <a:t>How long will the crop produce grain?</a:t>
-            </a:r>
-          </a:p>
-        </p:txBody>
-      </p:sp>
-      <p:sp>
-        <p:nvSpPr>
-          <p:cNvPr id="3" name="TextBox 2"/>
-          <p:cNvSpPr txBox="1"/>
-          <p:nvPr/>
-        </p:nvSpPr>
-        <p:spPr>
-          <a:xfrm>
-            <a:off x="731520" y="1234440"/>
-            <a:ext cx="10789920" cy="5029200"/>
-          </a:xfrm>
-          <a:prstGeom prst="rect">
-            <a:avLst/>
-          </a:prstGeom>
-          <a:noFill/>
-        </p:spPr>
-        <p:txBody>
-          <a:bodyPr wrap="square">
-            <a:spAutoFit/>
-          </a:bodyPr>
-          <a:lstStyle/>
-          <a:p>
-            <a:pPr>
-              <a:spcAft>
-                <a:spcPts val="1200"/>
-              </a:spcAft>
-              <a:defRPr sz="2100"/>
-            </a:pPr>
-            <a:r>
-              <a:t>This has not yet been tested extensively.</a:t>
-            </a:r>
-          </a:p>
-          <a:p>
-            <a:pPr>
-              <a:spcAft>
-                <a:spcPts val="1200"/>
-              </a:spcAft>
-              <a:defRPr sz="2100"/>
-            </a:pPr>
-            <a:r>
-              <a:t>The perennial rye appears to reliably produce grain for at least two years.</a:t>
-            </a:r>
-          </a:p>
-          <a:p>
-            <a:pPr>
-              <a:spcAft>
-                <a:spcPts val="1200"/>
-              </a:spcAft>
-              <a:defRPr sz="2100"/>
-            </a:pPr>
-            <a:r>
-              <a:t>After that, weeds and diseases may become problems.</a:t>
-            </a:r>
-          </a:p>
-          <a:p>
-            <a:pPr>
-              <a:spcAft>
-                <a:spcPts val="1200"/>
-              </a:spcAft>
-              <a:defRPr sz="2100"/>
-            </a:pPr>
-            <a:r>
-              <a:t>More research is needed to determine the optimal way to manage the crop.</a:t>
-            </a:r>
-          </a:p>
-        </p:txBody>
-      </p:sp>
-      <p:sp>
-        <p:nvSpPr>
-          <p:cNvPr id="4" name="TextBox 3"/>
-          <p:cNvSpPr txBox="1"/>
-          <p:nvPr/>
-        </p:nvSpPr>
-        <p:spPr>
-          <a:xfrm>
-            <a:off x="594360" y="6473952"/>
-            <a:ext cx="10972800" cy="228600"/>
-          </a:xfrm>
-          <a:prstGeom prst="rect">
-            <a:avLst/>
-          </a:prstGeom>
-          <a:noFill/>
-        </p:spPr>
-        <p:txBody>
-          <a:bodyPr wrap="none">
-            <a:spAutoFit/>
-          </a:bodyPr>
-          <a:lstStyle/>
-          <a:p>
-            <a:pPr>
-              <a:defRPr sz="900"/>
-            </a:pPr>
-            <a:r>
-              <a:t>GoodGrain Home Baking Evaluation</a:t>
-            </a:r>
-          </a:p>
-        </p:txBody>
-      </p:sp>
-    </p:spTree>
   </p:cSld>
   <p:clrMapOvr>
     <a:masterClrMapping/>
@@ -5590,7 +5882,7 @@
               <a:defRPr sz="3000" b="1"/>
             </a:pPr>
             <a:r>
-              <a:t>What happened to the crop?</a:t>
+              <a:t>How long will the crop produce grain?</a:t>
             </a:r>
           </a:p>
         </p:txBody>
@@ -5604,7 +5896,7 @@
         <p:spPr>
           <a:xfrm>
             <a:off x="731520" y="1234440"/>
-            <a:ext cx="10789920" cy="5029200"/>
+            <a:ext cx="10789920" cy="1846659"/>
           </a:xfrm>
           <a:prstGeom prst="rect">
             <a:avLst/>
@@ -5621,10 +5913,19 @@
               <a:spcAft>
                 <a:spcPts val="1200"/>
               </a:spcAft>
-              <a:defRPr sz="1900"/>
-            </a:pPr>
-            <a:r>
-              <a:t>The German government rejected the application, and the crop was never released as a variety.</a:t>
+              <a:defRPr sz="2100"/>
+            </a:pPr>
+            <a:r>
+              <a:rPr dirty="0"/>
+              <a:t>This has </a:t>
+            </a:r>
+            <a:r>
+              <a:rPr b="1" dirty="0"/>
+              <a:t>not yet been tested </a:t>
+            </a:r>
+            <a:r>
+              <a:rPr dirty="0"/>
+              <a:t>extensively.</a:t>
             </a:r>
           </a:p>
           <a:p>
@@ -5632,10 +5933,19 @@
               <a:spcAft>
                 <a:spcPts val="1200"/>
               </a:spcAft>
-              <a:defRPr sz="1900"/>
-            </a:pPr>
-            <a:r>
-              <a:t>The breeders maintained some plots as a passion project.</a:t>
+              <a:defRPr sz="2100"/>
+            </a:pPr>
+            <a:r>
+              <a:rPr dirty="0"/>
+              <a:t>The perennial rye appears to reliably produce grain for </a:t>
+            </a:r>
+            <a:r>
+              <a:rPr b="1" dirty="0"/>
+              <a:t>at least two years</a:t>
+            </a:r>
+            <a:r>
+              <a:rPr dirty="0"/>
+              <a:t>.</a:t>
             </a:r>
           </a:p>
           <a:p>
@@ -5643,10 +5953,11 @@
               <a:spcAft>
                 <a:spcPts val="1200"/>
               </a:spcAft>
-              <a:defRPr sz="1900"/>
-            </a:pPr>
-            <a:r>
-              <a:t>Some material was later released as a wildlife forage crop.</a:t>
+              <a:defRPr sz="2100"/>
+            </a:pPr>
+            <a:r>
+              <a:rPr dirty="0"/>
+              <a:t>After that, weeds and diseases may become problems.</a:t>
             </a:r>
           </a:p>
           <a:p>
@@ -5654,21 +5965,15 @@
               <a:spcAft>
                 <a:spcPts val="1200"/>
               </a:spcAft>
-              <a:defRPr sz="1900"/>
-            </a:pPr>
-            <a:r>
-              <a:t>The perennial rye received little attention for about thirty years.</a:t>
-            </a:r>
-          </a:p>
-          <a:p>
-            <a:pPr>
-              <a:spcAft>
-                <a:spcPts val="1200"/>
-              </a:spcAft>
-              <a:defRPr sz="1900"/>
-            </a:pPr>
-            <a:r>
-              <a:t>In 2023, Dr. Thomas Miedaner shared seeds with researchers at Aarhus University.</a:t>
+              <a:defRPr sz="2100"/>
+            </a:pPr>
+            <a:r>
+              <a:rPr b="1" dirty="0"/>
+              <a:t>More research </a:t>
+            </a:r>
+            <a:r>
+              <a:rPr dirty="0"/>
+              <a:t>is needed to determine the optimal way to manage the crop.</a:t>
             </a:r>
           </a:p>
         </p:txBody>
@@ -5755,7 +6060,7 @@
               <a:defRPr sz="3000" b="1"/>
             </a:pPr>
             <a:r>
-              <a:t>Why are we interested now?</a:t>
+              <a:t>What happened to the crop?</a:t>
             </a:r>
           </a:p>
         </p:txBody>
@@ -5769,7 +6074,7 @@
         <p:spPr>
           <a:xfrm>
             <a:off x="731520" y="1234440"/>
-            <a:ext cx="10789920" cy="5029200"/>
+            <a:ext cx="10789920" cy="2169825"/>
           </a:xfrm>
           <a:prstGeom prst="rect">
             <a:avLst/>
@@ -5789,7 +6094,16 @@
               <a:defRPr sz="1900"/>
             </a:pPr>
             <a:r>
-              <a:t>The researchers at Aarhus University think perennial rye has a lot of potential in Denmark.</a:t>
+              <a:rPr dirty="0"/>
+              <a:t>The German government </a:t>
+            </a:r>
+            <a:r>
+              <a:rPr b="1" dirty="0"/>
+              <a:t>rejected the application</a:t>
+            </a:r>
+            <a:r>
+              <a:rPr dirty="0"/>
+              <a:t>, and the crop was never released as a variety.</a:t>
             </a:r>
           </a:p>
           <a:p>
@@ -5800,7 +6114,8 @@
               <a:defRPr sz="1900"/>
             </a:pPr>
             <a:r>
-              <a:t>In 2025, the perennial rye was tested side-by-side with a high-yielding annual rye.</a:t>
+              <a:rPr dirty="0"/>
+              <a:t>The breeders maintained some plots as a passion project.</a:t>
             </a:r>
           </a:p>
           <a:p>
@@ -5811,7 +6126,16 @@
               <a:defRPr sz="1900"/>
             </a:pPr>
             <a:r>
-              <a:t>It produced about half the grain yield of the modern annual rye.</a:t>
+              <a:rPr dirty="0"/>
+              <a:t>Some material was later released as a </a:t>
+            </a:r>
+            <a:r>
+              <a:rPr b="1" dirty="0"/>
+              <a:t>wildlife forage crop</a:t>
+            </a:r>
+            <a:r>
+              <a:rPr dirty="0"/>
+              <a:t>.</a:t>
             </a:r>
           </a:p>
           <a:p>
@@ -5822,7 +6146,8 @@
               <a:defRPr sz="1900"/>
             </a:pPr>
             <a:r>
-              <a:t>The result was especially promising given that the perennial rye was crossed with varieties from the 1960s.</a:t>
+              <a:rPr dirty="0"/>
+              <a:t>The perennial rye received little attention for about thirty years.</a:t>
             </a:r>
           </a:p>
           <a:p>
@@ -5833,7 +6158,8 @@
               <a:defRPr sz="1900"/>
             </a:pPr>
             <a:r>
-              <a:t>GoodGrain is part of the effort to develop and understand this variety.</a:t>
+              <a:rPr dirty="0"/>
+              <a:t>In 2023, Dr. Thomas Miedaner shared seeds with researchers at Aarhus University.</a:t>
             </a:r>
           </a:p>
         </p:txBody>
@@ -5920,7 +6246,7 @@
               <a:defRPr sz="3000" b="1"/>
             </a:pPr>
             <a:r>
-              <a:t>Thank you!</a:t>
+              <a:t>Why are we interested now?</a:t>
             </a:r>
           </a:p>
         </p:txBody>
@@ -5933,8 +6259,8 @@
         </p:nvSpPr>
         <p:spPr>
           <a:xfrm>
-            <a:off x="731520" y="1463040"/>
-            <a:ext cx="10789920" cy="1215717"/>
+            <a:off x="731520" y="1234440"/>
+            <a:ext cx="10789920" cy="2462213"/>
           </a:xfrm>
           <a:prstGeom prst="rect">
             <a:avLst/>
@@ -5951,11 +6277,15 @@
               <a:spcAft>
                 <a:spcPts val="1200"/>
               </a:spcAft>
-              <a:defRPr sz="2100"/>
-            </a:pPr>
-            <a:r>
-              <a:rPr dirty="0"/>
-              <a:t>Thank you for considering participation in the GoodGrain Home Baking Evaluation.</a:t>
+              <a:defRPr sz="1900"/>
+            </a:pPr>
+            <a:r>
+              <a:rPr lang="en-US" dirty="0"/>
+              <a:t>R</a:t>
+            </a:r>
+            <a:r>
+              <a:rPr dirty="0"/>
+              <a:t>esearchers at Aarhus University think perennial rye has a lot of potential in Denmark.</a:t>
             </a:r>
           </a:p>
           <a:p>
@@ -5963,11 +6293,79 @@
               <a:spcAft>
                 <a:spcPts val="1200"/>
               </a:spcAft>
-              <a:defRPr sz="2100"/>
-            </a:pPr>
-            <a:r>
-              <a:rPr dirty="0"/>
-              <a:t>Your baking experience will help us understand how this perennial rye performs in home kitchens and how people feel about eating a perennial grain.</a:t>
+              <a:defRPr sz="1900"/>
+            </a:pPr>
+            <a:r>
+              <a:rPr dirty="0"/>
+              <a:t>In 2025, the perennial rye was </a:t>
+            </a:r>
+            <a:r>
+              <a:rPr b="1" dirty="0"/>
+              <a:t>tested side-by-side</a:t>
+            </a:r>
+            <a:r>
+              <a:rPr dirty="0"/>
+              <a:t> with a high-yielding annual rye.</a:t>
+            </a:r>
+          </a:p>
+          <a:p>
+            <a:pPr>
+              <a:spcAft>
+                <a:spcPts val="1200"/>
+              </a:spcAft>
+              <a:defRPr sz="1900"/>
+            </a:pPr>
+            <a:r>
+              <a:rPr dirty="0"/>
+              <a:t>It produced about </a:t>
+            </a:r>
+            <a:r>
+              <a:rPr b="1" dirty="0"/>
+              <a:t>half the grain yield</a:t>
+            </a:r>
+            <a:r>
+              <a:rPr dirty="0"/>
+              <a:t> </a:t>
+            </a:r>
+            <a:r>
+              <a:rPr lang="en-US" dirty="0"/>
+              <a:t>(3-4 tons per hectare) </a:t>
+            </a:r>
+            <a:r>
+              <a:rPr dirty="0"/>
+              <a:t>of the modern annual rye</a:t>
+            </a:r>
+            <a:r>
+              <a:rPr lang="en-US" dirty="0"/>
+              <a:t> (8-9 tons per hectare)</a:t>
+            </a:r>
+            <a:r>
+              <a:rPr dirty="0"/>
+              <a:t>.</a:t>
+            </a:r>
+          </a:p>
+          <a:p>
+            <a:pPr>
+              <a:spcAft>
+                <a:spcPts val="1200"/>
+              </a:spcAft>
+              <a:defRPr sz="1900"/>
+            </a:pPr>
+            <a:r>
+              <a:rPr dirty="0"/>
+              <a:t>The result was especially promising given that the perennial rye was crossed with varieties from the 1960s.</a:t>
+            </a:r>
+          </a:p>
+          <a:p>
+            <a:pPr>
+              <a:spcAft>
+                <a:spcPts val="1200"/>
+              </a:spcAft>
+              <a:defRPr sz="1900"/>
+            </a:pPr>
+            <a:r>
+              <a:rPr dirty="0"/>
+              <a:t>GoodGrain is part of the effort to develop and understand this variety.</a:t>
             </a:r>
           </a:p>
         </p:txBody>
@@ -6012,6 +6410,140 @@
 </file>
 
 <file path=ppt/slides/slide28.xml><?xml version="1.0" encoding="utf-8"?>
+<p:sld xmlns:a="http://schemas.openxmlformats.org/drawingml/2006/main" xmlns:r="http://schemas.openxmlformats.org/officeDocument/2006/relationships" xmlns:p="http://schemas.openxmlformats.org/presentationml/2006/main">
+  <p:cSld>
+    <p:spTree>
+      <p:nvGrpSpPr>
+        <p:cNvPr id="1" name=""/>
+        <p:cNvGrpSpPr/>
+        <p:nvPr/>
+      </p:nvGrpSpPr>
+      <p:grpSpPr>
+        <a:xfrm>
+          <a:off x="0" y="0"/>
+          <a:ext cx="0" cy="0"/>
+          <a:chOff x="0" y="0"/>
+          <a:chExt cx="0" cy="0"/>
+        </a:xfrm>
+      </p:grpSpPr>
+      <p:sp>
+        <p:nvSpPr>
+          <p:cNvPr id="2" name="TextBox 1"/>
+          <p:cNvSpPr txBox="1"/>
+          <p:nvPr/>
+        </p:nvSpPr>
+        <p:spPr>
+          <a:xfrm>
+            <a:off x="594360" y="320040"/>
+            <a:ext cx="10972800" cy="731520"/>
+          </a:xfrm>
+          <a:prstGeom prst="rect">
+            <a:avLst/>
+          </a:prstGeom>
+          <a:noFill/>
+        </p:spPr>
+        <p:txBody>
+          <a:bodyPr wrap="none">
+            <a:spAutoFit/>
+          </a:bodyPr>
+          <a:lstStyle/>
+          <a:p>
+            <a:pPr>
+              <a:defRPr sz="3000" b="1"/>
+            </a:pPr>
+            <a:r>
+              <a:t>Thank you!</a:t>
+            </a:r>
+          </a:p>
+        </p:txBody>
+      </p:sp>
+      <p:sp>
+        <p:nvSpPr>
+          <p:cNvPr id="3" name="TextBox 2"/>
+          <p:cNvSpPr txBox="1"/>
+          <p:nvPr/>
+        </p:nvSpPr>
+        <p:spPr>
+          <a:xfrm>
+            <a:off x="731520" y="1463040"/>
+            <a:ext cx="10789920" cy="1215717"/>
+          </a:xfrm>
+          <a:prstGeom prst="rect">
+            <a:avLst/>
+          </a:prstGeom>
+          <a:noFill/>
+        </p:spPr>
+        <p:txBody>
+          <a:bodyPr wrap="square">
+            <a:spAutoFit/>
+          </a:bodyPr>
+          <a:lstStyle/>
+          <a:p>
+            <a:pPr>
+              <a:spcAft>
+                <a:spcPts val="1200"/>
+              </a:spcAft>
+              <a:defRPr sz="2100"/>
+            </a:pPr>
+            <a:r>
+              <a:rPr dirty="0"/>
+              <a:t>Thank you for considering participation in the GoodGrain Home Baking Evaluation.</a:t>
+            </a:r>
+          </a:p>
+          <a:p>
+            <a:pPr>
+              <a:spcAft>
+                <a:spcPts val="1200"/>
+              </a:spcAft>
+              <a:defRPr sz="2100"/>
+            </a:pPr>
+            <a:r>
+              <a:rPr dirty="0"/>
+              <a:t>Your baking experience will help us understand how this perennial rye performs in home kitchens and how people feel about eating a perennial grain.</a:t>
+            </a:r>
+          </a:p>
+        </p:txBody>
+      </p:sp>
+      <p:sp>
+        <p:nvSpPr>
+          <p:cNvPr id="4" name="TextBox 3"/>
+          <p:cNvSpPr txBox="1"/>
+          <p:nvPr/>
+        </p:nvSpPr>
+        <p:spPr>
+          <a:xfrm>
+            <a:off x="594360" y="6473952"/>
+            <a:ext cx="10972800" cy="228600"/>
+          </a:xfrm>
+          <a:prstGeom prst="rect">
+            <a:avLst/>
+          </a:prstGeom>
+          <a:noFill/>
+        </p:spPr>
+        <p:txBody>
+          <a:bodyPr wrap="none">
+            <a:spAutoFit/>
+          </a:bodyPr>
+          <a:lstStyle/>
+          <a:p>
+            <a:pPr>
+              <a:defRPr sz="900"/>
+            </a:pPr>
+            <a:r>
+              <a:t>GoodGrain Home Baking Evaluation</a:t>
+            </a:r>
+          </a:p>
+        </p:txBody>
+      </p:sp>
+    </p:spTree>
+  </p:cSld>
+  <p:clrMapOvr>
+    <a:masterClrMapping/>
+  </p:clrMapOvr>
+</p:sld>
+</file>
+
+<file path=ppt/slides/slide29.xml><?xml version="1.0" encoding="utf-8"?>
 <p:sld xmlns:a="http://schemas.openxmlformats.org/drawingml/2006/main" xmlns:r="http://schemas.openxmlformats.org/officeDocument/2006/relationships" xmlns:p="http://schemas.openxmlformats.org/presentationml/2006/main">
   <p:cSld>
     <p:spTree>
@@ -6217,6 +6749,312 @@
 </p:sld>
 </file>
 
+<file path=ppt/slides/slide30.xml><?xml version="1.0" encoding="utf-8"?>
+<p:sld xmlns:a="http://schemas.openxmlformats.org/drawingml/2006/main" xmlns:r="http://schemas.openxmlformats.org/officeDocument/2006/relationships" xmlns:p="http://schemas.openxmlformats.org/presentationml/2006/main">
+  <p:cSld>
+    <p:spTree>
+      <p:nvGrpSpPr>
+        <p:cNvPr id="1" name=""/>
+        <p:cNvGrpSpPr/>
+        <p:nvPr/>
+      </p:nvGrpSpPr>
+      <p:grpSpPr>
+        <a:xfrm>
+          <a:off x="0" y="0"/>
+          <a:ext cx="0" cy="0"/>
+          <a:chOff x="0" y="0"/>
+          <a:chExt cx="0" cy="0"/>
+        </a:xfrm>
+      </p:grpSpPr>
+      <p:sp>
+        <p:nvSpPr>
+          <p:cNvPr id="2" name="TextBox 1"/>
+          <p:cNvSpPr txBox="1"/>
+          <p:nvPr/>
+        </p:nvSpPr>
+        <p:spPr>
+          <a:xfrm>
+            <a:off x="594360" y="320040"/>
+            <a:ext cx="10972800" cy="731520"/>
+          </a:xfrm>
+          <a:prstGeom prst="rect">
+            <a:avLst/>
+          </a:prstGeom>
+          <a:noFill/>
+        </p:spPr>
+        <p:txBody>
+          <a:bodyPr wrap="none">
+            <a:spAutoFit/>
+          </a:bodyPr>
+          <a:lstStyle/>
+          <a:p>
+            <a:pPr>
+              <a:defRPr sz="3000" b="1"/>
+            </a:pPr>
+            <a:r>
+              <a:t>Funding and project partners</a:t>
+            </a:r>
+          </a:p>
+        </p:txBody>
+      </p:sp>
+      <p:sp>
+        <p:nvSpPr>
+          <p:cNvPr id="3" name="TextBox 2"/>
+          <p:cNvSpPr txBox="1"/>
+          <p:nvPr/>
+        </p:nvSpPr>
+        <p:spPr>
+          <a:xfrm>
+            <a:off x="731520" y="1234440"/>
+            <a:ext cx="10789920" cy="2169825"/>
+          </a:xfrm>
+          <a:prstGeom prst="rect">
+            <a:avLst/>
+          </a:prstGeom>
+          <a:noFill/>
+        </p:spPr>
+        <p:txBody>
+          <a:bodyPr wrap="square">
+            <a:spAutoFit/>
+          </a:bodyPr>
+          <a:lstStyle/>
+          <a:p>
+            <a:pPr>
+              <a:spcAft>
+                <a:spcPts val="1200"/>
+              </a:spcAft>
+              <a:defRPr sz="1900"/>
+            </a:pPr>
+            <a:r>
+              <a:rPr dirty="0"/>
+              <a:t>This citizen science project is part of an NNF Plant2Food research project (Grant #NNF22SA0081019).</a:t>
+            </a:r>
+          </a:p>
+          <a:p>
+            <a:pPr marL="342900" indent="-342900">
+              <a:spcAft>
+                <a:spcPts val="1200"/>
+              </a:spcAft>
+              <a:buFont typeface="Arial" panose="020B0604020202020204" pitchFamily="34" charset="0"/>
+              <a:buChar char="•"/>
+              <a:defRPr sz="1900"/>
+            </a:pPr>
+            <a:r>
+              <a:rPr dirty="0"/>
+              <a:t>Aarhus University: Department of Agroecology and Department of Food Science</a:t>
+            </a:r>
+          </a:p>
+          <a:p>
+            <a:pPr marL="342900" indent="-342900">
+              <a:spcAft>
+                <a:spcPts val="1200"/>
+              </a:spcAft>
+              <a:buFont typeface="Arial" panose="020B0604020202020204" pitchFamily="34" charset="0"/>
+              <a:buChar char="•"/>
+              <a:defRPr sz="1900"/>
+            </a:pPr>
+            <a:r>
+              <a:rPr dirty="0"/>
+              <a:t>Wageningen University and Research, Netherlands</a:t>
+            </a:r>
+          </a:p>
+          <a:p>
+            <a:pPr marL="342900" indent="-342900">
+              <a:spcAft>
+                <a:spcPts val="1200"/>
+              </a:spcAft>
+              <a:buFont typeface="Arial" panose="020B0604020202020204" pitchFamily="34" charset="0"/>
+              <a:buChar char="•"/>
+              <a:defRPr sz="1900"/>
+            </a:pPr>
+            <a:r>
+              <a:rPr dirty="0"/>
+              <a:t>Meyers, a Danish food enterprise</a:t>
+            </a:r>
+          </a:p>
+          <a:p>
+            <a:pPr>
+              <a:spcAft>
+                <a:spcPts val="1200"/>
+              </a:spcAft>
+              <a:defRPr sz="1900"/>
+            </a:pPr>
+            <a:r>
+              <a:rPr dirty="0"/>
+              <a:t>More information: projects.au.dk/plant2food/funded-projects/</a:t>
+            </a:r>
+            <a:r>
+              <a:rPr dirty="0" err="1"/>
+              <a:t>goodgrain</a:t>
+            </a:r>
+            <a:endParaRPr dirty="0"/>
+          </a:p>
+        </p:txBody>
+      </p:sp>
+      <p:sp>
+        <p:nvSpPr>
+          <p:cNvPr id="4" name="TextBox 3"/>
+          <p:cNvSpPr txBox="1"/>
+          <p:nvPr/>
+        </p:nvSpPr>
+        <p:spPr>
+          <a:xfrm>
+            <a:off x="594360" y="6473952"/>
+            <a:ext cx="10972800" cy="228600"/>
+          </a:xfrm>
+          <a:prstGeom prst="rect">
+            <a:avLst/>
+          </a:prstGeom>
+          <a:noFill/>
+        </p:spPr>
+        <p:txBody>
+          <a:bodyPr wrap="none">
+            <a:spAutoFit/>
+          </a:bodyPr>
+          <a:lstStyle/>
+          <a:p>
+            <a:pPr>
+              <a:defRPr sz="900"/>
+            </a:pPr>
+            <a:r>
+              <a:t>GoodGrain Home Baking Evaluation</a:t>
+            </a:r>
+          </a:p>
+        </p:txBody>
+      </p:sp>
+      <p:pic>
+        <p:nvPicPr>
+          <p:cNvPr id="6" name="Picture 5">
+            <a:extLst>
+              <a:ext uri="{FF2B5EF4-FFF2-40B4-BE49-F238E27FC236}">
+                <a16:creationId xmlns:a16="http://schemas.microsoft.com/office/drawing/2014/main" id="{F50E1FB6-3B1A-9CE0-8ADB-A7A625C20210}"/>
+              </a:ext>
+            </a:extLst>
+          </p:cNvPr>
+          <p:cNvPicPr>
+            <a:picLocks noChangeAspect="1"/>
+          </p:cNvPicPr>
+          <p:nvPr/>
+        </p:nvPicPr>
+        <p:blipFill>
+          <a:blip r:embed="rId2"/>
+          <a:stretch>
+            <a:fillRect/>
+          </a:stretch>
+        </p:blipFill>
+        <p:spPr>
+          <a:xfrm>
+            <a:off x="3259640" y="4231977"/>
+            <a:ext cx="3311781" cy="1380555"/>
+          </a:xfrm>
+          <a:prstGeom prst="rect">
+            <a:avLst/>
+          </a:prstGeom>
+        </p:spPr>
+      </p:pic>
+      <p:pic>
+        <p:nvPicPr>
+          <p:cNvPr id="8" name="Picture 7">
+            <a:extLst>
+              <a:ext uri="{FF2B5EF4-FFF2-40B4-BE49-F238E27FC236}">
+                <a16:creationId xmlns:a16="http://schemas.microsoft.com/office/drawing/2014/main" id="{D2B5BF54-6B09-E712-9F0F-EB29AE4F0AFC}"/>
+              </a:ext>
+            </a:extLst>
+          </p:cNvPr>
+          <p:cNvPicPr>
+            <a:picLocks noChangeAspect="1"/>
+          </p:cNvPicPr>
+          <p:nvPr/>
+        </p:nvPicPr>
+        <p:blipFill>
+          <a:blip r:embed="rId3"/>
+          <a:stretch>
+            <a:fillRect/>
+          </a:stretch>
+        </p:blipFill>
+        <p:spPr>
+          <a:xfrm>
+            <a:off x="8249265" y="4598047"/>
+            <a:ext cx="3660699" cy="819997"/>
+          </a:xfrm>
+          <a:prstGeom prst="rect">
+            <a:avLst/>
+          </a:prstGeom>
+        </p:spPr>
+      </p:pic>
+      <p:pic>
+        <p:nvPicPr>
+          <p:cNvPr id="10" name="Picture 9">
+            <a:extLst>
+              <a:ext uri="{FF2B5EF4-FFF2-40B4-BE49-F238E27FC236}">
+                <a16:creationId xmlns:a16="http://schemas.microsoft.com/office/drawing/2014/main" id="{458C58AB-41F2-9A15-E37C-889CC005006F}"/>
+              </a:ext>
+            </a:extLst>
+          </p:cNvPr>
+          <p:cNvPicPr>
+            <a:picLocks noChangeAspect="1"/>
+          </p:cNvPicPr>
+          <p:nvPr/>
+        </p:nvPicPr>
+        <p:blipFill>
+          <a:blip r:embed="rId4"/>
+          <a:stretch>
+            <a:fillRect/>
+          </a:stretch>
+        </p:blipFill>
+        <p:spPr>
+          <a:xfrm>
+            <a:off x="205929" y="3487771"/>
+            <a:ext cx="2868968" cy="2868968"/>
+          </a:xfrm>
+          <a:prstGeom prst="rect">
+            <a:avLst/>
+          </a:prstGeom>
+        </p:spPr>
+      </p:pic>
+      <p:pic>
+        <p:nvPicPr>
+          <p:cNvPr id="12" name="Picture 11">
+            <a:extLst>
+              <a:ext uri="{FF2B5EF4-FFF2-40B4-BE49-F238E27FC236}">
+                <a16:creationId xmlns:a16="http://schemas.microsoft.com/office/drawing/2014/main" id="{99FE654F-B31E-3319-FE9B-453B9E88B92A}"/>
+              </a:ext>
+            </a:extLst>
+          </p:cNvPr>
+          <p:cNvPicPr>
+            <a:picLocks noChangeAspect="1"/>
+          </p:cNvPicPr>
+          <p:nvPr/>
+        </p:nvPicPr>
+        <p:blipFill>
+          <a:blip r:embed="rId5"/>
+          <a:stretch>
+            <a:fillRect/>
+          </a:stretch>
+        </p:blipFill>
+        <p:spPr>
+          <a:xfrm>
+            <a:off x="6756165" y="4418981"/>
+            <a:ext cx="1204579" cy="1204579"/>
+          </a:xfrm>
+          <a:prstGeom prst="rect">
+            <a:avLst/>
+          </a:prstGeom>
+        </p:spPr>
+      </p:pic>
+    </p:spTree>
+    <p:extLst>
+      <p:ext uri="{BB962C8B-B14F-4D97-AF65-F5344CB8AC3E}">
+        <p14:creationId xmlns:p14="http://schemas.microsoft.com/office/powerpoint/2010/main" val="4191476543"/>
+      </p:ext>
+    </p:extLst>
+  </p:cSld>
+  <p:clrMapOvr>
+    <a:masterClrMapping/>
+  </p:clrMapOvr>
+</p:sld>
+</file>
+
 <file path=ppt/slides/slide4.xml><?xml version="1.0" encoding="utf-8"?>
 <p:sld xmlns:a="http://schemas.openxmlformats.org/drawingml/2006/main" xmlns:r="http://schemas.openxmlformats.org/officeDocument/2006/relationships" xmlns:p="http://schemas.openxmlformats.org/presentationml/2006/main">
   <p:cSld>
@@ -6275,7 +7113,7 @@
         <p:spPr>
           <a:xfrm>
             <a:off x="731520" y="1234440"/>
-            <a:ext cx="10789920" cy="1215717"/>
+            <a:ext cx="10789920" cy="892552"/>
           </a:xfrm>
           <a:prstGeom prst="rect">
             <a:avLst/>
@@ -6308,7 +7146,7 @@
             </a:r>
             <a:r>
               <a:rPr dirty="0"/>
-              <a:t> and/or read the Informational Sheet in English or Danish.</a:t>
+              <a:t> or read the Informational Sheet in English or Danish.</a:t>
             </a:r>
           </a:p>
           <a:p>
@@ -6435,7 +7273,7 @@
         <p:spPr>
           <a:xfrm>
             <a:off x="731520" y="1234440"/>
-            <a:ext cx="10789920" cy="2754600"/>
+            <a:ext cx="10789920" cy="4370427"/>
           </a:xfrm>
           <a:prstGeom prst="rect">
             <a:avLst/>
@@ -6558,7 +7396,23 @@
             </a:pPr>
             <a:r>
               <a:rPr dirty="0"/>
-              <a:t>A crop producing two or three grain harvests from one sowing could save farmers work and tractor driving.</a:t>
+              <a:t>A </a:t>
+            </a:r>
+            <a:r>
+              <a:rPr lang="en-US" dirty="0"/>
+              <a:t>perennial grain</a:t>
+            </a:r>
+            <a:r>
+              <a:rPr dirty="0"/>
+              <a:t> producing </a:t>
+            </a:r>
+            <a:r>
+              <a:rPr b="1" dirty="0"/>
+              <a:t>two or three grain harvests from one sowing</a:t>
+            </a:r>
+            <a:r>
+              <a:rPr dirty="0"/>
+              <a:t> could save farmers work and tractor driving.</a:t>
             </a:r>
           </a:p>
           <a:p>
@@ -6570,28 +7424,70 @@
             </a:pPr>
             <a:r>
               <a:rPr lang="en-US" dirty="0"/>
-              <a:t>A crop that r</a:t>
-            </a:r>
-            <a:r>
-              <a:rPr dirty="0"/>
-              <a:t>emain</a:t>
+              <a:t>By remaining in the field for several years, a perennial grain could develop more roots, which could in turn be beneficial for the environment. </a:t>
+            </a:r>
+            <a:r>
+              <a:rPr lang="en-US" b="1" dirty="0"/>
+              <a:t>More roots</a:t>
             </a:r>
             <a:r>
               <a:rPr lang="en-US" dirty="0"/>
-              <a:t>s</a:t>
-            </a:r>
-            <a:r>
-              <a:rPr dirty="0"/>
-              <a:t> in the field and develop</a:t>
-            </a:r>
-            <a:r>
-              <a:rPr lang="en-US" dirty="0"/>
-              <a:t>s</a:t>
-            </a:r>
-            <a:r>
-              <a:rPr dirty="0"/>
-              <a:t> more roots may also create better environmental outcomes.</a:t>
-            </a:r>
+              <a:t> could sequester more carbon, they could feed the soil biology for more of the year, and they could help the crop use nutrients more efficiently, or be more resilient to drought</a:t>
+            </a:r>
+            <a:r>
+              <a:rPr dirty="0"/>
+              <a:t>.</a:t>
+            </a:r>
+            <a:endParaRPr lang="en-US" dirty="0"/>
+          </a:p>
+          <a:p>
+            <a:pPr>
+              <a:spcAft>
+                <a:spcPts val="1200"/>
+              </a:spcAft>
+              <a:defRPr sz="1900"/>
+            </a:pPr>
+            <a:r>
+              <a:rPr lang="da-DK" dirty="0" err="1"/>
+              <a:t>There</a:t>
+            </a:r>
+            <a:r>
+              <a:rPr lang="da-DK" dirty="0"/>
+              <a:t> is </a:t>
+            </a:r>
+            <a:r>
+              <a:rPr lang="da-DK" b="1" dirty="0"/>
+              <a:t>more information</a:t>
+            </a:r>
+            <a:r>
+              <a:rPr lang="da-DK" dirty="0"/>
+              <a:t> </a:t>
+            </a:r>
+            <a:r>
+              <a:rPr lang="da-DK" dirty="0" err="1"/>
+              <a:t>about</a:t>
+            </a:r>
+            <a:r>
+              <a:rPr lang="da-DK" dirty="0"/>
+              <a:t> </a:t>
+            </a:r>
+            <a:r>
+              <a:rPr lang="da-DK" dirty="0" err="1"/>
+              <a:t>this</a:t>
+            </a:r>
+            <a:r>
+              <a:rPr lang="da-DK" dirty="0"/>
+              <a:t> </a:t>
+            </a:r>
+            <a:r>
+              <a:rPr lang="da-DK" dirty="0" err="1"/>
+              <a:t>later</a:t>
+            </a:r>
+            <a:r>
+              <a:rPr lang="da-DK" dirty="0"/>
+              <a:t> in the video. </a:t>
+            </a:r>
+            <a:endParaRPr dirty="0"/>
           </a:p>
           <a:p>
             <a:pPr>
@@ -6732,7 +7628,23 @@
             </a:pPr>
             <a:r>
               <a:rPr dirty="0"/>
-              <a:t>Field testing is evaluating how the new perennial rye grows in Denmark and how it affects the environment compared with annual rye.</a:t>
+              <a:t>Field testing is </a:t>
+            </a:r>
+            <a:r>
+              <a:rPr lang="en-US" dirty="0"/>
+              <a:t>currently </a:t>
+            </a:r>
+            <a:r>
+              <a:rPr dirty="0"/>
+              <a:t>evaluating </a:t>
+            </a:r>
+            <a:r>
+              <a:rPr b="1" dirty="0"/>
+              <a:t>how the new perennial rye grows in Denmark</a:t>
+            </a:r>
+            <a:r>
+              <a:rPr dirty="0"/>
+              <a:t> and how it affects the environment compared with annual rye.</a:t>
             </a:r>
           </a:p>
           <a:p>
@@ -6752,7 +7664,15 @@
             </a:r>
             <a:r>
               <a:rPr dirty="0"/>
-              <a:t>by looking specifically at the new perennial rye's grain characteristics.</a:t>
+              <a:t>by looking specifically at the new </a:t>
+            </a:r>
+            <a:r>
+              <a:rPr b="1" dirty="0"/>
+              <a:t>perennial rye's grain characteristics</a:t>
+            </a:r>
+            <a:r>
+              <a:rPr dirty="0"/>
+              <a:t>.</a:t>
             </a:r>
           </a:p>
           <a:p>
@@ -6764,7 +7684,15 @@
             </a:pPr>
             <a:r>
               <a:rPr dirty="0"/>
-              <a:t>One important characteristic is baking quality.</a:t>
+              <a:t>One important characteristic is </a:t>
+            </a:r>
+            <a:r>
+              <a:rPr b="1" dirty="0"/>
+              <a:t>baking quality</a:t>
+            </a:r>
+            <a:r>
+              <a:rPr dirty="0"/>
+              <a:t>.</a:t>
             </a:r>
             <a:endParaRPr lang="en-US" dirty="0"/>
           </a:p>
@@ -6793,6 +7721,22 @@
             </a:r>
             <a:r>
               <a:rPr lang="da-DK" dirty="0" err="1"/>
+              <a:t>being</a:t>
+            </a:r>
+            <a:r>
+              <a:rPr lang="da-DK" dirty="0"/>
+              <a:t> </a:t>
+            </a:r>
+            <a:r>
+              <a:rPr lang="da-DK" dirty="0" err="1"/>
+              <a:t>studied</a:t>
+            </a:r>
+            <a:r>
+              <a:rPr lang="da-DK" dirty="0"/>
+              <a:t> in GoodGrain </a:t>
+            </a:r>
+            <a:r>
+              <a:rPr lang="da-DK" dirty="0" err="1"/>
               <a:t>include</a:t>
             </a:r>
             <a:r>
@@ -6800,15 +7744,15 @@
               <a:t> the </a:t>
             </a:r>
             <a:r>
-              <a:rPr lang="da-DK" dirty="0" err="1"/>
+              <a:rPr lang="da-DK" b="1" dirty="0" err="1"/>
               <a:t>nutritional</a:t>
             </a:r>
             <a:r>
-              <a:rPr lang="da-DK" dirty="0"/>
+              <a:rPr lang="da-DK" b="1" dirty="0"/>
               <a:t> </a:t>
             </a:r>
             <a:r>
-              <a:rPr lang="da-DK" dirty="0" err="1"/>
+              <a:rPr lang="da-DK" b="1" dirty="0" err="1"/>
               <a:t>quality</a:t>
             </a:r>
             <a:r>
@@ -6833,14 +7777,14 @@
             </a:r>
             <a:r>
               <a:rPr lang="da-DK" dirty="0" err="1"/>
-              <a:t>disease</a:t>
+              <a:t>fungus</a:t>
             </a:r>
             <a:r>
               <a:rPr lang="da-DK" dirty="0"/>
               <a:t>, </a:t>
             </a:r>
             <a:r>
-              <a:rPr lang="da-DK" dirty="0" err="1"/>
+              <a:rPr lang="da-DK" b="1" dirty="0" err="1"/>
               <a:t>ergot</a:t>
             </a:r>
             <a:r>
@@ -6956,7 +7900,7 @@
         <p:spPr>
           <a:xfrm>
             <a:off x="594360" y="320040"/>
-            <a:ext cx="10972800" cy="731520"/>
+            <a:ext cx="4493538" cy="553998"/>
           </a:xfrm>
           <a:prstGeom prst="rect">
             <a:avLst/>
@@ -6973,7 +7917,12 @@
               <a:defRPr sz="3000" b="1"/>
             </a:pPr>
             <a:r>
-              <a:t>What does participating involve?</a:t>
+              <a:rPr lang="en-US" dirty="0"/>
+              <a:t>Why a home baking study</a:t>
+            </a:r>
+            <a:r>
+              <a:rPr dirty="0"/>
+              <a:t>?</a:t>
             </a:r>
           </a:p>
         </p:txBody>
@@ -6987,7 +7936,7 @@
         <p:spPr>
           <a:xfrm>
             <a:off x="731520" y="1234440"/>
-            <a:ext cx="10789920" cy="1785104"/>
+            <a:ext cx="10789920" cy="2877711"/>
           </a:xfrm>
           <a:prstGeom prst="rect">
             <a:avLst/>
@@ -6999,6 +7948,59 @@
             <a:spAutoFit/>
           </a:bodyPr>
           <a:lstStyle/>
+          <a:p>
+            <a:r>
+              <a:rPr lang="en-US" sz="1900" dirty="0"/>
+              <a:t>The main goals of this home baking study are to:</a:t>
+            </a:r>
+          </a:p>
+          <a:p>
+            <a:endParaRPr lang="en-US" sz="1900" dirty="0"/>
+          </a:p>
+          <a:p>
+            <a:pPr marL="342900" lvl="0" indent="-342900">
+              <a:buFont typeface="+mj-lt"/>
+              <a:buAutoNum type="arabicPeriod"/>
+            </a:pPr>
+            <a:r>
+              <a:rPr lang="en-US" sz="1900" dirty="0"/>
+              <a:t>Start to understand the best uses for this perennial rye for home bakers</a:t>
+            </a:r>
+          </a:p>
+          <a:p>
+            <a:pPr marL="342900" lvl="0" indent="-342900">
+              <a:buFont typeface="+mj-lt"/>
+              <a:buAutoNum type="arabicPeriod"/>
+            </a:pPr>
+            <a:endParaRPr lang="en-US" sz="1900" dirty="0"/>
+          </a:p>
+          <a:p>
+            <a:pPr marL="342900" lvl="0" indent="-342900">
+              <a:buFont typeface="+mj-lt"/>
+              <a:buAutoNum type="arabicPeriod"/>
+            </a:pPr>
+            <a:r>
+              <a:rPr lang="en-US" sz="1900" dirty="0"/>
+              <a:t>Guide future research efforts</a:t>
+            </a:r>
+          </a:p>
+          <a:p>
+            <a:pPr marL="342900" lvl="0" indent="-342900">
+              <a:buFont typeface="+mj-lt"/>
+              <a:buAutoNum type="arabicPeriod"/>
+            </a:pPr>
+            <a:endParaRPr lang="en-US" sz="1900" dirty="0"/>
+          </a:p>
+          <a:p>
+            <a:pPr marL="342900" lvl="0" indent="-342900">
+              <a:buFont typeface="+mj-lt"/>
+              <a:buAutoNum type="arabicPeriod"/>
+            </a:pPr>
+            <a:r>
+              <a:rPr lang="en-US" sz="1900" dirty="0"/>
+              <a:t>Understand how people feel about baking with perennial rye</a:t>
+            </a:r>
+          </a:p>
           <a:p>
             <a:pPr>
               <a:spcAft>
@@ -7006,18 +8008,7 @@
               </a:spcAft>
               <a:defRPr sz="2000"/>
             </a:pPr>
-            <a:r>
-              <a:rPr dirty="0"/>
-              <a:t>You will receive </a:t>
-            </a:r>
-            <a:r>
-              <a:rPr lang="en-US" dirty="0"/>
-              <a:t>400 or 800</a:t>
-            </a:r>
-            <a:r>
-              <a:rPr dirty="0"/>
-              <a:t> g of rye flour from the new perennial variety.</a:t>
-            </a:r>
+            <a:endParaRPr lang="en-US" sz="1900" dirty="0"/>
           </a:p>
           <a:p>
             <a:pPr>
@@ -7026,34 +8017,7 @@
               </a:spcAft>
               <a:defRPr sz="2000"/>
             </a:pPr>
-            <a:r>
-              <a:rPr dirty="0"/>
-              <a:t>You will purchase any additional ingredients needed for your baking.</a:t>
-            </a:r>
-          </a:p>
-          <a:p>
-            <a:pPr>
-              <a:spcAft>
-                <a:spcPts val="1200"/>
-              </a:spcAft>
-              <a:defRPr sz="2000"/>
-            </a:pPr>
-            <a:r>
-              <a:rPr dirty="0"/>
-              <a:t>You will take notes during baking and use them to complete a follow-up survey.</a:t>
-            </a:r>
-          </a:p>
-          <a:p>
-            <a:pPr>
-              <a:spcAft>
-                <a:spcPts val="1200"/>
-              </a:spcAft>
-              <a:defRPr sz="2000"/>
-            </a:pPr>
-            <a:r>
-              <a:rPr dirty="0"/>
-              <a:t>After completing the survey, you will receive a small thank-you gift.</a:t>
-            </a:r>
+            <a:endParaRPr sz="1900" dirty="0"/>
           </a:p>
         </p:txBody>
       </p:sp>
@@ -7104,7 +8068,7 @@
         <p:cNvPr id="1" name="">
           <a:extLst>
             <a:ext uri="{FF2B5EF4-FFF2-40B4-BE49-F238E27FC236}">
-              <a16:creationId xmlns:a16="http://schemas.microsoft.com/office/drawing/2014/main" id="{A4545A0E-532B-187A-82E8-E144501C82CE}"/>
+              <a16:creationId xmlns:a16="http://schemas.microsoft.com/office/drawing/2014/main" id="{FF64BB6B-5CF1-1D9C-27C0-2F7693EDA21F}"/>
             </a:ext>
           </a:extLst>
         </p:cNvPr>
@@ -7124,7 +8088,7 @@
           <p:cNvPr id="2" name="TextBox 1">
             <a:extLst>
               <a:ext uri="{FF2B5EF4-FFF2-40B4-BE49-F238E27FC236}">
-                <a16:creationId xmlns:a16="http://schemas.microsoft.com/office/drawing/2014/main" id="{2A351185-1806-3660-B8F0-4FCD1D546330}"/>
+                <a16:creationId xmlns:a16="http://schemas.microsoft.com/office/drawing/2014/main" id="{BF688891-DBD5-85FC-07AC-C3C5C7014CF2}"/>
               </a:ext>
             </a:extLst>
           </p:cNvPr>
@@ -7134,7 +8098,7 @@
         <p:spPr>
           <a:xfrm>
             <a:off x="594360" y="320040"/>
-            <a:ext cx="2716513" cy="553998"/>
+            <a:ext cx="10791993" cy="553998"/>
           </a:xfrm>
           <a:prstGeom prst="rect">
             <a:avLst/>
@@ -7151,19 +8115,26 @@
               <a:defRPr sz="3000" b="1"/>
             </a:pPr>
             <a:r>
+              <a:rPr dirty="0"/>
+              <a:t>What </a:t>
+            </a:r>
+            <a:r>
               <a:rPr lang="en-US" dirty="0"/>
-              <a:t>Optional events</a:t>
-            </a:r>
-            <a:endParaRPr dirty="0"/>
-          </a:p>
-        </p:txBody>
-      </p:sp>
-      <p:sp>
-        <p:nvSpPr>
-          <p:cNvPr id="3" name="TextBox 2">
+              <a:t>is expected of me as a participant in the home baking study</a:t>
+            </a:r>
+            <a:r>
+              <a:rPr dirty="0"/>
+              <a:t>?</a:t>
+            </a:r>
+          </a:p>
+        </p:txBody>
+      </p:sp>
+      <p:sp>
+        <p:nvSpPr>
+          <p:cNvPr id="4" name="TextBox 3">
             <a:extLst>
               <a:ext uri="{FF2B5EF4-FFF2-40B4-BE49-F238E27FC236}">
-                <a16:creationId xmlns:a16="http://schemas.microsoft.com/office/drawing/2014/main" id="{3CCAA353-A4ED-5BF4-C061-B20B0CC9AB5F}"/>
+                <a16:creationId xmlns:a16="http://schemas.microsoft.com/office/drawing/2014/main" id="{6809C9D2-B087-5471-0923-BF0BAEE58280}"/>
               </a:ext>
             </a:extLst>
           </p:cNvPr>
@@ -7172,8 +8143,8 @@
         </p:nvSpPr>
         <p:spPr>
           <a:xfrm>
-            <a:off x="731520" y="1234440"/>
-            <a:ext cx="10789920" cy="2169825"/>
+            <a:off x="594360" y="6473952"/>
+            <a:ext cx="10972800" cy="228600"/>
           </a:xfrm>
           <a:prstGeom prst="rect">
             <a:avLst/>
@@ -7181,113 +8152,54 @@
           <a:noFill/>
         </p:spPr>
         <p:txBody>
-          <a:bodyPr wrap="square">
+          <a:bodyPr wrap="none">
             <a:spAutoFit/>
           </a:bodyPr>
           <a:lstStyle/>
           <a:p>
             <a:pPr>
-              <a:spcAft>
-                <a:spcPts val="1200"/>
-              </a:spcAft>
-              <a:defRPr sz="2100"/>
-            </a:pPr>
-            <a:r>
-              <a:rPr lang="en-US" dirty="0"/>
-              <a:t>Summer 2027: Public event where you can see perennial rye growing in the field</a:t>
-            </a:r>
-          </a:p>
-          <a:p>
-            <a:pPr>
-              <a:spcAft>
-                <a:spcPts val="1200"/>
-              </a:spcAft>
-              <a:defRPr sz="2100"/>
-            </a:pPr>
-            <a:r>
-              <a:rPr lang="en-US"/>
-              <a:t>Fall 2027: A </a:t>
-            </a:r>
-            <a:r>
-              <a:rPr lang="en-US" dirty="0"/>
-              <a:t>public symposium to share information about perennial rye</a:t>
-            </a:r>
-          </a:p>
-          <a:p>
-            <a:pPr>
-              <a:spcAft>
-                <a:spcPts val="1200"/>
-              </a:spcAft>
-              <a:defRPr sz="2100"/>
-            </a:pPr>
-            <a:r>
-              <a:rPr lang="en-US" dirty="0"/>
-              <a:t>Both are free and open to the public!</a:t>
-            </a:r>
-          </a:p>
-          <a:p>
-            <a:pPr>
-              <a:spcAft>
-                <a:spcPts val="1200"/>
-              </a:spcAft>
-              <a:defRPr sz="2100"/>
-            </a:pPr>
-            <a:r>
-              <a:rPr dirty="0"/>
-              <a:t>Attendance at the GoodGrain field event and symposium is </a:t>
-            </a:r>
-            <a:r>
-              <a:rPr b="1" i="1" dirty="0"/>
-              <a:t>optional</a:t>
-            </a:r>
-            <a:r>
-              <a:rPr dirty="0"/>
-              <a:t> and is not required for participation in the Home Baking Evaluation.</a:t>
-            </a:r>
-          </a:p>
-        </p:txBody>
-      </p:sp>
-      <p:sp>
-        <p:nvSpPr>
-          <p:cNvPr id="4" name="TextBox 3">
+              <a:defRPr sz="900"/>
+            </a:pPr>
+            <a:r>
+              <a:t>GoodGrain Home Baking Evaluation</a:t>
+            </a:r>
+          </a:p>
+        </p:txBody>
+      </p:sp>
+      <p:pic>
+        <p:nvPicPr>
+          <p:cNvPr id="6" name="Picture 5">
             <a:extLst>
               <a:ext uri="{FF2B5EF4-FFF2-40B4-BE49-F238E27FC236}">
-                <a16:creationId xmlns:a16="http://schemas.microsoft.com/office/drawing/2014/main" id="{E6CE7918-B1E7-58A8-C3B5-AE044EC2C291}"/>
+                <a16:creationId xmlns:a16="http://schemas.microsoft.com/office/drawing/2014/main" id="{5940526E-2098-C0A3-C820-A272CED29FBA}"/>
               </a:ext>
             </a:extLst>
           </p:cNvPr>
-          <p:cNvSpPr txBox="1"/>
+          <p:cNvPicPr>
+            <a:picLocks noChangeAspect="1"/>
+          </p:cNvPicPr>
           <p:nvPr/>
-        </p:nvSpPr>
-        <p:spPr>
-          <a:xfrm>
-            <a:off x="594360" y="6473952"/>
-            <a:ext cx="10972800" cy="228600"/>
-          </a:xfrm>
-          <a:prstGeom prst="rect">
-            <a:avLst/>
-          </a:prstGeom>
-          <a:noFill/>
-        </p:spPr>
-        <p:txBody>
-          <a:bodyPr wrap="none">
-            <a:spAutoFit/>
-          </a:bodyPr>
-          <a:lstStyle/>
-          <a:p>
-            <a:pPr>
-              <a:defRPr sz="900"/>
-            </a:pPr>
-            <a:r>
-              <a:t>GoodGrain Home Baking Evaluation</a:t>
-            </a:r>
-          </a:p>
-        </p:txBody>
-      </p:sp>
+        </p:nvPicPr>
+        <p:blipFill>
+          <a:blip r:embed="rId2"/>
+          <a:stretch>
+            <a:fillRect/>
+          </a:stretch>
+        </p:blipFill>
+        <p:spPr>
+          <a:xfrm>
+            <a:off x="2004552" y="1092609"/>
+            <a:ext cx="7690055" cy="5126704"/>
+          </a:xfrm>
+          <a:prstGeom prst="rect">
+            <a:avLst/>
+          </a:prstGeom>
+        </p:spPr>
+      </p:pic>
     </p:spTree>
     <p:extLst>
       <p:ext uri="{BB962C8B-B14F-4D97-AF65-F5344CB8AC3E}">
-        <p14:creationId xmlns:p14="http://schemas.microsoft.com/office/powerpoint/2010/main" val="183905824"/>
+        <p14:creationId xmlns:p14="http://schemas.microsoft.com/office/powerpoint/2010/main" val="2868181123"/>
       </p:ext>
     </p:extLst>
   </p:cSld>
@@ -7302,7 +8214,13 @@
   <p:cSld>
     <p:spTree>
       <p:nvGrpSpPr>
-        <p:cNvPr id="1" name=""/>
+        <p:cNvPr id="1" name="">
+          <a:extLst>
+            <a:ext uri="{FF2B5EF4-FFF2-40B4-BE49-F238E27FC236}">
+              <a16:creationId xmlns:a16="http://schemas.microsoft.com/office/drawing/2014/main" id="{10EDA68E-21F5-50A8-EAF5-3553EEBF19F4}"/>
+            </a:ext>
+          </a:extLst>
+        </p:cNvPr>
         <p:cNvGrpSpPr/>
         <p:nvPr/>
       </p:nvGrpSpPr>
@@ -7316,14 +8234,20 @@
       </p:grpSpPr>
       <p:sp>
         <p:nvSpPr>
-          <p:cNvPr id="2" name="TextBox 1"/>
+          <p:cNvPr id="2" name="TextBox 1">
+            <a:extLst>
+              <a:ext uri="{FF2B5EF4-FFF2-40B4-BE49-F238E27FC236}">
+                <a16:creationId xmlns:a16="http://schemas.microsoft.com/office/drawing/2014/main" id="{0C827641-8B08-C999-6DB8-0A4278A7AEB4}"/>
+              </a:ext>
+            </a:extLst>
+          </p:cNvPr>
           <p:cNvSpPr txBox="1"/>
           <p:nvPr/>
         </p:nvSpPr>
         <p:spPr>
           <a:xfrm>
             <a:off x="594360" y="320040"/>
-            <a:ext cx="10972800" cy="731520"/>
+            <a:ext cx="10791993" cy="553998"/>
           </a:xfrm>
           <a:prstGeom prst="rect">
             <a:avLst/>
@@ -7340,21 +8264,36 @@
               <a:defRPr sz="3000" b="1"/>
             </a:pPr>
             <a:r>
-              <a:t>Funding and project partners</a:t>
-            </a:r>
-          </a:p>
-        </p:txBody>
-      </p:sp>
-      <p:sp>
-        <p:nvSpPr>
-          <p:cNvPr id="3" name="TextBox 2"/>
+              <a:rPr dirty="0"/>
+              <a:t>What </a:t>
+            </a:r>
+            <a:r>
+              <a:rPr lang="en-US" dirty="0"/>
+              <a:t>is expected of me as a participant in the home baking study</a:t>
+            </a:r>
+            <a:r>
+              <a:rPr dirty="0"/>
+              <a:t>?</a:t>
+            </a:r>
+          </a:p>
+        </p:txBody>
+      </p:sp>
+      <p:sp>
+        <p:nvSpPr>
+          <p:cNvPr id="3" name="TextBox 2">
+            <a:extLst>
+              <a:ext uri="{FF2B5EF4-FFF2-40B4-BE49-F238E27FC236}">
+                <a16:creationId xmlns:a16="http://schemas.microsoft.com/office/drawing/2014/main" id="{684ABABB-72F9-4F40-707B-2816FFBAE4C2}"/>
+              </a:ext>
+            </a:extLst>
+          </p:cNvPr>
           <p:cNvSpPr txBox="1"/>
           <p:nvPr/>
         </p:nvSpPr>
         <p:spPr>
           <a:xfrm>
             <a:off x="731520" y="1234440"/>
-            <a:ext cx="10789920" cy="2169825"/>
+            <a:ext cx="4391086" cy="5170646"/>
           </a:xfrm>
           <a:prstGeom prst="rect">
             <a:avLst/>
@@ -7371,53 +8310,217 @@
               <a:spcAft>
                 <a:spcPts val="1200"/>
               </a:spcAft>
-              <a:defRPr sz="1900"/>
-            </a:pPr>
-            <a:r>
-              <a:rPr dirty="0"/>
-              <a:t>This citizen science project is part of an NNF Plant2Food research project (Grant #NNF22SA0081019).</a:t>
-            </a:r>
-          </a:p>
-          <a:p>
-            <a:pPr marL="342900" indent="-342900">
+              <a:defRPr sz="2000"/>
+            </a:pPr>
+            <a:r>
+              <a:rPr dirty="0"/>
+              <a:t>You will receive </a:t>
+            </a:r>
+            <a:r>
+              <a:rPr lang="en-US" b="1" dirty="0"/>
+              <a:t>400 or 800</a:t>
+            </a:r>
+            <a:r>
+              <a:rPr b="1" dirty="0"/>
+              <a:t> g</a:t>
+            </a:r>
+            <a:r>
+              <a:rPr lang="en-US" b="1" dirty="0"/>
+              <a:t>rams</a:t>
+            </a:r>
+            <a:r>
+              <a:rPr b="1" dirty="0"/>
+              <a:t> of </a:t>
+            </a:r>
+            <a:r>
+              <a:rPr lang="en-US" b="1" dirty="0"/>
+              <a:t>perennial </a:t>
+            </a:r>
+            <a:r>
+              <a:rPr b="1" dirty="0"/>
+              <a:t>rye flour</a:t>
+            </a:r>
+            <a:r>
+              <a:rPr dirty="0"/>
+              <a:t> </a:t>
+            </a:r>
+            <a:r>
+              <a:rPr lang="en-US" dirty="0"/>
+              <a:t>(depending on your baking needs)</a:t>
+            </a:r>
+            <a:r>
+              <a:rPr dirty="0"/>
+              <a:t>.</a:t>
+            </a:r>
+          </a:p>
+          <a:p>
+            <a:pPr>
               <a:spcAft>
                 <a:spcPts val="1200"/>
               </a:spcAft>
-              <a:buFont typeface="Arial" panose="020B0604020202020204" pitchFamily="34" charset="0"/>
-              <a:buChar char="•"/>
-              <a:defRPr sz="1900"/>
-            </a:pPr>
-            <a:r>
-              <a:rPr dirty="0"/>
-              <a:t>Aarhus University: Department of Agroecology and Department of Food Science</a:t>
-            </a:r>
-          </a:p>
-          <a:p>
-            <a:pPr marL="342900" indent="-342900">
+              <a:defRPr sz="2000"/>
+            </a:pPr>
+            <a:r>
+              <a:rPr dirty="0"/>
+              <a:t>You will</a:t>
+            </a:r>
+            <a:r>
+              <a:rPr lang="en-US" dirty="0"/>
+              <a:t> need to</a:t>
+            </a:r>
+            <a:r>
+              <a:rPr dirty="0"/>
+              <a:t> </a:t>
+            </a:r>
+            <a:r>
+              <a:rPr b="1" dirty="0"/>
+              <a:t>purchase any additional ingredients</a:t>
+            </a:r>
+            <a:r>
+              <a:rPr dirty="0"/>
+              <a:t> needed for your baking.</a:t>
+            </a:r>
+            <a:endParaRPr lang="en-US" dirty="0"/>
+          </a:p>
+          <a:p>
+            <a:pPr>
               <a:spcAft>
                 <a:spcPts val="1200"/>
               </a:spcAft>
-              <a:buFont typeface="Arial" panose="020B0604020202020204" pitchFamily="34" charset="0"/>
-              <a:buChar char="•"/>
-              <a:defRPr sz="1900"/>
-            </a:pPr>
-            <a:r>
-              <a:rPr dirty="0"/>
-              <a:t>Wageningen University and Research, Netherlands</a:t>
-            </a:r>
-          </a:p>
-          <a:p>
-            <a:pPr marL="342900" indent="-342900">
+              <a:defRPr sz="2000"/>
+            </a:pPr>
+            <a:r>
+              <a:rPr lang="da-DK" dirty="0" err="1"/>
+              <a:t>You</a:t>
+            </a:r>
+            <a:r>
+              <a:rPr lang="da-DK" dirty="0"/>
+              <a:t> </a:t>
+            </a:r>
+            <a:r>
+              <a:rPr lang="da-DK" dirty="0" err="1"/>
+              <a:t>will</a:t>
+            </a:r>
+            <a:r>
+              <a:rPr lang="da-DK" dirty="0"/>
+              <a:t> </a:t>
+            </a:r>
+            <a:r>
+              <a:rPr lang="da-DK" b="1" dirty="0" err="1"/>
+              <a:t>bake</a:t>
+            </a:r>
+            <a:r>
+              <a:rPr lang="da-DK" b="1" dirty="0"/>
+              <a:t> </a:t>
+            </a:r>
+            <a:r>
+              <a:rPr lang="da-DK" b="1" dirty="0" err="1"/>
+              <a:t>two</a:t>
+            </a:r>
+            <a:r>
+              <a:rPr lang="da-DK" b="1" dirty="0"/>
+              <a:t> items</a:t>
+            </a:r>
+            <a:r>
+              <a:rPr lang="da-DK" dirty="0"/>
+              <a:t>, </a:t>
+            </a:r>
+            <a:r>
+              <a:rPr lang="da-DK" dirty="0" err="1"/>
+              <a:t>one</a:t>
+            </a:r>
+            <a:r>
+              <a:rPr lang="da-DK" dirty="0"/>
+              <a:t> </a:t>
+            </a:r>
+            <a:r>
+              <a:rPr lang="da-DK" dirty="0" err="1"/>
+              <a:t>using</a:t>
+            </a:r>
+            <a:r>
+              <a:rPr lang="da-DK" dirty="0"/>
+              <a:t> the </a:t>
+            </a:r>
+            <a:r>
+              <a:rPr lang="da-DK" dirty="0" err="1"/>
+              <a:t>perennial</a:t>
+            </a:r>
+            <a:r>
+              <a:rPr lang="da-DK" dirty="0"/>
+              <a:t> </a:t>
+            </a:r>
+            <a:r>
+              <a:rPr lang="da-DK" dirty="0" err="1"/>
+              <a:t>rye</a:t>
+            </a:r>
+            <a:r>
+              <a:rPr lang="da-DK" dirty="0"/>
+              <a:t> </a:t>
+            </a:r>
+            <a:r>
+              <a:rPr lang="da-DK" dirty="0" err="1"/>
+              <a:t>flour</a:t>
+            </a:r>
+            <a:r>
+              <a:rPr lang="da-DK" dirty="0"/>
+              <a:t>, </a:t>
+            </a:r>
+            <a:r>
+              <a:rPr lang="da-DK" dirty="0" err="1"/>
+              <a:t>one</a:t>
+            </a:r>
+            <a:r>
+              <a:rPr lang="da-DK" dirty="0"/>
+              <a:t> </a:t>
+            </a:r>
+            <a:r>
+              <a:rPr lang="da-DK" dirty="0" err="1"/>
+              <a:t>using</a:t>
+            </a:r>
+            <a:r>
+              <a:rPr lang="da-DK" dirty="0"/>
+              <a:t> </a:t>
+            </a:r>
+            <a:r>
+              <a:rPr lang="da-DK" dirty="0" err="1"/>
+              <a:t>your</a:t>
+            </a:r>
+            <a:r>
+              <a:rPr lang="da-DK" dirty="0"/>
+              <a:t> normal </a:t>
+            </a:r>
+            <a:r>
+              <a:rPr lang="da-DK" dirty="0" err="1"/>
+              <a:t>flour</a:t>
+            </a:r>
+            <a:r>
+              <a:rPr lang="da-DK" dirty="0"/>
+              <a:t>.</a:t>
+            </a:r>
+            <a:endParaRPr dirty="0"/>
+          </a:p>
+          <a:p>
+            <a:pPr>
               <a:spcAft>
                 <a:spcPts val="1200"/>
               </a:spcAft>
-              <a:buFont typeface="Arial" panose="020B0604020202020204" pitchFamily="34" charset="0"/>
-              <a:buChar char="•"/>
-              <a:defRPr sz="1900"/>
-            </a:pPr>
-            <a:r>
-              <a:rPr dirty="0"/>
-              <a:t>Meyers, a Danish food enterprise</a:t>
+              <a:defRPr sz="2000"/>
+            </a:pPr>
+            <a:r>
+              <a:rPr dirty="0"/>
+              <a:t>You will </a:t>
+            </a:r>
+            <a:r>
+              <a:rPr b="1" dirty="0"/>
+              <a:t>take notes</a:t>
+            </a:r>
+            <a:r>
+              <a:rPr dirty="0"/>
+              <a:t> during baking</a:t>
+            </a:r>
+            <a:r>
+              <a:rPr lang="en-US" dirty="0"/>
+              <a:t>. </a:t>
             </a:r>
           </a:p>
           <a:p>
@@ -7425,23 +8528,84 @@
               <a:spcAft>
                 <a:spcPts val="1200"/>
               </a:spcAft>
-              <a:defRPr sz="1900"/>
-            </a:pPr>
-            <a:r>
-              <a:rPr dirty="0"/>
-              <a:t>More information: projects.au.dk/plant2food/funded-projects/</a:t>
-            </a:r>
-            <a:r>
-              <a:rPr dirty="0" err="1"/>
-              <a:t>goodgrain</a:t>
-            </a:r>
-            <a:endParaRPr dirty="0"/>
-          </a:p>
-        </p:txBody>
-      </p:sp>
-      <p:sp>
-        <p:nvSpPr>
-          <p:cNvPr id="4" name="TextBox 3"/>
+              <a:defRPr sz="2000"/>
+            </a:pPr>
+            <a:r>
+              <a:rPr lang="en-US" dirty="0"/>
+              <a:t>C</a:t>
+            </a:r>
+            <a:r>
+              <a:rPr dirty="0"/>
+              <a:t>omplete a </a:t>
+            </a:r>
+            <a:r>
+              <a:rPr lang="en-US" b="1" dirty="0"/>
+              <a:t>post-baking</a:t>
+            </a:r>
+            <a:r>
+              <a:rPr b="1" dirty="0"/>
+              <a:t> survey</a:t>
+            </a:r>
+            <a:r>
+              <a:rPr lang="en-US" b="1" dirty="0"/>
+              <a:t> </a:t>
+            </a:r>
+            <a:r>
+              <a:rPr lang="en-US" dirty="0"/>
+              <a:t>(which we estimate will take 15-30 minutes)</a:t>
+            </a:r>
+            <a:r>
+              <a:rPr dirty="0"/>
+              <a:t>.</a:t>
+            </a:r>
+          </a:p>
+          <a:p>
+            <a:pPr>
+              <a:spcAft>
+                <a:spcPts val="1200"/>
+              </a:spcAft>
+              <a:defRPr sz="2000"/>
+            </a:pPr>
+            <a:r>
+              <a:rPr dirty="0"/>
+              <a:t>After </a:t>
+            </a:r>
+            <a:r>
+              <a:rPr lang="en-US" dirty="0"/>
+              <a:t>submitting</a:t>
+            </a:r>
+            <a:r>
+              <a:rPr dirty="0"/>
+              <a:t> the </a:t>
+            </a:r>
+            <a:r>
+              <a:rPr lang="en-US" dirty="0"/>
+              <a:t>post-baking </a:t>
+            </a:r>
+            <a:r>
+              <a:rPr dirty="0"/>
+              <a:t>survey, you will </a:t>
+            </a:r>
+            <a:r>
+              <a:rPr b="1" dirty="0"/>
+              <a:t>receive a small thank-you gift</a:t>
+            </a:r>
+            <a:r>
+              <a:rPr dirty="0"/>
+              <a:t>.</a:t>
+            </a:r>
+          </a:p>
+        </p:txBody>
+      </p:sp>
+      <p:sp>
+        <p:nvSpPr>
+          <p:cNvPr id="4" name="TextBox 3">
+            <a:extLst>
+              <a:ext uri="{FF2B5EF4-FFF2-40B4-BE49-F238E27FC236}">
+                <a16:creationId xmlns:a16="http://schemas.microsoft.com/office/drawing/2014/main" id="{96628931-4B01-F48A-88D2-1BC40C2A2659}"/>
+              </a:ext>
+            </a:extLst>
+          </p:cNvPr>
           <p:cNvSpPr txBox="1"/>
           <p:nvPr/>
         </p:nvSpPr>
@@ -7475,7 +8639,7 @@
           <p:cNvPr id="6" name="Picture 5">
             <a:extLst>
               <a:ext uri="{FF2B5EF4-FFF2-40B4-BE49-F238E27FC236}">
-                <a16:creationId xmlns:a16="http://schemas.microsoft.com/office/drawing/2014/main" id="{F50E1FB6-3B1A-9CE0-8ADB-A7A625C20210}"/>
+                <a16:creationId xmlns:a16="http://schemas.microsoft.com/office/drawing/2014/main" id="{D5ACD45F-7D55-1929-2A84-420835314734}"/>
               </a:ext>
             </a:extLst>
           </p:cNvPr>
@@ -7492,98 +8656,8 @@
         </p:blipFill>
         <p:spPr>
           <a:xfrm>
-            <a:off x="3259640" y="4231977"/>
-            <a:ext cx="3311781" cy="1380555"/>
-          </a:xfrm>
-          <a:prstGeom prst="rect">
-            <a:avLst/>
-          </a:prstGeom>
-        </p:spPr>
-      </p:pic>
-      <p:pic>
-        <p:nvPicPr>
-          <p:cNvPr id="8" name="Picture 7">
-            <a:extLst>
-              <a:ext uri="{FF2B5EF4-FFF2-40B4-BE49-F238E27FC236}">
-                <a16:creationId xmlns:a16="http://schemas.microsoft.com/office/drawing/2014/main" id="{D2B5BF54-6B09-E712-9F0F-EB29AE4F0AFC}"/>
-              </a:ext>
-            </a:extLst>
-          </p:cNvPr>
-          <p:cNvPicPr>
-            <a:picLocks noChangeAspect="1"/>
-          </p:cNvPicPr>
-          <p:nvPr/>
-        </p:nvPicPr>
-        <p:blipFill>
-          <a:blip r:embed="rId3"/>
-          <a:stretch>
-            <a:fillRect/>
-          </a:stretch>
-        </p:blipFill>
-        <p:spPr>
-          <a:xfrm>
-            <a:off x="8249265" y="4598047"/>
-            <a:ext cx="3660699" cy="819997"/>
-          </a:xfrm>
-          <a:prstGeom prst="rect">
-            <a:avLst/>
-          </a:prstGeom>
-        </p:spPr>
-      </p:pic>
-      <p:pic>
-        <p:nvPicPr>
-          <p:cNvPr id="10" name="Picture 9">
-            <a:extLst>
-              <a:ext uri="{FF2B5EF4-FFF2-40B4-BE49-F238E27FC236}">
-                <a16:creationId xmlns:a16="http://schemas.microsoft.com/office/drawing/2014/main" id="{458C58AB-41F2-9A15-E37C-889CC005006F}"/>
-              </a:ext>
-            </a:extLst>
-          </p:cNvPr>
-          <p:cNvPicPr>
-            <a:picLocks noChangeAspect="1"/>
-          </p:cNvPicPr>
-          <p:nvPr/>
-        </p:nvPicPr>
-        <p:blipFill>
-          <a:blip r:embed="rId4"/>
-          <a:stretch>
-            <a:fillRect/>
-          </a:stretch>
-        </p:blipFill>
-        <p:spPr>
-          <a:xfrm>
-            <a:off x="205929" y="3487771"/>
-            <a:ext cx="2868968" cy="2868968"/>
-          </a:xfrm>
-          <a:prstGeom prst="rect">
-            <a:avLst/>
-          </a:prstGeom>
-        </p:spPr>
-      </p:pic>
-      <p:pic>
-        <p:nvPicPr>
-          <p:cNvPr id="12" name="Picture 11">
-            <a:extLst>
-              <a:ext uri="{FF2B5EF4-FFF2-40B4-BE49-F238E27FC236}">
-                <a16:creationId xmlns:a16="http://schemas.microsoft.com/office/drawing/2014/main" id="{99FE654F-B31E-3319-FE9B-453B9E88B92A}"/>
-              </a:ext>
-            </a:extLst>
-          </p:cNvPr>
-          <p:cNvPicPr>
-            <a:picLocks noChangeAspect="1"/>
-          </p:cNvPicPr>
-          <p:nvPr/>
-        </p:nvPicPr>
-        <p:blipFill>
-          <a:blip r:embed="rId5"/>
-          <a:stretch>
-            <a:fillRect/>
-          </a:stretch>
-        </p:blipFill>
-        <p:spPr>
-          <a:xfrm>
-            <a:off x="6756165" y="4418981"/>
-            <a:ext cx="1204579" cy="1204579"/>
+            <a:off x="5514668" y="1231982"/>
+            <a:ext cx="6323371" cy="4215581"/>
           </a:xfrm>
           <a:prstGeom prst="rect">
             <a:avLst/>
@@ -7591,6 +8665,11 @@
         </p:spPr>
       </p:pic>
     </p:spTree>
+    <p:extLst>
+      <p:ext uri="{BB962C8B-B14F-4D97-AF65-F5344CB8AC3E}">
+        <p14:creationId xmlns:p14="http://schemas.microsoft.com/office/powerpoint/2010/main" val="3940522389"/>
+      </p:ext>
+    </p:extLst>
   </p:cSld>
   <p:clrMapOvr>
     <a:masterClrMapping/>
